--- a/docs/FoundYourThing_IdeaQuest2026.pptx
+++ b/docs/FoundYourThing_IdeaQuest2026.pptx
@@ -3093,7 +3093,7 @@
     <p:bg>
       <p:bgPr>
         <a:solidFill>
-          <a:srgbClr val="F4F7FB"/>
+          <a:srgbClr val="1B4D89"/>
         </a:solidFill>
         <a:effectLst/>
       </p:bgPr>
@@ -3113,8 +3113,8 @@
         </p:nvSpPr>
         <p:spPr>
           <a:xfrm>
-            <a:off x="0" y="0"/>
-            <a:ext cx="12188952" cy="164592"/>
+            <a:off x="0" y="6309360"/>
+            <a:ext cx="12191695" cy="548640"/>
           </a:xfrm>
           <a:prstGeom prst="rect">
             <a:avLst/>
@@ -3150,14 +3150,100 @@
       </p:sp>
       <p:sp>
         <p:nvSpPr>
-          <p:cNvPr id="3" name="TextBox 2"/>
+          <p:cNvPr id="3" name="Oval 2"/>
+          <p:cNvSpPr/>
+          <p:nvPr/>
+        </p:nvSpPr>
+        <p:spPr>
+          <a:xfrm>
+            <a:off x="9601200" y="731520"/>
+            <a:ext cx="2011680" cy="2011680"/>
+          </a:xfrm>
+          <a:prstGeom prst="ellipse">
+            <a:avLst/>
+          </a:prstGeom>
+          <a:solidFill>
+            <a:srgbClr val="E6F0FF"/>
+          </a:solidFill>
+          <a:ln>
+            <a:noFill/>
+          </a:ln>
+        </p:spPr>
+        <p:style>
+          <a:lnRef idx="1">
+            <a:schemeClr val="accent1"/>
+          </a:lnRef>
+          <a:fillRef idx="3">
+            <a:schemeClr val="accent1"/>
+          </a:fillRef>
+          <a:effectRef idx="2">
+            <a:schemeClr val="accent1"/>
+          </a:effectRef>
+          <a:fontRef idx="minor">
+            <a:schemeClr val="lt1"/>
+          </a:fontRef>
+        </p:style>
+        <p:txBody>
+          <a:bodyPr rtlCol="0" anchor="ctr"/>
+          <a:lstStyle/>
+          <a:p>
+            <a:pPr algn="ctr"/>
+          </a:p>
+        </p:txBody>
+      </p:sp>
+      <p:sp>
+        <p:nvSpPr>
+          <p:cNvPr id="4" name="Oval 3"/>
+          <p:cNvSpPr/>
+          <p:nvPr/>
+        </p:nvSpPr>
+        <p:spPr>
+          <a:xfrm>
+            <a:off x="457200" y="4114800"/>
+            <a:ext cx="1645920" cy="1645920"/>
+          </a:xfrm>
+          <a:prstGeom prst="ellipse">
+            <a:avLst/>
+          </a:prstGeom>
+          <a:solidFill>
+            <a:srgbClr val="D6F6F5"/>
+          </a:solidFill>
+          <a:ln>
+            <a:noFill/>
+          </a:ln>
+        </p:spPr>
+        <p:style>
+          <a:lnRef idx="1">
+            <a:schemeClr val="accent1"/>
+          </a:lnRef>
+          <a:fillRef idx="3">
+            <a:schemeClr val="accent1"/>
+          </a:fillRef>
+          <a:effectRef idx="2">
+            <a:schemeClr val="accent1"/>
+          </a:effectRef>
+          <a:fontRef idx="minor">
+            <a:schemeClr val="lt1"/>
+          </a:fontRef>
+        </p:style>
+        <p:txBody>
+          <a:bodyPr rtlCol="0" anchor="ctr"/>
+          <a:lstStyle/>
+          <a:p>
+            <a:pPr algn="ctr"/>
+          </a:p>
+        </p:txBody>
+      </p:sp>
+      <p:sp>
+        <p:nvSpPr>
+          <p:cNvPr id="5" name="TextBox 4"/>
           <p:cNvSpPr txBox="1"/>
           <p:nvPr/>
         </p:nvSpPr>
         <p:spPr>
           <a:xfrm>
-            <a:off x="731520" y="1463040"/>
-            <a:ext cx="10515600" cy="1371600"/>
+            <a:off x="822960" y="1371600"/>
+            <a:ext cx="10515600" cy="1097280"/>
           </a:xfrm>
           <a:prstGeom prst="rect">
             <a:avLst/>
@@ -3171,9 +3257,9 @@
           <a:lstStyle/>
           <a:p>
             <a:pPr algn="ctr">
-              <a:defRPr sz="4400" b="1">
-                <a:solidFill>
-                  <a:srgbClr val="1B4D89"/>
+              <a:defRPr sz="4800" b="1">
+                <a:solidFill>
+                  <a:srgbClr val="FFFFFF"/>
                 </a:solidFill>
               </a:defRPr>
             </a:pPr>
@@ -3185,82 +3271,14 @@
       </p:sp>
       <p:sp>
         <p:nvSpPr>
-          <p:cNvPr id="4" name="TextBox 3"/>
+          <p:cNvPr id="6" name="TextBox 5"/>
           <p:cNvSpPr txBox="1"/>
           <p:nvPr/>
         </p:nvSpPr>
         <p:spPr>
           <a:xfrm>
-            <a:off x="731520" y="2651760"/>
-            <a:ext cx="10515600" cy="1097280"/>
-          </a:xfrm>
-          <a:prstGeom prst="rect">
-            <a:avLst/>
-          </a:prstGeom>
-          <a:noFill/>
-        </p:spPr>
-        <p:txBody>
-          <a:bodyPr wrap="square">
-            <a:spAutoFit/>
-          </a:bodyPr>
-          <a:lstStyle/>
-          <a:p>
-            <a:pPr algn="ctr">
-              <a:spcAft>
-                <a:spcPts val="400"/>
-              </a:spcAft>
-              <a:defRPr sz="1800">
-                <a:solidFill>
-                  <a:srgbClr val="102A43"/>
-                </a:solidFill>
-              </a:defRPr>
-            </a:pPr>
-            <a:r>
-              <a:t>AI-Powered Privacy-First Campus Lost &amp; Found System</a:t>
-            </a:r>
-          </a:p>
-          <a:p>
-            <a:pPr algn="ctr">
-              <a:spcAft>
-                <a:spcPts val="400"/>
-              </a:spcAft>
-              <a:defRPr sz="1500">
-                <a:solidFill>
-                  <a:srgbClr val="627D98"/>
-                </a:solidFill>
-              </a:defRPr>
-            </a:pPr>
-            <a:r>
-              <a:t>(Lost on campus. Found by intelligence.)</a:t>
-            </a:r>
-          </a:p>
-          <a:p>
-            <a:pPr algn="ctr">
-              <a:spcAft>
-                <a:spcPts val="400"/>
-              </a:spcAft>
-              <a:defRPr sz="1500">
-                <a:solidFill>
-                  <a:srgbClr val="627D98"/>
-                </a:solidFill>
-              </a:defRPr>
-            </a:pPr>
-            <a:r>
-              <a:t>(Campus lost &amp; found, reimagined for students.)</a:t>
-            </a:r>
-          </a:p>
-        </p:txBody>
-      </p:sp>
-      <p:sp>
-        <p:nvSpPr>
-          <p:cNvPr id="5" name="TextBox 4"/>
-          <p:cNvSpPr txBox="1"/>
-          <p:nvPr/>
-        </p:nvSpPr>
-        <p:spPr>
-          <a:xfrm>
-            <a:off x="731520" y="4389120"/>
-            <a:ext cx="10515600" cy="1645920"/>
+            <a:off x="1097280" y="2468880"/>
+            <a:ext cx="10058400" cy="1280160"/>
           </a:xfrm>
           <a:prstGeom prst="rect">
             <a:avLst/>
@@ -3274,83 +3292,82 @@
           <a:lstStyle/>
           <a:p>
             <a:pPr algn="ctr">
-              <a:spcAft>
-                <a:spcPts val="300"/>
-              </a:spcAft>
-              <a:defRPr sz="1400">
-                <a:solidFill>
-                  <a:srgbClr val="102A43"/>
+              <a:defRPr sz="2000">
+                <a:solidFill>
+                  <a:srgbClr val="FFFFFF"/>
                 </a:solidFill>
               </a:defRPr>
             </a:pPr>
             <a:r>
-              <a:t>Presented by: Meda Sai Nihal</a:t>
+              <a:t>AI-Powered Privacy-First Campus Lost &amp; Found</a:t>
             </a:r>
           </a:p>
           <a:p>
             <a:pPr algn="ctr">
-              <a:spcAft>
-                <a:spcPts val="300"/>
-              </a:spcAft>
-              <a:defRPr sz="1400">
-                <a:solidFill>
-                  <a:srgbClr val="102A43"/>
+              <a:defRPr sz="1600">
+                <a:solidFill>
+                  <a:srgbClr val="D6F6F5"/>
                 </a:solidFill>
               </a:defRPr>
             </a:pPr>
             <a:r>
-              <a:t>Department: CSE  |  Specialization: AI &amp; Data Science</a:t>
-            </a:r>
-          </a:p>
+              <a:t>(Lost on campus. Found by intelligence.)</a:t>
+            </a:r>
+          </a:p>
+        </p:txBody>
+      </p:sp>
+      <p:sp>
+        <p:nvSpPr>
+          <p:cNvPr id="7" name="TextBox 6"/>
+          <p:cNvSpPr txBox="1"/>
+          <p:nvPr/>
+        </p:nvSpPr>
+        <p:spPr>
+          <a:xfrm>
+            <a:off x="914400" y="4114800"/>
+            <a:ext cx="10332720" cy="1645920"/>
+          </a:xfrm>
+          <a:prstGeom prst="rect">
+            <a:avLst/>
+          </a:prstGeom>
+          <a:noFill/>
+        </p:spPr>
+        <p:txBody>
+          <a:bodyPr wrap="none">
+            <a:spAutoFit/>
+          </a:bodyPr>
+          <a:lstStyle/>
           <a:p>
             <a:pPr algn="ctr">
-              <a:spcAft>
-                <a:spcPts val="300"/>
-              </a:spcAft>
-              <a:defRPr sz="1400">
-                <a:solidFill>
-                  <a:srgbClr val="102A43"/>
+              <a:defRPr sz="1500">
+                <a:solidFill>
+                  <a:srgbClr val="FFFFFF"/>
                 </a:solidFill>
               </a:defRPr>
             </a:pPr>
             <a:r>
-              <a:t>Project Category: AI &amp; Mobile-based Smart Campus Application</a:t>
+              <a:t>Meda Sai Nihal  ·  CSE  ·  AI &amp; Data Science</a:t>
             </a:r>
           </a:p>
           <a:p>
             <a:pPr algn="ctr">
-              <a:spcAft>
-                <a:spcPts val="300"/>
-              </a:spcAft>
-              <a:defRPr sz="1400">
-                <a:solidFill>
-                  <a:srgbClr val="102A43"/>
+              <a:defRPr sz="1500">
+                <a:solidFill>
+                  <a:srgbClr val="FFFFFF"/>
                 </a:solidFill>
               </a:defRPr>
             </a:pPr>
             <a:r>
-              <a:t>SDG 11: Sustainable Cities and Communities</a:t>
-            </a:r>
-          </a:p>
-          <a:p>
-            <a:pPr algn="ctr">
-              <a:spcAft>
-                <a:spcPts val="300"/>
-              </a:spcAft>
-              <a:defRPr sz="1400">
-                <a:solidFill>
-                  <a:srgbClr val="102A43"/>
-                </a:solidFill>
-              </a:defRPr>
-            </a:pPr>
-            <a:r>
-              <a:t>Idea Quest 2026</a:t>
+              <a:t>SDG 11  ·  Idea Quest 2026</a:t>
             </a:r>
           </a:p>
         </p:txBody>
       </p:sp>
     </p:spTree>
   </p:cSld>
+  <p:transition spd="med">
+    <p:fade/>
+  </p:transition>
   <p:clrMapOvr>
     <a:masterClrMapping/>
   </p:clrMapOvr>
@@ -3377,14 +3394,57 @@
       <p:grpSpPr/>
       <p:sp>
         <p:nvSpPr>
-          <p:cNvPr id="2" name="TextBox 1"/>
+          <p:cNvPr id="2" name="Rectangle 1"/>
+          <p:cNvSpPr/>
+          <p:nvPr/>
+        </p:nvSpPr>
+        <p:spPr>
+          <a:xfrm>
+            <a:off x="0" y="0"/>
+            <a:ext cx="12191695" cy="109728"/>
+          </a:xfrm>
+          <a:prstGeom prst="rect">
+            <a:avLst/>
+          </a:prstGeom>
+          <a:solidFill>
+            <a:srgbClr val="0EA5A4"/>
+          </a:solidFill>
+          <a:ln>
+            <a:noFill/>
+          </a:ln>
+        </p:spPr>
+        <p:style>
+          <a:lnRef idx="1">
+            <a:schemeClr val="accent1"/>
+          </a:lnRef>
+          <a:fillRef idx="3">
+            <a:schemeClr val="accent1"/>
+          </a:fillRef>
+          <a:effectRef idx="2">
+            <a:schemeClr val="accent1"/>
+          </a:effectRef>
+          <a:fontRef idx="minor">
+            <a:schemeClr val="lt1"/>
+          </a:fontRef>
+        </p:style>
+        <p:txBody>
+          <a:bodyPr rtlCol="0" anchor="ctr"/>
+          <a:lstStyle/>
+          <a:p>
+            <a:pPr algn="ctr"/>
+          </a:p>
+        </p:txBody>
+      </p:sp>
+      <p:sp>
+        <p:nvSpPr>
+          <p:cNvPr id="3" name="TextBox 2"/>
           <p:cNvSpPr txBox="1"/>
           <p:nvPr/>
         </p:nvSpPr>
         <p:spPr>
           <a:xfrm>
-            <a:off x="548640" y="320040"/>
-            <a:ext cx="11064240" cy="1097280"/>
+            <a:off x="594360" y="320040"/>
+            <a:ext cx="10972800" cy="1005840"/>
           </a:xfrm>
           <a:prstGeom prst="rect">
             <a:avLst/>
@@ -3392,60 +3452,103 @@
           <a:noFill/>
         </p:spPr>
         <p:txBody>
-          <a:bodyPr wrap="square">
+          <a:bodyPr wrap="none">
             <a:spAutoFit/>
           </a:bodyPr>
           <a:lstStyle/>
           <a:p>
             <a:pPr>
-              <a:defRPr sz="3200" b="1">
+              <a:defRPr sz="3000" b="1">
                 <a:solidFill>
                   <a:srgbClr val="1B4D89"/>
                 </a:solidFill>
               </a:defRPr>
             </a:pPr>
             <a:r>
-              <a:t>Slide 10: Prototype Screenshots</a:t>
+              <a:t>Prototype Screenshot 2</a:t>
             </a:r>
           </a:p>
           <a:p>
             <a:pPr>
-              <a:spcBef>
-                <a:spcPts val="600"/>
-              </a:spcBef>
-              <a:defRPr sz="1600">
+              <a:defRPr sz="1400">
                 <a:solidFill>
                   <a:srgbClr val="627D98"/>
                 </a:solidFill>
               </a:defRPr>
             </a:pPr>
             <a:r>
-              <a:t>Insert your app photos here</a:t>
-            </a:r>
-          </a:p>
-        </p:txBody>
-      </p:sp>
-      <p:sp>
-        <p:nvSpPr>
-          <p:cNvPr id="3" name="Rectangle 2"/>
+              <a:t>Insert your app image here</a:t>
+            </a:r>
+          </a:p>
+        </p:txBody>
+      </p:sp>
+      <p:sp>
+        <p:nvSpPr>
+          <p:cNvPr id="4" name="Rounded Rectangle 3"/>
           <p:cNvSpPr/>
           <p:nvPr/>
         </p:nvSpPr>
         <p:spPr>
           <a:xfrm>
-            <a:off x="1097280" y="1645920"/>
-            <a:ext cx="9966960" cy="4389120"/>
-          </a:xfrm>
-          <a:prstGeom prst="rect">
+            <a:off x="1371600" y="1508760"/>
+            <a:ext cx="9418320" cy="4434840"/>
+          </a:xfrm>
+          <a:prstGeom prst="roundRect">
             <a:avLst/>
           </a:prstGeom>
           <a:solidFill>
             <a:srgbClr val="FFFFFF"/>
+          </a:solidFill>
+          <a:ln w="19050">
+            <a:solidFill>
+              <a:srgbClr val="0EA5A4"/>
+            </a:solidFill>
+          </a:ln>
+        </p:spPr>
+        <p:style>
+          <a:lnRef idx="1">
+            <a:schemeClr val="accent1"/>
+          </a:lnRef>
+          <a:fillRef idx="3">
+            <a:schemeClr val="accent1"/>
+          </a:fillRef>
+          <a:effectRef idx="2">
+            <a:schemeClr val="accent1"/>
+          </a:effectRef>
+          <a:fontRef idx="minor">
+            <a:schemeClr val="lt1"/>
+          </a:fontRef>
+        </p:style>
+        <p:txBody>
+          <a:bodyPr rtlCol="0" anchor="ctr"/>
+          <a:lstStyle/>
+          <a:p>
+            <a:pPr algn="ctr"/>
+          </a:p>
+        </p:txBody>
+      </p:sp>
+      <p:sp>
+        <p:nvSpPr>
+          <p:cNvPr id="5" name="Rectangle 4"/>
+          <p:cNvSpPr/>
+          <p:nvPr/>
+        </p:nvSpPr>
+        <p:spPr>
+          <a:xfrm>
+            <a:off x="1691640" y="1828800"/>
+            <a:ext cx="8778240" cy="3794760"/>
+          </a:xfrm>
+          <a:prstGeom prst="rect">
+            <a:avLst/>
+          </a:prstGeom>
+          <a:solidFill>
+            <a:srgbClr val="E6F0FF"/>
           </a:solidFill>
           <a:ln w="25400">
             <a:solidFill>
               <a:srgbClr val="0EA5A4"/>
             </a:solidFill>
+            <a:prstDash val="sysDash"/>
           </a:ln>
         </p:spPr>
         <p:style>
@@ -3472,54 +3575,14 @@
       </p:sp>
       <p:sp>
         <p:nvSpPr>
-          <p:cNvPr id="4" name="TextBox 3"/>
+          <p:cNvPr id="6" name="TextBox 5"/>
           <p:cNvSpPr txBox="1"/>
           <p:nvPr/>
         </p:nvSpPr>
         <p:spPr>
           <a:xfrm>
-            <a:off x="1280160" y="3200400"/>
-            <a:ext cx="9601200" cy="1097280"/>
-          </a:xfrm>
-          <a:prstGeom prst="rect">
-            <a:avLst/>
-          </a:prstGeom>
-          <a:noFill/>
-        </p:spPr>
-        <p:txBody>
-          <a:bodyPr wrap="none" anchor="ctr">
-            <a:spAutoFit/>
-          </a:bodyPr>
-          <a:lstStyle/>
-          <a:p>
-            <a:pPr algn="ctr">
-              <a:defRPr sz="2200">
-                <a:solidFill>
-                  <a:srgbClr val="627D98"/>
-                </a:solidFill>
-              </a:defRPr>
-            </a:pPr>
-            <a:r>
-              <a:t>[ ADD SCREENSHOT HERE ]</a:t>
-            </a:r>
-            <a:br/>
-            <a:br/>
-            <a:r>
-              <a:t>Suggested: Login / Home / Report Lost / AI Match / Claim Flow</a:t>
-            </a:r>
-          </a:p>
-        </p:txBody>
-      </p:sp>
-      <p:sp>
-        <p:nvSpPr>
-          <p:cNvPr id="5" name="TextBox 4"/>
-          <p:cNvSpPr txBox="1"/>
-          <p:nvPr/>
-        </p:nvSpPr>
-        <p:spPr>
-          <a:xfrm>
-            <a:off x="548640" y="6263640"/>
-            <a:ext cx="10972800" cy="365760"/>
+            <a:off x="2286000" y="3291840"/>
+            <a:ext cx="7589520" cy="1097280"/>
           </a:xfrm>
           <a:prstGeom prst="rect">
             <a:avLst/>
@@ -3532,21 +3595,59 @@
           </a:bodyPr>
           <a:lstStyle/>
           <a:p>
-            <a:pPr>
-              <a:defRPr sz="1100">
+            <a:pPr algn="ctr">
+              <a:defRPr sz="2800" b="1">
                 <a:solidFill>
                   <a:srgbClr val="627D98"/>
                 </a:solidFill>
               </a:defRPr>
             </a:pPr>
             <a:r>
-              <a:t>FoundYourThing  |  Replace placeholder with your prototype image</a:t>
+              <a:t>[ ADD PHOTO HERE ]</a:t>
+            </a:r>
+          </a:p>
+        </p:txBody>
+      </p:sp>
+      <p:sp>
+        <p:nvSpPr>
+          <p:cNvPr id="7" name="TextBox 6"/>
+          <p:cNvSpPr txBox="1"/>
+          <p:nvPr/>
+        </p:nvSpPr>
+        <p:spPr>
+          <a:xfrm>
+            <a:off x="2286000" y="5989320"/>
+            <a:ext cx="7589520" cy="365760"/>
+          </a:xfrm>
+          <a:prstGeom prst="rect">
+            <a:avLst/>
+          </a:prstGeom>
+          <a:noFill/>
+        </p:spPr>
+        <p:txBody>
+          <a:bodyPr wrap="none">
+            <a:spAutoFit/>
+          </a:bodyPr>
+          <a:lstStyle/>
+          <a:p>
+            <a:pPr algn="ctr">
+              <a:defRPr sz="1300">
+                <a:solidFill>
+                  <a:srgbClr val="627D98"/>
+                </a:solidFill>
+              </a:defRPr>
+            </a:pPr>
+            <a:r>
+              <a:t>AI Match · Claim flow · Contact share</a:t>
             </a:r>
           </a:p>
         </p:txBody>
       </p:sp>
     </p:spTree>
   </p:cSld>
+  <p:transition spd="med">
+    <p:fade/>
+  </p:transition>
   <p:clrMapOvr>
     <a:masterClrMapping/>
   </p:clrMapOvr>
@@ -3559,7 +3660,7 @@
     <p:bg>
       <p:bgPr>
         <a:solidFill>
-          <a:srgbClr val="FFFFFF"/>
+          <a:srgbClr val="F4F7FB"/>
         </a:solidFill>
         <a:effectLst/>
       </p:bgPr>
@@ -3573,14 +3674,215 @@
       <p:grpSpPr/>
       <p:sp>
         <p:nvSpPr>
-          <p:cNvPr id="2" name="TextBox 1"/>
+          <p:cNvPr id="2" name="Rectangle 1"/>
+          <p:cNvSpPr/>
+          <p:nvPr/>
+        </p:nvSpPr>
+        <p:spPr>
+          <a:xfrm>
+            <a:off x="0" y="0"/>
+            <a:ext cx="12191695" cy="109728"/>
+          </a:xfrm>
+          <a:prstGeom prst="rect">
+            <a:avLst/>
+          </a:prstGeom>
+          <a:solidFill>
+            <a:srgbClr val="0EA5A4"/>
+          </a:solidFill>
+          <a:ln>
+            <a:noFill/>
+          </a:ln>
+        </p:spPr>
+        <p:style>
+          <a:lnRef idx="1">
+            <a:schemeClr val="accent1"/>
+          </a:lnRef>
+          <a:fillRef idx="3">
+            <a:schemeClr val="accent1"/>
+          </a:fillRef>
+          <a:effectRef idx="2">
+            <a:schemeClr val="accent1"/>
+          </a:effectRef>
+          <a:fontRef idx="minor">
+            <a:schemeClr val="lt1"/>
+          </a:fontRef>
+        </p:style>
+        <p:txBody>
+          <a:bodyPr rtlCol="0" anchor="ctr"/>
+          <a:lstStyle/>
+          <a:p>
+            <a:pPr algn="ctr"/>
+          </a:p>
+        </p:txBody>
+      </p:sp>
+      <p:sp>
+        <p:nvSpPr>
+          <p:cNvPr id="3" name="TextBox 2"/>
           <p:cNvSpPr txBox="1"/>
           <p:nvPr/>
         </p:nvSpPr>
         <p:spPr>
           <a:xfrm>
-            <a:off x="548640" y="320040"/>
-            <a:ext cx="11064240" cy="1097280"/>
+            <a:off x="594360" y="320040"/>
+            <a:ext cx="10972800" cy="1005840"/>
+          </a:xfrm>
+          <a:prstGeom prst="rect">
+            <a:avLst/>
+          </a:prstGeom>
+          <a:noFill/>
+        </p:spPr>
+        <p:txBody>
+          <a:bodyPr wrap="none">
+            <a:spAutoFit/>
+          </a:bodyPr>
+          <a:lstStyle/>
+          <a:p>
+            <a:pPr>
+              <a:defRPr sz="3000" b="1">
+                <a:solidFill>
+                  <a:srgbClr val="1B4D89"/>
+                </a:solidFill>
+              </a:defRPr>
+            </a:pPr>
+            <a:r>
+              <a:t>Problem Statement</a:t>
+            </a:r>
+          </a:p>
+          <a:p>
+            <a:pPr>
+              <a:defRPr sz="1400">
+                <a:solidFill>
+                  <a:srgbClr val="627D98"/>
+                </a:solidFill>
+              </a:defRPr>
+            </a:pPr>
+            <a:r>
+              <a:t>Campus lost &amp; found is broken today</a:t>
+            </a:r>
+          </a:p>
+        </p:txBody>
+      </p:sp>
+      <p:sp>
+        <p:nvSpPr>
+          <p:cNvPr id="4" name="Rounded Rectangle 3"/>
+          <p:cNvSpPr/>
+          <p:nvPr/>
+        </p:nvSpPr>
+        <p:spPr>
+          <a:xfrm>
+            <a:off x="640080" y="1554480"/>
+            <a:ext cx="2514600" cy="1920240"/>
+          </a:xfrm>
+          <a:prstGeom prst="roundRect">
+            <a:avLst/>
+          </a:prstGeom>
+          <a:solidFill>
+            <a:srgbClr val="FFFFFF"/>
+          </a:solidFill>
+          <a:ln w="19050">
+            <a:solidFill>
+              <a:srgbClr val="E6F0FF"/>
+            </a:solidFill>
+          </a:ln>
+        </p:spPr>
+        <p:style>
+          <a:lnRef idx="1">
+            <a:schemeClr val="accent1"/>
+          </a:lnRef>
+          <a:fillRef idx="3">
+            <a:schemeClr val="accent1"/>
+          </a:fillRef>
+          <a:effectRef idx="2">
+            <a:schemeClr val="accent1"/>
+          </a:effectRef>
+          <a:fontRef idx="minor">
+            <a:schemeClr val="lt1"/>
+          </a:fontRef>
+        </p:style>
+        <p:txBody>
+          <a:bodyPr rtlCol="0" anchor="ctr"/>
+          <a:lstStyle/>
+          <a:p>
+            <a:pPr algn="ctr"/>
+          </a:p>
+        </p:txBody>
+      </p:sp>
+      <p:sp>
+        <p:nvSpPr>
+          <p:cNvPr id="5" name="TextBox 4"/>
+          <p:cNvSpPr txBox="1"/>
+          <p:nvPr/>
+        </p:nvSpPr>
+        <p:spPr>
+          <a:xfrm>
+            <a:off x="640080" y="1691639"/>
+            <a:ext cx="2514600" cy="502920"/>
+          </a:xfrm>
+          <a:prstGeom prst="rect">
+            <a:avLst/>
+          </a:prstGeom>
+          <a:noFill/>
+        </p:spPr>
+        <p:txBody>
+          <a:bodyPr wrap="none">
+            <a:spAutoFit/>
+          </a:bodyPr>
+          <a:lstStyle/>
+          <a:p>
+            <a:pPr algn="ctr">
+              <a:defRPr sz="2800"/>
+            </a:pPr>
+            <a:r>
+              <a:t>📱</a:t>
+            </a:r>
+          </a:p>
+        </p:txBody>
+      </p:sp>
+      <p:sp>
+        <p:nvSpPr>
+          <p:cNvPr id="6" name="TextBox 5"/>
+          <p:cNvSpPr txBox="1"/>
+          <p:nvPr/>
+        </p:nvSpPr>
+        <p:spPr>
+          <a:xfrm>
+            <a:off x="731519" y="2148840"/>
+            <a:ext cx="2331720" cy="502920"/>
+          </a:xfrm>
+          <a:prstGeom prst="rect">
+            <a:avLst/>
+          </a:prstGeom>
+          <a:noFill/>
+        </p:spPr>
+        <p:txBody>
+          <a:bodyPr wrap="none">
+            <a:spAutoFit/>
+          </a:bodyPr>
+          <a:lstStyle/>
+          <a:p>
+            <a:pPr algn="ctr">
+              <a:defRPr b="1" sz="1500">
+                <a:solidFill>
+                  <a:srgbClr val="1B4D89"/>
+                </a:solidFill>
+              </a:defRPr>
+            </a:pPr>
+            <a:r>
+              <a:t>Lost Daily</a:t>
+            </a:r>
+          </a:p>
+        </p:txBody>
+      </p:sp>
+      <p:sp>
+        <p:nvSpPr>
+          <p:cNvPr id="7" name="TextBox 6"/>
+          <p:cNvSpPr txBox="1"/>
+          <p:nvPr/>
+        </p:nvSpPr>
+        <p:spPr>
+          <a:xfrm>
+            <a:off x="731519" y="2606039"/>
+            <a:ext cx="2331720" cy="731520"/>
           </a:xfrm>
           <a:prstGeom prst="rect">
             <a:avLst/>
@@ -3593,44 +3895,140 @@
           </a:bodyPr>
           <a:lstStyle/>
           <a:p>
-            <a:pPr>
-              <a:defRPr sz="3200" b="1">
+            <a:pPr algn="ctr">
+              <a:defRPr sz="1200">
+                <a:solidFill>
+                  <a:srgbClr val="627D98"/>
+                </a:solidFill>
+              </a:defRPr>
+            </a:pPr>
+            <a:r>
+              <a:t>Phones, watches, IDs go missing</a:t>
+            </a:r>
+          </a:p>
+        </p:txBody>
+      </p:sp>
+      <p:sp>
+        <p:nvSpPr>
+          <p:cNvPr id="8" name="Rounded Rectangle 7"/>
+          <p:cNvSpPr/>
+          <p:nvPr/>
+        </p:nvSpPr>
+        <p:spPr>
+          <a:xfrm>
+            <a:off x="3246120" y="1554480"/>
+            <a:ext cx="2514600" cy="1920240"/>
+          </a:xfrm>
+          <a:prstGeom prst="roundRect">
+            <a:avLst/>
+          </a:prstGeom>
+          <a:solidFill>
+            <a:srgbClr val="FFFFFF"/>
+          </a:solidFill>
+          <a:ln w="19050">
+            <a:solidFill>
+              <a:srgbClr val="E6F0FF"/>
+            </a:solidFill>
+          </a:ln>
+        </p:spPr>
+        <p:style>
+          <a:lnRef idx="1">
+            <a:schemeClr val="accent1"/>
+          </a:lnRef>
+          <a:fillRef idx="3">
+            <a:schemeClr val="accent1"/>
+          </a:fillRef>
+          <a:effectRef idx="2">
+            <a:schemeClr val="accent1"/>
+          </a:effectRef>
+          <a:fontRef idx="minor">
+            <a:schemeClr val="lt1"/>
+          </a:fontRef>
+        </p:style>
+        <p:txBody>
+          <a:bodyPr rtlCol="0" anchor="ctr"/>
+          <a:lstStyle/>
+          <a:p>
+            <a:pPr algn="ctr"/>
+          </a:p>
+        </p:txBody>
+      </p:sp>
+      <p:sp>
+        <p:nvSpPr>
+          <p:cNvPr id="9" name="TextBox 8"/>
+          <p:cNvSpPr txBox="1"/>
+          <p:nvPr/>
+        </p:nvSpPr>
+        <p:spPr>
+          <a:xfrm>
+            <a:off x="3246120" y="1691639"/>
+            <a:ext cx="2514600" cy="502920"/>
+          </a:xfrm>
+          <a:prstGeom prst="rect">
+            <a:avLst/>
+          </a:prstGeom>
+          <a:noFill/>
+        </p:spPr>
+        <p:txBody>
+          <a:bodyPr wrap="none">
+            <a:spAutoFit/>
+          </a:bodyPr>
+          <a:lstStyle/>
+          <a:p>
+            <a:pPr algn="ctr">
+              <a:defRPr sz="2800"/>
+            </a:pPr>
+            <a:r>
+              <a:t>🐌</a:t>
+            </a:r>
+          </a:p>
+        </p:txBody>
+      </p:sp>
+      <p:sp>
+        <p:nvSpPr>
+          <p:cNvPr id="10" name="TextBox 9"/>
+          <p:cNvSpPr txBox="1"/>
+          <p:nvPr/>
+        </p:nvSpPr>
+        <p:spPr>
+          <a:xfrm>
+            <a:off x="3337560" y="2148840"/>
+            <a:ext cx="2331720" cy="502920"/>
+          </a:xfrm>
+          <a:prstGeom prst="rect">
+            <a:avLst/>
+          </a:prstGeom>
+          <a:noFill/>
+        </p:spPr>
+        <p:txBody>
+          <a:bodyPr wrap="none">
+            <a:spAutoFit/>
+          </a:bodyPr>
+          <a:lstStyle/>
+          <a:p>
+            <a:pPr algn="ctr">
+              <a:defRPr b="1" sz="1500">
                 <a:solidFill>
                   <a:srgbClr val="1B4D89"/>
                 </a:solidFill>
               </a:defRPr>
             </a:pPr>
             <a:r>
-              <a:t>Slide 2: Problem Statement</a:t>
-            </a:r>
-          </a:p>
-          <a:p>
-            <a:pPr>
-              <a:spcBef>
-                <a:spcPts val="600"/>
-              </a:spcBef>
-              <a:defRPr sz="1600">
-                <a:solidFill>
-                  <a:srgbClr val="627D98"/>
-                </a:solidFill>
-              </a:defRPr>
-            </a:pPr>
-            <a:r>
-              <a:t>Why campus lost &amp; found needs a digital solution</a:t>
-            </a:r>
-          </a:p>
-        </p:txBody>
-      </p:sp>
-      <p:sp>
-        <p:nvSpPr>
-          <p:cNvPr id="3" name="TextBox 2"/>
+              <a:t>Too Slow</a:t>
+            </a:r>
+          </a:p>
+        </p:txBody>
+      </p:sp>
+      <p:sp>
+        <p:nvSpPr>
+          <p:cNvPr id="11" name="TextBox 10"/>
           <p:cNvSpPr txBox="1"/>
           <p:nvPr/>
         </p:nvSpPr>
         <p:spPr>
           <a:xfrm>
-            <a:off x="685800" y="1417320"/>
-            <a:ext cx="10789920" cy="5029200"/>
+            <a:off x="3337560" y="2606039"/>
+            <a:ext cx="2331720" cy="731520"/>
           </a:xfrm>
           <a:prstGeom prst="rect">
             <a:avLst/>
@@ -3643,107 +4041,74 @@
           </a:bodyPr>
           <a:lstStyle/>
           <a:p>
-            <a:pPr>
-              <a:spcAft>
-                <a:spcPts val="1000"/>
-              </a:spcAft>
-              <a:defRPr sz="2000">
-                <a:solidFill>
-                  <a:srgbClr val="102A43"/>
+            <a:pPr algn="ctr">
+              <a:defRPr sz="1200">
+                <a:solidFill>
+                  <a:srgbClr val="627D98"/>
                 </a:solidFill>
               </a:defRPr>
             </a:pPr>
             <a:r>
-              <a:t>Students frequently lose valuable items on campus — phones, watches, wallets, ID cards, and bags.</a:t>
-            </a:r>
-          </a:p>
-          <a:p>
-            <a:pPr>
-              <a:spcAft>
-                <a:spcPts val="1000"/>
-              </a:spcAft>
-              <a:defRPr sz="2000">
-                <a:solidFill>
-                  <a:srgbClr val="102A43"/>
-                </a:solidFill>
-              </a:defRPr>
-            </a:pPr>
-            <a:r>
-              <a:t>Common recovery methods (notice boards, WhatsApp groups, word of mouth) are slow and unstructured.</a:t>
-            </a:r>
-          </a:p>
-          <a:p>
-            <a:pPr>
-              <a:spcAft>
-                <a:spcPts val="1000"/>
-              </a:spcAft>
-              <a:defRPr sz="2000">
-                <a:solidFill>
-                  <a:srgbClr val="102A43"/>
-                </a:solidFill>
-              </a:defRPr>
-            </a:pPr>
-            <a:r>
-              <a:t>Manual matching depends on luck — two people must find each other without a central system.</a:t>
-            </a:r>
-          </a:p>
-          <a:p>
-            <a:pPr>
-              <a:spcAft>
-                <a:spcPts val="1000"/>
-              </a:spcAft>
-              <a:defRPr sz="2000">
-                <a:solidFill>
-                  <a:srgbClr val="102A43"/>
-                </a:solidFill>
-              </a:defRPr>
-            </a:pPr>
-            <a:r>
-              <a:t>Privacy risk: students often share phone numbers publicly while searching for lost items.</a:t>
-            </a:r>
-          </a:p>
-          <a:p>
-            <a:pPr>
-              <a:spcAft>
-                <a:spcPts val="1000"/>
-              </a:spcAft>
-              <a:defRPr sz="2000">
-                <a:solidFill>
-                  <a:srgbClr val="102A43"/>
-                </a:solidFill>
-              </a:defRPr>
-            </a:pPr>
-            <a:r>
-              <a:t>Low-value clutter (pens, pencils) makes traditional boards noisy and ineffective.</a:t>
-            </a:r>
-          </a:p>
-          <a:p>
-            <a:pPr>
-              <a:spcAft>
-                <a:spcPts val="1000"/>
-              </a:spcAft>
-              <a:defRPr sz="2000">
-                <a:solidFill>
-                  <a:srgbClr val="102A43"/>
-                </a:solidFill>
-              </a:defRPr>
-            </a:pPr>
-            <a:r>
-              <a:t>Result: delayed recovery, stress, replacement cost, and wasted student time.</a:t>
-            </a:r>
-          </a:p>
-        </p:txBody>
-      </p:sp>
-      <p:sp>
-        <p:nvSpPr>
-          <p:cNvPr id="4" name="TextBox 3"/>
+              <a:t>WhatsApp &amp; notice boards fail</a:t>
+            </a:r>
+          </a:p>
+        </p:txBody>
+      </p:sp>
+      <p:sp>
+        <p:nvSpPr>
+          <p:cNvPr id="12" name="Rounded Rectangle 11"/>
+          <p:cNvSpPr/>
+          <p:nvPr/>
+        </p:nvSpPr>
+        <p:spPr>
+          <a:xfrm>
+            <a:off x="5852160" y="1554480"/>
+            <a:ext cx="2514600" cy="1920240"/>
+          </a:xfrm>
+          <a:prstGeom prst="roundRect">
+            <a:avLst/>
+          </a:prstGeom>
+          <a:solidFill>
+            <a:srgbClr val="FFFFFF"/>
+          </a:solidFill>
+          <a:ln w="19050">
+            <a:solidFill>
+              <a:srgbClr val="E6F0FF"/>
+            </a:solidFill>
+          </a:ln>
+        </p:spPr>
+        <p:style>
+          <a:lnRef idx="1">
+            <a:schemeClr val="accent1"/>
+          </a:lnRef>
+          <a:fillRef idx="3">
+            <a:schemeClr val="accent1"/>
+          </a:fillRef>
+          <a:effectRef idx="2">
+            <a:schemeClr val="accent1"/>
+          </a:effectRef>
+          <a:fontRef idx="minor">
+            <a:schemeClr val="lt1"/>
+          </a:fontRef>
+        </p:style>
+        <p:txBody>
+          <a:bodyPr rtlCol="0" anchor="ctr"/>
+          <a:lstStyle/>
+          <a:p>
+            <a:pPr algn="ctr"/>
+          </a:p>
+        </p:txBody>
+      </p:sp>
+      <p:sp>
+        <p:nvSpPr>
+          <p:cNvPr id="13" name="TextBox 12"/>
           <p:cNvSpPr txBox="1"/>
           <p:nvPr/>
         </p:nvSpPr>
         <p:spPr>
           <a:xfrm>
-            <a:off x="548640" y="6263640"/>
-            <a:ext cx="10972800" cy="365760"/>
+            <a:off x="5852160" y="1691639"/>
+            <a:ext cx="2514600" cy="502920"/>
           </a:xfrm>
           <a:prstGeom prst="rect">
             <a:avLst/>
@@ -3756,15 +4121,279 @@
           </a:bodyPr>
           <a:lstStyle/>
           <a:p>
-            <a:pPr>
-              <a:defRPr sz="1100">
+            <a:pPr algn="ctr">
+              <a:defRPr sz="2800"/>
+            </a:pPr>
+            <a:r>
+              <a:t>🔓</a:t>
+            </a:r>
+          </a:p>
+        </p:txBody>
+      </p:sp>
+      <p:sp>
+        <p:nvSpPr>
+          <p:cNvPr id="14" name="TextBox 13"/>
+          <p:cNvSpPr txBox="1"/>
+          <p:nvPr/>
+        </p:nvSpPr>
+        <p:spPr>
+          <a:xfrm>
+            <a:off x="5943600" y="2148840"/>
+            <a:ext cx="2331720" cy="502920"/>
+          </a:xfrm>
+          <a:prstGeom prst="rect">
+            <a:avLst/>
+          </a:prstGeom>
+          <a:noFill/>
+        </p:spPr>
+        <p:txBody>
+          <a:bodyPr wrap="none">
+            <a:spAutoFit/>
+          </a:bodyPr>
+          <a:lstStyle/>
+          <a:p>
+            <a:pPr algn="ctr">
+              <a:defRPr b="1" sz="1500">
+                <a:solidFill>
+                  <a:srgbClr val="1B4D89"/>
+                </a:solidFill>
+              </a:defRPr>
+            </a:pPr>
+            <a:r>
+              <a:t>No Privacy</a:t>
+            </a:r>
+          </a:p>
+        </p:txBody>
+      </p:sp>
+      <p:sp>
+        <p:nvSpPr>
+          <p:cNvPr id="15" name="TextBox 14"/>
+          <p:cNvSpPr txBox="1"/>
+          <p:nvPr/>
+        </p:nvSpPr>
+        <p:spPr>
+          <a:xfrm>
+            <a:off x="5943600" y="2606039"/>
+            <a:ext cx="2331720" cy="731520"/>
+          </a:xfrm>
+          <a:prstGeom prst="rect">
+            <a:avLst/>
+          </a:prstGeom>
+          <a:noFill/>
+        </p:spPr>
+        <p:txBody>
+          <a:bodyPr wrap="square">
+            <a:spAutoFit/>
+          </a:bodyPr>
+          <a:lstStyle/>
+          <a:p>
+            <a:pPr algn="ctr">
+              <a:defRPr sz="1200">
                 <a:solidFill>
                   <a:srgbClr val="627D98"/>
                 </a:solidFill>
               </a:defRPr>
             </a:pPr>
             <a:r>
-              <a:t>FoundYourThing  |  github.com/sainihalmeda-ai/FoundYourThing</a:t>
+              <a:t>Phone numbers shared publicly</a:t>
+            </a:r>
+          </a:p>
+        </p:txBody>
+      </p:sp>
+      <p:sp>
+        <p:nvSpPr>
+          <p:cNvPr id="16" name="Rounded Rectangle 15"/>
+          <p:cNvSpPr/>
+          <p:nvPr/>
+        </p:nvSpPr>
+        <p:spPr>
+          <a:xfrm>
+            <a:off x="8458200" y="1554480"/>
+            <a:ext cx="2514600" cy="1920240"/>
+          </a:xfrm>
+          <a:prstGeom prst="roundRect">
+            <a:avLst/>
+          </a:prstGeom>
+          <a:solidFill>
+            <a:srgbClr val="FFFFFF"/>
+          </a:solidFill>
+          <a:ln w="19050">
+            <a:solidFill>
+              <a:srgbClr val="E6F0FF"/>
+            </a:solidFill>
+          </a:ln>
+        </p:spPr>
+        <p:style>
+          <a:lnRef idx="1">
+            <a:schemeClr val="accent1"/>
+          </a:lnRef>
+          <a:fillRef idx="3">
+            <a:schemeClr val="accent1"/>
+          </a:fillRef>
+          <a:effectRef idx="2">
+            <a:schemeClr val="accent1"/>
+          </a:effectRef>
+          <a:fontRef idx="minor">
+            <a:schemeClr val="lt1"/>
+          </a:fontRef>
+        </p:style>
+        <p:txBody>
+          <a:bodyPr rtlCol="0" anchor="ctr"/>
+          <a:lstStyle/>
+          <a:p>
+            <a:pPr algn="ctr"/>
+          </a:p>
+        </p:txBody>
+      </p:sp>
+      <p:sp>
+        <p:nvSpPr>
+          <p:cNvPr id="17" name="TextBox 16"/>
+          <p:cNvSpPr txBox="1"/>
+          <p:nvPr/>
+        </p:nvSpPr>
+        <p:spPr>
+          <a:xfrm>
+            <a:off x="8458200" y="1691639"/>
+            <a:ext cx="2514600" cy="502920"/>
+          </a:xfrm>
+          <a:prstGeom prst="rect">
+            <a:avLst/>
+          </a:prstGeom>
+          <a:noFill/>
+        </p:spPr>
+        <p:txBody>
+          <a:bodyPr wrap="none">
+            <a:spAutoFit/>
+          </a:bodyPr>
+          <a:lstStyle/>
+          <a:p>
+            <a:pPr algn="ctr">
+              <a:defRPr sz="2800"/>
+            </a:pPr>
+            <a:r>
+              <a:t>🗑️</a:t>
+            </a:r>
+          </a:p>
+        </p:txBody>
+      </p:sp>
+      <p:sp>
+        <p:nvSpPr>
+          <p:cNvPr id="18" name="TextBox 17"/>
+          <p:cNvSpPr txBox="1"/>
+          <p:nvPr/>
+        </p:nvSpPr>
+        <p:spPr>
+          <a:xfrm>
+            <a:off x="8549640" y="2148840"/>
+            <a:ext cx="2331720" cy="502920"/>
+          </a:xfrm>
+          <a:prstGeom prst="rect">
+            <a:avLst/>
+          </a:prstGeom>
+          <a:noFill/>
+        </p:spPr>
+        <p:txBody>
+          <a:bodyPr wrap="none">
+            <a:spAutoFit/>
+          </a:bodyPr>
+          <a:lstStyle/>
+          <a:p>
+            <a:pPr algn="ctr">
+              <a:defRPr b="1" sz="1500">
+                <a:solidFill>
+                  <a:srgbClr val="1B4D89"/>
+                </a:solidFill>
+              </a:defRPr>
+            </a:pPr>
+            <a:r>
+              <a:t>Noise</a:t>
+            </a:r>
+          </a:p>
+        </p:txBody>
+      </p:sp>
+      <p:sp>
+        <p:nvSpPr>
+          <p:cNvPr id="19" name="TextBox 18"/>
+          <p:cNvSpPr txBox="1"/>
+          <p:nvPr/>
+        </p:nvSpPr>
+        <p:spPr>
+          <a:xfrm>
+            <a:off x="8549640" y="2606039"/>
+            <a:ext cx="2331720" cy="731520"/>
+          </a:xfrm>
+          <a:prstGeom prst="rect">
+            <a:avLst/>
+          </a:prstGeom>
+          <a:noFill/>
+        </p:spPr>
+        <p:txBody>
+          <a:bodyPr wrap="square">
+            <a:spAutoFit/>
+          </a:bodyPr>
+          <a:lstStyle/>
+          <a:p>
+            <a:pPr algn="ctr">
+              <a:defRPr sz="1200">
+                <a:solidFill>
+                  <a:srgbClr val="627D98"/>
+                </a:solidFill>
+              </a:defRPr>
+            </a:pPr>
+            <a:r>
+              <a:t>Pens &amp; pencils clutter the system</a:t>
+            </a:r>
+          </a:p>
+        </p:txBody>
+      </p:sp>
+      <p:sp>
+        <p:nvSpPr>
+          <p:cNvPr id="20" name="Rounded Rectangle 19"/>
+          <p:cNvSpPr/>
+          <p:nvPr/>
+        </p:nvSpPr>
+        <p:spPr>
+          <a:xfrm>
+            <a:off x="2011680" y="3977639"/>
+            <a:ext cx="8138160" cy="868680"/>
+          </a:xfrm>
+          <a:prstGeom prst="roundRect">
+            <a:avLst/>
+          </a:prstGeom>
+          <a:solidFill>
+            <a:srgbClr val="F59F00"/>
+          </a:solidFill>
+          <a:ln>
+            <a:noFill/>
+          </a:ln>
+        </p:spPr>
+        <p:style>
+          <a:lnRef idx="1">
+            <a:schemeClr val="accent1"/>
+          </a:lnRef>
+          <a:fillRef idx="3">
+            <a:schemeClr val="accent1"/>
+          </a:fillRef>
+          <a:effectRef idx="2">
+            <a:schemeClr val="accent1"/>
+          </a:effectRef>
+          <a:fontRef idx="minor">
+            <a:schemeClr val="lt1"/>
+          </a:fontRef>
+        </p:style>
+        <p:txBody>
+          <a:bodyPr rtlCol="0" anchor="ctr" wrap="square"/>
+          <a:lstStyle/>
+          <a:p>
+            <a:pPr algn="ctr">
+              <a:defRPr sz="1800" b="1">
+                <a:solidFill>
+                  <a:srgbClr val="FFFFFF"/>
+                </a:solidFill>
+              </a:defRPr>
+            </a:pPr>
+            <a:r>
+              <a:t>Students need a faster, smarter &amp; safer way to recover valuables</a:t>
             </a:r>
           </a:p>
         </p:txBody>
@@ -3774,6 +4403,116 @@
   <p:clrMapOvr>
     <a:masterClrMapping/>
   </p:clrMapOvr>
+  <p:transition spd="med">
+    <p:push/>
+  </p:transition>
+  <p:timing>
+    <p:tnLst>
+      <p:par>
+        <p:cTn id="0" dur="indefinite" restart="never" nodeType="tmRoot">
+          <p:childTnLst>
+            <p:seq concurrent="1" nextAc="seek">
+              <p:cTn id="1" dur="indefinite" nodeType="mainSeq">
+                <p:childTnLst>
+                  <p:par>
+                    <p:cTn id="104" dur="indefinite" nodeType="clickEffect">
+                      <p:stCondLst>
+                        <p:cond delay="0"/>
+                      </p:stCondLst>
+                      <p:childTnLst>
+                        <p:animEffect transition="in" filter="fade">
+                          <p:cBhvr>
+                            <p:cTn dur="600" fill="hold"/>
+                            <p:tgtEl>
+                              <p:spTgt spid="4"/>
+                            </p:tgtEl>
+                          </p:cBhvr>
+                        </p:animEffect>
+                      </p:childTnLst>
+                    </p:cTn>
+                  </p:par>
+                  <p:par>
+                    <p:cTn id="108" dur="indefinite" nodeType="withEffect">
+                      <p:stCondLst>
+                        <p:cond delay="200"/>
+                      </p:stCondLst>
+                      <p:childTnLst>
+                        <p:animEffect transition="in" filter="fade">
+                          <p:cBhvr>
+                            <p:cTn dur="600" fill="hold"/>
+                            <p:tgtEl>
+                              <p:spTgt spid="8"/>
+                            </p:tgtEl>
+                          </p:cBhvr>
+                        </p:animEffect>
+                      </p:childTnLst>
+                    </p:cTn>
+                  </p:par>
+                  <p:par>
+                    <p:cTn id="112" dur="indefinite" nodeType="withEffect">
+                      <p:stCondLst>
+                        <p:cond delay="200"/>
+                      </p:stCondLst>
+                      <p:childTnLst>
+                        <p:animEffect transition="in" filter="fade">
+                          <p:cBhvr>
+                            <p:cTn dur="600" fill="hold"/>
+                            <p:tgtEl>
+                              <p:spTgt spid="12"/>
+                            </p:tgtEl>
+                          </p:cBhvr>
+                        </p:animEffect>
+                      </p:childTnLst>
+                    </p:cTn>
+                  </p:par>
+                  <p:par>
+                    <p:cTn id="116" dur="indefinite" nodeType="withEffect">
+                      <p:stCondLst>
+                        <p:cond delay="200"/>
+                      </p:stCondLst>
+                      <p:childTnLst>
+                        <p:animEffect transition="in" filter="fade">
+                          <p:cBhvr>
+                            <p:cTn dur="600" fill="hold"/>
+                            <p:tgtEl>
+                              <p:spTgt spid="16"/>
+                            </p:tgtEl>
+                          </p:cBhvr>
+                        </p:animEffect>
+                      </p:childTnLst>
+                    </p:cTn>
+                  </p:par>
+                </p:childTnLst>
+              </p:cTn>
+            </p:seq>
+            <p:seq concurrent="1" nextAc="seek">
+              <p:cTn id="1" dur="indefinite" nodeType="mainSeq">
+                <p:childTnLst>
+                  <p:par>
+                    <p:cTn id="120" dur="indefinite" nodeType="clickEffect">
+                      <p:stCondLst>
+                        <p:cond delay="0"/>
+                      </p:stCondLst>
+                      <p:childTnLst>
+                        <p:animEffect transition="in" filter="fade">
+                          <p:cBhvr>
+                            <p:cTn dur="600" fill="hold"/>
+                            <p:tgtEl>
+                              <p:spTgt spid="20"/>
+                            </p:tgtEl>
+                          </p:cBhvr>
+                        </p:animEffect>
+                      </p:childTnLst>
+                    </p:cTn>
+                  </p:par>
+                </p:childTnLst>
+              </p:cTn>
+            </p:seq>
+          </p:childTnLst>
+        </p:cTn>
+      </p:par>
+    </p:tnLst>
+  </p:timing>
 </p:sld>
 </file>
 
@@ -3797,51 +4536,44 @@
       <p:grpSpPr/>
       <p:sp>
         <p:nvSpPr>
-          <p:cNvPr id="2" name="TextBox 1"/>
-          <p:cNvSpPr txBox="1"/>
-          <p:nvPr/>
-        </p:nvSpPr>
-        <p:spPr>
-          <a:xfrm>
-            <a:off x="548640" y="320040"/>
-            <a:ext cx="11064240" cy="1097280"/>
+          <p:cNvPr id="2" name="Rectangle 1"/>
+          <p:cNvSpPr/>
+          <p:nvPr/>
+        </p:nvSpPr>
+        <p:spPr>
+          <a:xfrm>
+            <a:off x="0" y="0"/>
+            <a:ext cx="12191695" cy="109728"/>
           </a:xfrm>
           <a:prstGeom prst="rect">
             <a:avLst/>
           </a:prstGeom>
-          <a:noFill/>
-        </p:spPr>
-        <p:txBody>
-          <a:bodyPr wrap="square">
-            <a:spAutoFit/>
-          </a:bodyPr>
-          <a:lstStyle/>
-          <a:p>
-            <a:pPr>
-              <a:defRPr sz="3200" b="1">
-                <a:solidFill>
-                  <a:srgbClr val="1B4D89"/>
-                </a:solidFill>
-              </a:defRPr>
-            </a:pPr>
-            <a:r>
-              <a:t>Slide 3: Proposed Solution</a:t>
-            </a:r>
-          </a:p>
-          <a:p>
-            <a:pPr>
-              <a:spcBef>
-                <a:spcPts val="600"/>
-              </a:spcBef>
-              <a:defRPr sz="1600">
-                <a:solidFill>
-                  <a:srgbClr val="627D98"/>
-                </a:solidFill>
-              </a:defRPr>
-            </a:pPr>
-            <a:r>
-              <a:t>FoundYourThing — smart, safe, campus-wide recovery</a:t>
-            </a:r>
+          <a:solidFill>
+            <a:srgbClr val="0EA5A4"/>
+          </a:solidFill>
+          <a:ln>
+            <a:noFill/>
+          </a:ln>
+        </p:spPr>
+        <p:style>
+          <a:lnRef idx="1">
+            <a:schemeClr val="accent1"/>
+          </a:lnRef>
+          <a:fillRef idx="3">
+            <a:schemeClr val="accent1"/>
+          </a:fillRef>
+          <a:effectRef idx="2">
+            <a:schemeClr val="accent1"/>
+          </a:effectRef>
+          <a:fontRef idx="minor">
+            <a:schemeClr val="lt1"/>
+          </a:fontRef>
+        </p:style>
+        <p:txBody>
+          <a:bodyPr rtlCol="0" anchor="ctr"/>
+          <a:lstStyle/>
+          <a:p>
+            <a:pPr algn="ctr"/>
           </a:p>
         </p:txBody>
       </p:sp>
@@ -3853,121 +4585,8 @@
         </p:nvSpPr>
         <p:spPr>
           <a:xfrm>
-            <a:off x="685800" y="1417320"/>
-            <a:ext cx="10789920" cy="5029200"/>
-          </a:xfrm>
-          <a:prstGeom prst="rect">
-            <a:avLst/>
-          </a:prstGeom>
-          <a:noFill/>
-        </p:spPr>
-        <p:txBody>
-          <a:bodyPr wrap="square">
-            <a:spAutoFit/>
-          </a:bodyPr>
-          <a:lstStyle/>
-          <a:p>
-            <a:pPr>
-              <a:spcAft>
-                <a:spcPts val="1000"/>
-              </a:spcAft>
-              <a:defRPr sz="2000">
-                <a:solidFill>
-                  <a:srgbClr val="102A43"/>
-                </a:solidFill>
-              </a:defRPr>
-            </a:pPr>
-            <a:r>
-              <a:t>A cross-platform mobile/web app for reporting LOST and FOUND valuable items only.</a:t>
-            </a:r>
-          </a:p>
-          <a:p>
-            <a:pPr>
-              <a:spcAft>
-                <a:spcPts val="1000"/>
-              </a:spcAft>
-              <a:defRPr sz="2000">
-                <a:solidFill>
-                  <a:srgbClr val="102A43"/>
-                </a:solidFill>
-              </a:defRPr>
-            </a:pPr>
-            <a:r>
-              <a:t>Users upload a photo + category + location + short description.</a:t>
-            </a:r>
-          </a:p>
-          <a:p>
-            <a:pPr>
-              <a:spcAft>
-                <a:spcPts val="1000"/>
-              </a:spcAft>
-              <a:defRPr sz="2000">
-                <a:solidFill>
-                  <a:srgbClr val="102A43"/>
-                </a:solidFill>
-              </a:defRPr>
-            </a:pPr>
-            <a:r>
-              <a:t>AI compares lost and found reports using image + text similarity and shows match score (%).</a:t>
-            </a:r>
-          </a:p>
-          <a:p>
-            <a:pPr>
-              <a:spcAft>
-                <a:spcPts val="1000"/>
-              </a:spcAft>
-              <a:defRPr sz="2000">
-                <a:solidFill>
-                  <a:srgbClr val="102A43"/>
-                </a:solidFill>
-              </a:defRPr>
-            </a:pPr>
-            <a:r>
-              <a:t>Privacy-first design: only VTU/college ID is public initially.</a:t>
-            </a:r>
-          </a:p>
-          <a:p>
-            <a:pPr>
-              <a:spcAft>
-                <a:spcPts val="1000"/>
-              </a:spcAft>
-              <a:defRPr sz="2000">
-                <a:solidFill>
-                  <a:srgbClr val="102A43"/>
-                </a:solidFill>
-              </a:defRPr>
-            </a:pPr>
-            <a:r>
-              <a:t>Phone numbers are shared only after owner requests contact and finder accepts.</a:t>
-            </a:r>
-          </a:p>
-          <a:p>
-            <a:pPr>
-              <a:spcAft>
-                <a:spcPts val="1000"/>
-              </a:spcAft>
-              <a:defRPr sz="2000">
-                <a:solidFill>
-                  <a:srgbClr val="102A43"/>
-                </a:solidFill>
-              </a:defRPr>
-            </a:pPr>
-            <a:r>
-              <a:t>Built for real campus use — Canteen, Library, Hostel, Departments, and more.</a:t>
-            </a:r>
-          </a:p>
-        </p:txBody>
-      </p:sp>
-      <p:sp>
-        <p:nvSpPr>
-          <p:cNvPr id="4" name="TextBox 3"/>
-          <p:cNvSpPr txBox="1"/>
-          <p:nvPr/>
-        </p:nvSpPr>
-        <p:spPr>
-          <a:xfrm>
-            <a:off x="548640" y="6263640"/>
-            <a:ext cx="10972800" cy="365760"/>
+            <a:off x="594360" y="320040"/>
+            <a:ext cx="10972800" cy="1005840"/>
           </a:xfrm>
           <a:prstGeom prst="rect">
             <a:avLst/>
@@ -3981,14 +4600,522 @@
           <a:lstStyle/>
           <a:p>
             <a:pPr>
-              <a:defRPr sz="1100">
+              <a:defRPr sz="3000" b="1">
+                <a:solidFill>
+                  <a:srgbClr val="1B4D89"/>
+                </a:solidFill>
+              </a:defRPr>
+            </a:pPr>
+            <a:r>
+              <a:t>Proposed Solution</a:t>
+            </a:r>
+          </a:p>
+          <a:p>
+            <a:pPr>
+              <a:defRPr sz="1400">
                 <a:solidFill>
                   <a:srgbClr val="627D98"/>
                 </a:solidFill>
               </a:defRPr>
             </a:pPr>
             <a:r>
-              <a:t>FoundYourThing  |  github.com/sainihalmeda-ai/FoundYourThing</a:t>
+              <a:t>FoundYourThing — AI + Privacy</a:t>
+            </a:r>
+          </a:p>
+        </p:txBody>
+      </p:sp>
+      <p:sp>
+        <p:nvSpPr>
+          <p:cNvPr id="4" name="Rounded Rectangle 3"/>
+          <p:cNvSpPr/>
+          <p:nvPr/>
+        </p:nvSpPr>
+        <p:spPr>
+          <a:xfrm>
+            <a:off x="4480560" y="1828800"/>
+            <a:ext cx="3200400" cy="1371600"/>
+          </a:xfrm>
+          <a:prstGeom prst="roundRect">
+            <a:avLst/>
+          </a:prstGeom>
+          <a:solidFill>
+            <a:srgbClr val="1B4D89"/>
+          </a:solidFill>
+          <a:ln>
+            <a:noFill/>
+          </a:ln>
+        </p:spPr>
+        <p:style>
+          <a:lnRef idx="1">
+            <a:schemeClr val="accent1"/>
+          </a:lnRef>
+          <a:fillRef idx="3">
+            <a:schemeClr val="accent1"/>
+          </a:fillRef>
+          <a:effectRef idx="2">
+            <a:schemeClr val="accent1"/>
+          </a:effectRef>
+          <a:fontRef idx="minor">
+            <a:schemeClr val="lt1"/>
+          </a:fontRef>
+        </p:style>
+        <p:txBody>
+          <a:bodyPr rtlCol="0" anchor="ctr" wrap="square"/>
+          <a:lstStyle/>
+          <a:p>
+            <a:pPr algn="ctr">
+              <a:defRPr sz="1800" b="1">
+                <a:solidFill>
+                  <a:srgbClr val="FFFFFF"/>
+                </a:solidFill>
+              </a:defRPr>
+            </a:pPr>
+            <a:r>
+              <a:t>FoundYourThing</a:t>
+            </a:r>
+            <a:br/>
+            <a:r>
+              <a:t>AI Match Engine</a:t>
+            </a:r>
+          </a:p>
+        </p:txBody>
+      </p:sp>
+      <p:sp>
+        <p:nvSpPr>
+          <p:cNvPr id="5" name="Rounded Rectangle 4"/>
+          <p:cNvSpPr/>
+          <p:nvPr/>
+        </p:nvSpPr>
+        <p:spPr>
+          <a:xfrm>
+            <a:off x="914400" y="1828800"/>
+            <a:ext cx="2103120" cy="1417320"/>
+          </a:xfrm>
+          <a:prstGeom prst="roundRect">
+            <a:avLst/>
+          </a:prstGeom>
+          <a:solidFill>
+            <a:srgbClr val="D6F6F5"/>
+          </a:solidFill>
+          <a:ln w="19050">
+            <a:solidFill>
+              <a:srgbClr val="0EA5A4"/>
+            </a:solidFill>
+          </a:ln>
+        </p:spPr>
+        <p:style>
+          <a:lnRef idx="1">
+            <a:schemeClr val="accent1"/>
+          </a:lnRef>
+          <a:fillRef idx="3">
+            <a:schemeClr val="accent1"/>
+          </a:fillRef>
+          <a:effectRef idx="2">
+            <a:schemeClr val="accent1"/>
+          </a:effectRef>
+          <a:fontRef idx="minor">
+            <a:schemeClr val="lt1"/>
+          </a:fontRef>
+        </p:style>
+        <p:txBody>
+          <a:bodyPr rtlCol="0" anchor="ctr" wrap="square"/>
+          <a:lstStyle/>
+          <a:p>
+            <a:pPr algn="ctr">
+              <a:defRPr sz="1600" b="1">
+                <a:solidFill>
+                  <a:srgbClr val="102A43"/>
+                </a:solidFill>
+              </a:defRPr>
+            </a:pPr>
+            <a:r>
+              <a:t>📸</a:t>
+            </a:r>
+            <a:br/>
+            <a:r>
+              <a:t>Photo</a:t>
+            </a:r>
+            <a:br/>
+            <a:r>
+              <a:t>Report</a:t>
+            </a:r>
+          </a:p>
+        </p:txBody>
+      </p:sp>
+      <p:sp>
+        <p:nvSpPr>
+          <p:cNvPr id="6" name="Rounded Rectangle 5"/>
+          <p:cNvSpPr/>
+          <p:nvPr/>
+        </p:nvSpPr>
+        <p:spPr>
+          <a:xfrm>
+            <a:off x="9144000" y="1828800"/>
+            <a:ext cx="2103120" cy="1417320"/>
+          </a:xfrm>
+          <a:prstGeom prst="roundRect">
+            <a:avLst/>
+          </a:prstGeom>
+          <a:solidFill>
+            <a:srgbClr val="D6F6F5"/>
+          </a:solidFill>
+          <a:ln w="19050">
+            <a:solidFill>
+              <a:srgbClr val="0EA5A4"/>
+            </a:solidFill>
+          </a:ln>
+        </p:spPr>
+        <p:style>
+          <a:lnRef idx="1">
+            <a:schemeClr val="accent1"/>
+          </a:lnRef>
+          <a:fillRef idx="3">
+            <a:schemeClr val="accent1"/>
+          </a:fillRef>
+          <a:effectRef idx="2">
+            <a:schemeClr val="accent1"/>
+          </a:effectRef>
+          <a:fontRef idx="minor">
+            <a:schemeClr val="lt1"/>
+          </a:fontRef>
+        </p:style>
+        <p:txBody>
+          <a:bodyPr rtlCol="0" anchor="ctr" wrap="square"/>
+          <a:lstStyle/>
+          <a:p>
+            <a:pPr algn="ctr">
+              <a:defRPr sz="1600" b="1">
+                <a:solidFill>
+                  <a:srgbClr val="102A43"/>
+                </a:solidFill>
+              </a:defRPr>
+            </a:pPr>
+            <a:r>
+              <a:t>🤖</a:t>
+            </a:r>
+            <a:br/>
+            <a:r>
+              <a:t>AI</a:t>
+            </a:r>
+            <a:br/>
+            <a:r>
+              <a:t>Matching</a:t>
+            </a:r>
+          </a:p>
+        </p:txBody>
+      </p:sp>
+      <p:sp>
+        <p:nvSpPr>
+          <p:cNvPr id="7" name="Rounded Rectangle 6"/>
+          <p:cNvSpPr/>
+          <p:nvPr/>
+        </p:nvSpPr>
+        <p:spPr>
+          <a:xfrm>
+            <a:off x="914400" y="4206240"/>
+            <a:ext cx="2103120" cy="1417320"/>
+          </a:xfrm>
+          <a:prstGeom prst="roundRect">
+            <a:avLst/>
+          </a:prstGeom>
+          <a:solidFill>
+            <a:srgbClr val="D6F6F5"/>
+          </a:solidFill>
+          <a:ln w="19050">
+            <a:solidFill>
+              <a:srgbClr val="0EA5A4"/>
+            </a:solidFill>
+          </a:ln>
+        </p:spPr>
+        <p:style>
+          <a:lnRef idx="1">
+            <a:schemeClr val="accent1"/>
+          </a:lnRef>
+          <a:fillRef idx="3">
+            <a:schemeClr val="accent1"/>
+          </a:fillRef>
+          <a:effectRef idx="2">
+            <a:schemeClr val="accent1"/>
+          </a:effectRef>
+          <a:fontRef idx="minor">
+            <a:schemeClr val="lt1"/>
+          </a:fontRef>
+        </p:style>
+        <p:txBody>
+          <a:bodyPr rtlCol="0" anchor="ctr" wrap="square"/>
+          <a:lstStyle/>
+          <a:p>
+            <a:pPr algn="ctr">
+              <a:defRPr sz="1600" b="1">
+                <a:solidFill>
+                  <a:srgbClr val="102A43"/>
+                </a:solidFill>
+              </a:defRPr>
+            </a:pPr>
+            <a:r>
+              <a:t>🪪</a:t>
+            </a:r>
+            <a:br/>
+            <a:r>
+              <a:t>VTU ID</a:t>
+            </a:r>
+            <a:br/>
+            <a:r>
+              <a:t>Only</a:t>
+            </a:r>
+          </a:p>
+        </p:txBody>
+      </p:sp>
+      <p:sp>
+        <p:nvSpPr>
+          <p:cNvPr id="8" name="Rounded Rectangle 7"/>
+          <p:cNvSpPr/>
+          <p:nvPr/>
+        </p:nvSpPr>
+        <p:spPr>
+          <a:xfrm>
+            <a:off x="9144000" y="4206240"/>
+            <a:ext cx="2103120" cy="1417320"/>
+          </a:xfrm>
+          <a:prstGeom prst="roundRect">
+            <a:avLst/>
+          </a:prstGeom>
+          <a:solidFill>
+            <a:srgbClr val="D6F6F5"/>
+          </a:solidFill>
+          <a:ln w="19050">
+            <a:solidFill>
+              <a:srgbClr val="0EA5A4"/>
+            </a:solidFill>
+          </a:ln>
+        </p:spPr>
+        <p:style>
+          <a:lnRef idx="1">
+            <a:schemeClr val="accent1"/>
+          </a:lnRef>
+          <a:fillRef idx="3">
+            <a:schemeClr val="accent1"/>
+          </a:fillRef>
+          <a:effectRef idx="2">
+            <a:schemeClr val="accent1"/>
+          </a:effectRef>
+          <a:fontRef idx="minor">
+            <a:schemeClr val="lt1"/>
+          </a:fontRef>
+        </p:style>
+        <p:txBody>
+          <a:bodyPr rtlCol="0" anchor="ctr" wrap="square"/>
+          <a:lstStyle/>
+          <a:p>
+            <a:pPr algn="ctr">
+              <a:defRPr sz="1600" b="1">
+                <a:solidFill>
+                  <a:srgbClr val="102A43"/>
+                </a:solidFill>
+              </a:defRPr>
+            </a:pPr>
+            <a:r>
+              <a:t>✅</a:t>
+            </a:r>
+            <a:br/>
+            <a:r>
+              <a:t>Mutual</a:t>
+            </a:r>
+            <a:br/>
+            <a:r>
+              <a:t>Consent</a:t>
+            </a:r>
+          </a:p>
+        </p:txBody>
+      </p:sp>
+      <p:cxnSp>
+        <p:nvCxnSpPr>
+          <p:cNvPr id="9" name="Connector 8"/>
+          <p:cNvCxnSpPr/>
+          <p:nvPr/>
+        </p:nvCxnSpPr>
+        <p:spPr>
+          <a:xfrm>
+            <a:off x="3017520" y="2468880"/>
+            <a:ext cx="1554480" cy="45720"/>
+          </a:xfrm>
+          <a:prstGeom prst="line">
+            <a:avLst/>
+          </a:prstGeom>
+          <a:ln>
+            <a:solidFill>
+              <a:srgbClr val="627D98"/>
+            </a:solidFill>
+          </a:ln>
+        </p:spPr>
+        <p:style>
+          <a:lnRef idx="2">
+            <a:schemeClr val="accent1"/>
+          </a:lnRef>
+          <a:fillRef idx="0">
+            <a:schemeClr val="accent1"/>
+          </a:fillRef>
+          <a:effectRef idx="1">
+            <a:schemeClr val="accent1"/>
+          </a:effectRef>
+          <a:fontRef idx="minor">
+            <a:schemeClr val="tx1"/>
+          </a:fontRef>
+        </p:style>
+      </p:cxnSp>
+      <p:cxnSp>
+        <p:nvCxnSpPr>
+          <p:cNvPr id="10" name="Connector 9"/>
+          <p:cNvCxnSpPr/>
+          <p:nvPr/>
+        </p:nvCxnSpPr>
+        <p:spPr>
+          <a:xfrm flipH="1">
+            <a:off x="4572000" y="2468880"/>
+            <a:ext cx="2743200" cy="45720"/>
+          </a:xfrm>
+          <a:prstGeom prst="line">
+            <a:avLst/>
+          </a:prstGeom>
+          <a:ln>
+            <a:solidFill>
+              <a:srgbClr val="627D98"/>
+            </a:solidFill>
+          </a:ln>
+        </p:spPr>
+        <p:style>
+          <a:lnRef idx="2">
+            <a:schemeClr val="accent1"/>
+          </a:lnRef>
+          <a:fillRef idx="0">
+            <a:schemeClr val="accent1"/>
+          </a:fillRef>
+          <a:effectRef idx="1">
+            <a:schemeClr val="accent1"/>
+          </a:effectRef>
+          <a:fontRef idx="minor">
+            <a:schemeClr val="tx1"/>
+          </a:fontRef>
+        </p:style>
+      </p:cxnSp>
+      <p:cxnSp>
+        <p:nvCxnSpPr>
+          <p:cNvPr id="11" name="Connector 10"/>
+          <p:cNvCxnSpPr/>
+          <p:nvPr/>
+        </p:nvCxnSpPr>
+        <p:spPr>
+          <a:xfrm flipV="1">
+            <a:off x="3017520" y="2514600"/>
+            <a:ext cx="1554480" cy="2057400"/>
+          </a:xfrm>
+          <a:prstGeom prst="line">
+            <a:avLst/>
+          </a:prstGeom>
+          <a:ln>
+            <a:solidFill>
+              <a:srgbClr val="627D98"/>
+            </a:solidFill>
+          </a:ln>
+        </p:spPr>
+        <p:style>
+          <a:lnRef idx="2">
+            <a:schemeClr val="accent1"/>
+          </a:lnRef>
+          <a:fillRef idx="0">
+            <a:schemeClr val="accent1"/>
+          </a:fillRef>
+          <a:effectRef idx="1">
+            <a:schemeClr val="accent1"/>
+          </a:effectRef>
+          <a:fontRef idx="minor">
+            <a:schemeClr val="tx1"/>
+          </a:fontRef>
+        </p:style>
+      </p:cxnSp>
+      <p:cxnSp>
+        <p:nvCxnSpPr>
+          <p:cNvPr id="12" name="Connector 11"/>
+          <p:cNvCxnSpPr/>
+          <p:nvPr/>
+        </p:nvCxnSpPr>
+        <p:spPr>
+          <a:xfrm flipH="1" flipV="1">
+            <a:off x="4572000" y="2514600"/>
+            <a:ext cx="2743200" cy="2057400"/>
+          </a:xfrm>
+          <a:prstGeom prst="line">
+            <a:avLst/>
+          </a:prstGeom>
+          <a:ln>
+            <a:solidFill>
+              <a:srgbClr val="627D98"/>
+            </a:solidFill>
+          </a:ln>
+        </p:spPr>
+        <p:style>
+          <a:lnRef idx="2">
+            <a:schemeClr val="accent1"/>
+          </a:lnRef>
+          <a:fillRef idx="0">
+            <a:schemeClr val="accent1"/>
+          </a:fillRef>
+          <a:effectRef idx="1">
+            <a:schemeClr val="accent1"/>
+          </a:effectRef>
+          <a:fontRef idx="minor">
+            <a:schemeClr val="tx1"/>
+          </a:fontRef>
+        </p:style>
+      </p:cxnSp>
+      <p:sp>
+        <p:nvSpPr>
+          <p:cNvPr id="13" name="Rounded Rectangle 12"/>
+          <p:cNvSpPr/>
+          <p:nvPr/>
+        </p:nvSpPr>
+        <p:spPr>
+          <a:xfrm>
+            <a:off x="3200400" y="5532120"/>
+            <a:ext cx="5760720" cy="594360"/>
+          </a:xfrm>
+          <a:prstGeom prst="roundRect">
+            <a:avLst/>
+          </a:prstGeom>
+          <a:solidFill>
+            <a:srgbClr val="E6F0FF"/>
+          </a:solidFill>
+          <a:ln>
+            <a:noFill/>
+          </a:ln>
+        </p:spPr>
+        <p:style>
+          <a:lnRef idx="1">
+            <a:schemeClr val="accent1"/>
+          </a:lnRef>
+          <a:fillRef idx="3">
+            <a:schemeClr val="accent1"/>
+          </a:fillRef>
+          <a:effectRef idx="2">
+            <a:schemeClr val="accent1"/>
+          </a:effectRef>
+          <a:fontRef idx="minor">
+            <a:schemeClr val="lt1"/>
+          </a:fontRef>
+        </p:style>
+        <p:txBody>
+          <a:bodyPr rtlCol="0" anchor="ctr" wrap="square"/>
+          <a:lstStyle/>
+          <a:p>
+            <a:pPr algn="ctr">
+              <a:defRPr sz="1400" b="1">
+                <a:solidFill>
+                  <a:srgbClr val="1B4D89"/>
+                </a:solidFill>
+              </a:defRPr>
+            </a:pPr>
+            <a:r>
+              <a:t>Valuables only  ·  No pens or pencils</a:t>
             </a:r>
           </a:p>
         </p:txBody>
@@ -3998,6 +5125,139 @@
   <p:clrMapOvr>
     <a:masterClrMapping/>
   </p:clrMapOvr>
+  <p:transition spd="med">
+    <p:fade/>
+  </p:transition>
+  <p:timing>
+    <p:tnLst>
+      <p:par>
+        <p:cTn id="0" dur="indefinite" restart="never" nodeType="tmRoot">
+          <p:childTnLst>
+            <p:seq concurrent="1" nextAc="seek">
+              <p:cTn id="1" dur="indefinite" nodeType="mainSeq">
+                <p:childTnLst>
+                  <p:par>
+                    <p:cTn id="104" dur="indefinite" nodeType="clickEffect">
+                      <p:stCondLst>
+                        <p:cond delay="0"/>
+                      </p:stCondLst>
+                      <p:childTnLst>
+                        <p:animEffect transition="in" filter="fade">
+                          <p:cBhvr>
+                            <p:cTn dur="600" fill="hold"/>
+                            <p:tgtEl>
+                              <p:spTgt spid="4"/>
+                            </p:tgtEl>
+                          </p:cBhvr>
+                        </p:animEffect>
+                      </p:childTnLst>
+                    </p:cTn>
+                  </p:par>
+                </p:childTnLst>
+              </p:cTn>
+            </p:seq>
+            <p:seq concurrent="1" nextAc="seek">
+              <p:cTn id="1" dur="indefinite" nodeType="mainSeq">
+                <p:childTnLst>
+                  <p:par>
+                    <p:cTn id="105" dur="indefinite" nodeType="clickEffect">
+                      <p:stCondLst>
+                        <p:cond delay="0"/>
+                      </p:stCondLst>
+                      <p:childTnLst>
+                        <p:animEffect transition="in" filter="fade">
+                          <p:cBhvr>
+                            <p:cTn dur="600" fill="hold"/>
+                            <p:tgtEl>
+                              <p:spTgt spid="5"/>
+                            </p:tgtEl>
+                          </p:cBhvr>
+                        </p:animEffect>
+                      </p:childTnLst>
+                    </p:cTn>
+                  </p:par>
+                  <p:par>
+                    <p:cTn id="106" dur="indefinite" nodeType="withEffect">
+                      <p:stCondLst>
+                        <p:cond delay="200"/>
+                      </p:stCondLst>
+                      <p:childTnLst>
+                        <p:animEffect transition="in" filter="fade">
+                          <p:cBhvr>
+                            <p:cTn dur="600" fill="hold"/>
+                            <p:tgtEl>
+                              <p:spTgt spid="6"/>
+                            </p:tgtEl>
+                          </p:cBhvr>
+                        </p:animEffect>
+                      </p:childTnLst>
+                    </p:cTn>
+                  </p:par>
+                  <p:par>
+                    <p:cTn id="107" dur="indefinite" nodeType="withEffect">
+                      <p:stCondLst>
+                        <p:cond delay="200"/>
+                      </p:stCondLst>
+                      <p:childTnLst>
+                        <p:animEffect transition="in" filter="fade">
+                          <p:cBhvr>
+                            <p:cTn dur="600" fill="hold"/>
+                            <p:tgtEl>
+                              <p:spTgt spid="7"/>
+                            </p:tgtEl>
+                          </p:cBhvr>
+                        </p:animEffect>
+                      </p:childTnLst>
+                    </p:cTn>
+                  </p:par>
+                  <p:par>
+                    <p:cTn id="108" dur="indefinite" nodeType="withEffect">
+                      <p:stCondLst>
+                        <p:cond delay="200"/>
+                      </p:stCondLst>
+                      <p:childTnLst>
+                        <p:animEffect transition="in" filter="fade">
+                          <p:cBhvr>
+                            <p:cTn dur="600" fill="hold"/>
+                            <p:tgtEl>
+                              <p:spTgt spid="8"/>
+                            </p:tgtEl>
+                          </p:cBhvr>
+                        </p:animEffect>
+                      </p:childTnLst>
+                    </p:cTn>
+                  </p:par>
+                </p:childTnLst>
+              </p:cTn>
+            </p:seq>
+            <p:seq concurrent="1" nextAc="seek">
+              <p:cTn id="1" dur="indefinite" nodeType="mainSeq">
+                <p:childTnLst>
+                  <p:par>
+                    <p:cTn id="113" dur="indefinite" nodeType="clickEffect">
+                      <p:stCondLst>
+                        <p:cond delay="0"/>
+                      </p:stCondLst>
+                      <p:childTnLst>
+                        <p:animEffect transition="in" filter="fade">
+                          <p:cBhvr>
+                            <p:cTn dur="600" fill="hold"/>
+                            <p:tgtEl>
+                              <p:spTgt spid="13"/>
+                            </p:tgtEl>
+                          </p:cBhvr>
+                        </p:animEffect>
+                      </p:childTnLst>
+                    </p:cTn>
+                  </p:par>
+                </p:childTnLst>
+              </p:cTn>
+            </p:seq>
+          </p:childTnLst>
+        </p:cTn>
+      </p:par>
+    </p:tnLst>
+  </p:timing>
 </p:sld>
 </file>
 
@@ -4007,7 +5267,7 @@
     <p:bg>
       <p:bgPr>
         <a:solidFill>
-          <a:srgbClr val="FFFFFF"/>
+          <a:srgbClr val="F4F7FB"/>
         </a:solidFill>
         <a:effectLst/>
       </p:bgPr>
@@ -4021,51 +5281,44 @@
       <p:grpSpPr/>
       <p:sp>
         <p:nvSpPr>
-          <p:cNvPr id="2" name="TextBox 1"/>
-          <p:cNvSpPr txBox="1"/>
-          <p:nvPr/>
-        </p:nvSpPr>
-        <p:spPr>
-          <a:xfrm>
-            <a:off x="548640" y="320040"/>
-            <a:ext cx="11064240" cy="1097280"/>
+          <p:cNvPr id="2" name="Rectangle 1"/>
+          <p:cNvSpPr/>
+          <p:nvPr/>
+        </p:nvSpPr>
+        <p:spPr>
+          <a:xfrm>
+            <a:off x="0" y="0"/>
+            <a:ext cx="12191695" cy="109728"/>
           </a:xfrm>
           <a:prstGeom prst="rect">
             <a:avLst/>
           </a:prstGeom>
-          <a:noFill/>
-        </p:spPr>
-        <p:txBody>
-          <a:bodyPr wrap="square">
-            <a:spAutoFit/>
-          </a:bodyPr>
-          <a:lstStyle/>
-          <a:p>
-            <a:pPr>
-              <a:defRPr sz="3200" b="1">
-                <a:solidFill>
-                  <a:srgbClr val="1B4D89"/>
-                </a:solidFill>
-              </a:defRPr>
-            </a:pPr>
-            <a:r>
-              <a:t>Slide 4: Architecture / Workflow</a:t>
-            </a:r>
-          </a:p>
-          <a:p>
-            <a:pPr>
-              <a:spcBef>
-                <a:spcPts val="600"/>
-              </a:spcBef>
-              <a:defRPr sz="1600">
-                <a:solidFill>
-                  <a:srgbClr val="627D98"/>
-                </a:solidFill>
-              </a:defRPr>
-            </a:pPr>
-            <a:r>
-              <a:t>End-to-end system design</a:t>
-            </a:r>
+          <a:solidFill>
+            <a:srgbClr val="0EA5A4"/>
+          </a:solidFill>
+          <a:ln>
+            <a:noFill/>
+          </a:ln>
+        </p:spPr>
+        <p:style>
+          <a:lnRef idx="1">
+            <a:schemeClr val="accent1"/>
+          </a:lnRef>
+          <a:fillRef idx="3">
+            <a:schemeClr val="accent1"/>
+          </a:fillRef>
+          <a:effectRef idx="2">
+            <a:schemeClr val="accent1"/>
+          </a:effectRef>
+          <a:fontRef idx="minor">
+            <a:schemeClr val="lt1"/>
+          </a:fontRef>
+        </p:style>
+        <p:txBody>
+          <a:bodyPr rtlCol="0" anchor="ctr"/>
+          <a:lstStyle/>
+          <a:p>
+            <a:pPr algn="ctr"/>
           </a:p>
         </p:txBody>
       </p:sp>
@@ -4077,151 +5330,8 @@
         </p:nvSpPr>
         <p:spPr>
           <a:xfrm>
-            <a:off x="685800" y="1417320"/>
-            <a:ext cx="10789920" cy="5029200"/>
-          </a:xfrm>
-          <a:prstGeom prst="rect">
-            <a:avLst/>
-          </a:prstGeom>
-          <a:noFill/>
-        </p:spPr>
-        <p:txBody>
-          <a:bodyPr wrap="square">
-            <a:spAutoFit/>
-          </a:bodyPr>
-          <a:lstStyle/>
-          <a:p>
-            <a:pPr>
-              <a:spcAft>
-                <a:spcPts val="1000"/>
-              </a:spcAft>
-              <a:defRPr sz="2000">
-                <a:solidFill>
-                  <a:srgbClr val="102A43"/>
-                </a:solidFill>
-              </a:defRPr>
-            </a:pPr>
-            <a:r>
-              <a:t>Mobile App (Expo React Native) ↔ REST API (Python FastAPI) ↔ SQLite/PostgreSQL</a:t>
-            </a:r>
-          </a:p>
-          <a:p>
-            <a:pPr>
-              <a:spcAft>
-                <a:spcPts val="1000"/>
-              </a:spcAft>
-              <a:defRPr sz="2000">
-                <a:solidFill>
-                  <a:srgbClr val="102A43"/>
-                </a:solidFill>
-              </a:defRPr>
-            </a:pPr>
-            <a:r>
-              <a:t>Image + text embeddings generated on upload; cosine similarity ranks possible matches.</a:t>
-            </a:r>
-          </a:p>
-          <a:p>
-            <a:pPr>
-              <a:spcAft>
-                <a:spcPts val="1000"/>
-              </a:spcAft>
-              <a:defRPr sz="2000">
-                <a:solidFill>
-                  <a:srgbClr val="102A43"/>
-                </a:solidFill>
-              </a:defRPr>
-            </a:pPr>
-            <a:r>
-              <a:t>Workflow:</a:t>
-            </a:r>
-          </a:p>
-          <a:p>
-            <a:pPr>
-              <a:spcAft>
-                <a:spcPts val="1000"/>
-              </a:spcAft>
-              <a:defRPr sz="2000">
-                <a:solidFill>
-                  <a:srgbClr val="102A43"/>
-                </a:solidFill>
-              </a:defRPr>
-            </a:pPr>
-            <a:r>
-              <a:t>  1. Student reports lost item → visible on campus feed</a:t>
-            </a:r>
-          </a:p>
-          <a:p>
-            <a:pPr>
-              <a:spcAft>
-                <a:spcPts val="1000"/>
-              </a:spcAft>
-              <a:defRPr sz="2000">
-                <a:solidFill>
-                  <a:srgbClr val="102A43"/>
-                </a:solidFill>
-              </a:defRPr>
-            </a:pPr>
-            <a:r>
-              <a:t>  2. Another student reports found item → AI matching runs automatically</a:t>
-            </a:r>
-          </a:p>
-          <a:p>
-            <a:pPr>
-              <a:spcAft>
-                <a:spcPts val="1000"/>
-              </a:spcAft>
-              <a:defRPr sz="2000">
-                <a:solidFill>
-                  <a:srgbClr val="102A43"/>
-                </a:solidFill>
-              </a:defRPr>
-            </a:pPr>
-            <a:r>
-              <a:t>  3. Owner sees possible match → sends contact request</a:t>
-            </a:r>
-          </a:p>
-          <a:p>
-            <a:pPr>
-              <a:spcAft>
-                <a:spcPts val="1000"/>
-              </a:spcAft>
-              <a:defRPr sz="2000">
-                <a:solidFill>
-                  <a:srgbClr val="102A43"/>
-                </a:solidFill>
-              </a:defRPr>
-            </a:pPr>
-            <a:r>
-              <a:t>  4. Finder accepts → both receive name, department, and phone</a:t>
-            </a:r>
-          </a:p>
-          <a:p>
-            <a:pPr>
-              <a:spcAft>
-                <a:spcPts val="1000"/>
-              </a:spcAft>
-              <a:defRPr sz="2000">
-                <a:solidFill>
-                  <a:srgbClr val="102A43"/>
-                </a:solidFill>
-              </a:defRPr>
-            </a:pPr>
-            <a:r>
-              <a:t>Privacy service controls what data is visible at each stage (Public → Match → Claim → Connected).</a:t>
-            </a:r>
-          </a:p>
-        </p:txBody>
-      </p:sp>
-      <p:sp>
-        <p:nvSpPr>
-          <p:cNvPr id="4" name="TextBox 3"/>
-          <p:cNvSpPr txBox="1"/>
-          <p:nvPr/>
-        </p:nvSpPr>
-        <p:spPr>
-          <a:xfrm>
-            <a:off x="548640" y="6263640"/>
-            <a:ext cx="10972800" cy="365760"/>
+            <a:off x="594360" y="320040"/>
+            <a:ext cx="10972800" cy="1005840"/>
           </a:xfrm>
           <a:prstGeom prst="rect">
             <a:avLst/>
@@ -4235,14 +5345,988 @@
           <a:lstStyle/>
           <a:p>
             <a:pPr>
-              <a:defRPr sz="1100">
+              <a:defRPr sz="3000" b="1">
+                <a:solidFill>
+                  <a:srgbClr val="1B4D89"/>
+                </a:solidFill>
+              </a:defRPr>
+            </a:pPr>
+            <a:r>
+              <a:t>Architecture</a:t>
+            </a:r>
+          </a:p>
+          <a:p>
+            <a:pPr>
+              <a:defRPr sz="1400">
                 <a:solidFill>
                   <a:srgbClr val="627D98"/>
                 </a:solidFill>
               </a:defRPr>
             </a:pPr>
             <a:r>
-              <a:t>FoundYourThing  |  github.com/sainihalmeda-ai/FoundYourThing</a:t>
+              <a:t>Visual system design — not just text</a:t>
+            </a:r>
+          </a:p>
+        </p:txBody>
+      </p:sp>
+      <p:sp>
+        <p:nvSpPr>
+          <p:cNvPr id="4" name="Rounded Rectangle 3"/>
+          <p:cNvSpPr/>
+          <p:nvPr/>
+        </p:nvSpPr>
+        <p:spPr>
+          <a:xfrm>
+            <a:off x="731520" y="1828800"/>
+            <a:ext cx="3200400" cy="2011680"/>
+          </a:xfrm>
+          <a:prstGeom prst="roundRect">
+            <a:avLst/>
+          </a:prstGeom>
+          <a:solidFill>
+            <a:srgbClr val="1B4D89"/>
+          </a:solidFill>
+          <a:ln>
+            <a:noFill/>
+          </a:ln>
+        </p:spPr>
+        <p:style>
+          <a:lnRef idx="1">
+            <a:schemeClr val="accent1"/>
+          </a:lnRef>
+          <a:fillRef idx="3">
+            <a:schemeClr val="accent1"/>
+          </a:fillRef>
+          <a:effectRef idx="2">
+            <a:schemeClr val="accent1"/>
+          </a:effectRef>
+          <a:fontRef idx="minor">
+            <a:schemeClr val="lt1"/>
+          </a:fontRef>
+        </p:style>
+        <p:txBody>
+          <a:bodyPr rtlCol="0" anchor="ctr" wrap="square"/>
+          <a:lstStyle/>
+          <a:p>
+            <a:pPr algn="ctr">
+              <a:defRPr sz="1500" b="1">
+                <a:solidFill>
+                  <a:srgbClr val="FFFFFF"/>
+                </a:solidFill>
+              </a:defRPr>
+            </a:pPr>
+            <a:r>
+              <a:t>📲 Mobile App</a:t>
+            </a:r>
+            <a:br/>
+            <a:br/>
+            <a:r>
+              <a:t>Expo · Android</a:t>
+            </a:r>
+            <a:br/>
+            <a:r>
+              <a:t>iOS · Web</a:t>
+            </a:r>
+          </a:p>
+        </p:txBody>
+      </p:sp>
+      <p:sp>
+        <p:nvSpPr>
+          <p:cNvPr id="5" name="Rounded Rectangle 4"/>
+          <p:cNvSpPr/>
+          <p:nvPr/>
+        </p:nvSpPr>
+        <p:spPr>
+          <a:xfrm>
+            <a:off x="4480560" y="1828800"/>
+            <a:ext cx="3200400" cy="2011680"/>
+          </a:xfrm>
+          <a:prstGeom prst="roundRect">
+            <a:avLst/>
+          </a:prstGeom>
+          <a:solidFill>
+            <a:srgbClr val="0EA5A4"/>
+          </a:solidFill>
+          <a:ln>
+            <a:noFill/>
+          </a:ln>
+        </p:spPr>
+        <p:style>
+          <a:lnRef idx="1">
+            <a:schemeClr val="accent1"/>
+          </a:lnRef>
+          <a:fillRef idx="3">
+            <a:schemeClr val="accent1"/>
+          </a:fillRef>
+          <a:effectRef idx="2">
+            <a:schemeClr val="accent1"/>
+          </a:effectRef>
+          <a:fontRef idx="minor">
+            <a:schemeClr val="lt1"/>
+          </a:fontRef>
+        </p:style>
+        <p:txBody>
+          <a:bodyPr rtlCol="0" anchor="ctr" wrap="square"/>
+          <a:lstStyle/>
+          <a:p>
+            <a:pPr algn="ctr">
+              <a:defRPr sz="1500" b="1">
+                <a:solidFill>
+                  <a:srgbClr val="FFFFFF"/>
+                </a:solidFill>
+              </a:defRPr>
+            </a:pPr>
+            <a:r>
+              <a:t>⚡ API Layer</a:t>
+            </a:r>
+            <a:br/>
+            <a:br/>
+            <a:r>
+              <a:t>FastAPI · Auth</a:t>
+            </a:r>
+            <a:br/>
+            <a:r>
+              <a:t>Items · Claims</a:t>
+            </a:r>
+          </a:p>
+        </p:txBody>
+      </p:sp>
+      <p:sp>
+        <p:nvSpPr>
+          <p:cNvPr id="6" name="Rounded Rectangle 5"/>
+          <p:cNvSpPr/>
+          <p:nvPr/>
+        </p:nvSpPr>
+        <p:spPr>
+          <a:xfrm>
+            <a:off x="8229600" y="1828800"/>
+            <a:ext cx="3200400" cy="2011680"/>
+          </a:xfrm>
+          <a:prstGeom prst="roundRect">
+            <a:avLst/>
+          </a:prstGeom>
+          <a:solidFill>
+            <a:srgbClr val="102A43"/>
+          </a:solidFill>
+          <a:ln>
+            <a:noFill/>
+          </a:ln>
+        </p:spPr>
+        <p:style>
+          <a:lnRef idx="1">
+            <a:schemeClr val="accent1"/>
+          </a:lnRef>
+          <a:fillRef idx="3">
+            <a:schemeClr val="accent1"/>
+          </a:fillRef>
+          <a:effectRef idx="2">
+            <a:schemeClr val="accent1"/>
+          </a:effectRef>
+          <a:fontRef idx="minor">
+            <a:schemeClr val="lt1"/>
+          </a:fontRef>
+        </p:style>
+        <p:txBody>
+          <a:bodyPr rtlCol="0" anchor="ctr" wrap="square"/>
+          <a:lstStyle/>
+          <a:p>
+            <a:pPr algn="ctr">
+              <a:defRPr sz="1500" b="1">
+                <a:solidFill>
+                  <a:srgbClr val="FFFFFF"/>
+                </a:solidFill>
+              </a:defRPr>
+            </a:pPr>
+            <a:r>
+              <a:t>🧠 AI + Data</a:t>
+            </a:r>
+            <a:br/>
+            <a:br/>
+            <a:r>
+              <a:t>Embeddings</a:t>
+            </a:r>
+            <a:br/>
+            <a:r>
+              <a:t>SQLite / DB</a:t>
+            </a:r>
+          </a:p>
+        </p:txBody>
+      </p:sp>
+      <p:sp>
+        <p:nvSpPr>
+          <p:cNvPr id="7" name="Right Arrow 6"/>
+          <p:cNvSpPr/>
+          <p:nvPr/>
+        </p:nvSpPr>
+        <p:spPr>
+          <a:xfrm>
+            <a:off x="3977639" y="2697480"/>
+            <a:ext cx="502920" cy="228600"/>
+          </a:xfrm>
+          <a:prstGeom prst="rightArrow">
+            <a:avLst/>
+          </a:prstGeom>
+          <a:solidFill>
+            <a:srgbClr val="0EA5A4"/>
+          </a:solidFill>
+          <a:ln>
+            <a:noFill/>
+          </a:ln>
+        </p:spPr>
+        <p:style>
+          <a:lnRef idx="1">
+            <a:schemeClr val="accent1"/>
+          </a:lnRef>
+          <a:fillRef idx="3">
+            <a:schemeClr val="accent1"/>
+          </a:fillRef>
+          <a:effectRef idx="2">
+            <a:schemeClr val="accent1"/>
+          </a:effectRef>
+          <a:fontRef idx="minor">
+            <a:schemeClr val="lt1"/>
+          </a:fontRef>
+        </p:style>
+        <p:txBody>
+          <a:bodyPr rtlCol="0" anchor="ctr"/>
+          <a:lstStyle/>
+          <a:p>
+            <a:pPr algn="ctr"/>
+          </a:p>
+        </p:txBody>
+      </p:sp>
+      <p:sp>
+        <p:nvSpPr>
+          <p:cNvPr id="8" name="Right Arrow 7"/>
+          <p:cNvSpPr/>
+          <p:nvPr/>
+        </p:nvSpPr>
+        <p:spPr>
+          <a:xfrm>
+            <a:off x="7726679" y="2697480"/>
+            <a:ext cx="502920" cy="228600"/>
+          </a:xfrm>
+          <a:prstGeom prst="rightArrow">
+            <a:avLst/>
+          </a:prstGeom>
+          <a:solidFill>
+            <a:srgbClr val="0EA5A4"/>
+          </a:solidFill>
+          <a:ln>
+            <a:noFill/>
+          </a:ln>
+        </p:spPr>
+        <p:style>
+          <a:lnRef idx="1">
+            <a:schemeClr val="accent1"/>
+          </a:lnRef>
+          <a:fillRef idx="3">
+            <a:schemeClr val="accent1"/>
+          </a:fillRef>
+          <a:effectRef idx="2">
+            <a:schemeClr val="accent1"/>
+          </a:effectRef>
+          <a:fontRef idx="minor">
+            <a:schemeClr val="lt1"/>
+          </a:fontRef>
+        </p:style>
+        <p:txBody>
+          <a:bodyPr rtlCol="0" anchor="ctr"/>
+          <a:lstStyle/>
+          <a:p>
+            <a:pPr algn="ctr"/>
+          </a:p>
+        </p:txBody>
+      </p:sp>
+      <p:sp>
+        <p:nvSpPr>
+          <p:cNvPr id="9" name="Rounded Rectangle 8"/>
+          <p:cNvSpPr/>
+          <p:nvPr/>
+        </p:nvSpPr>
+        <p:spPr>
+          <a:xfrm>
+            <a:off x="914400" y="4389120"/>
+            <a:ext cx="2286000" cy="777240"/>
+          </a:xfrm>
+          <a:prstGeom prst="roundRect">
+            <a:avLst/>
+          </a:prstGeom>
+          <a:solidFill>
+            <a:srgbClr val="FFFFFF"/>
+          </a:solidFill>
+          <a:ln w="19050">
+            <a:solidFill>
+              <a:srgbClr val="0EA5A4"/>
+            </a:solidFill>
+          </a:ln>
+        </p:spPr>
+        <p:style>
+          <a:lnRef idx="1">
+            <a:schemeClr val="accent1"/>
+          </a:lnRef>
+          <a:fillRef idx="3">
+            <a:schemeClr val="accent1"/>
+          </a:fillRef>
+          <a:effectRef idx="2">
+            <a:schemeClr val="accent1"/>
+          </a:effectRef>
+          <a:fontRef idx="minor">
+            <a:schemeClr val="lt1"/>
+          </a:fontRef>
+        </p:style>
+        <p:txBody>
+          <a:bodyPr rtlCol="0" anchor="ctr" wrap="square"/>
+          <a:lstStyle/>
+          <a:p>
+            <a:pPr algn="ctr">
+              <a:defRPr sz="1400" b="1">
+                <a:solidFill>
+                  <a:srgbClr val="1B4D89"/>
+                </a:solidFill>
+              </a:defRPr>
+            </a:pPr>
+            <a:r>
+              <a:t>Image AI</a:t>
+            </a:r>
+          </a:p>
+        </p:txBody>
+      </p:sp>
+      <p:sp>
+        <p:nvSpPr>
+          <p:cNvPr id="10" name="Rounded Rectangle 9"/>
+          <p:cNvSpPr/>
+          <p:nvPr/>
+        </p:nvSpPr>
+        <p:spPr>
+          <a:xfrm>
+            <a:off x="3566160" y="4389120"/>
+            <a:ext cx="2286000" cy="777240"/>
+          </a:xfrm>
+          <a:prstGeom prst="roundRect">
+            <a:avLst/>
+          </a:prstGeom>
+          <a:solidFill>
+            <a:srgbClr val="FFFFFF"/>
+          </a:solidFill>
+          <a:ln w="19050">
+            <a:solidFill>
+              <a:srgbClr val="0EA5A4"/>
+            </a:solidFill>
+          </a:ln>
+        </p:spPr>
+        <p:style>
+          <a:lnRef idx="1">
+            <a:schemeClr val="accent1"/>
+          </a:lnRef>
+          <a:fillRef idx="3">
+            <a:schemeClr val="accent1"/>
+          </a:fillRef>
+          <a:effectRef idx="2">
+            <a:schemeClr val="accent1"/>
+          </a:effectRef>
+          <a:fontRef idx="minor">
+            <a:schemeClr val="lt1"/>
+          </a:fontRef>
+        </p:style>
+        <p:txBody>
+          <a:bodyPr rtlCol="0" anchor="ctr" wrap="square"/>
+          <a:lstStyle/>
+          <a:p>
+            <a:pPr algn="ctr">
+              <a:defRPr sz="1400" b="1">
+                <a:solidFill>
+                  <a:srgbClr val="1B4D89"/>
+                </a:solidFill>
+              </a:defRPr>
+            </a:pPr>
+            <a:r>
+              <a:t>Text AI</a:t>
+            </a:r>
+          </a:p>
+        </p:txBody>
+      </p:sp>
+      <p:sp>
+        <p:nvSpPr>
+          <p:cNvPr id="11" name="Rounded Rectangle 10"/>
+          <p:cNvSpPr/>
+          <p:nvPr/>
+        </p:nvSpPr>
+        <p:spPr>
+          <a:xfrm>
+            <a:off x="6217920" y="4389120"/>
+            <a:ext cx="2286000" cy="777240"/>
+          </a:xfrm>
+          <a:prstGeom prst="roundRect">
+            <a:avLst/>
+          </a:prstGeom>
+          <a:solidFill>
+            <a:srgbClr val="FFFFFF"/>
+          </a:solidFill>
+          <a:ln w="19050">
+            <a:solidFill>
+              <a:srgbClr val="0EA5A4"/>
+            </a:solidFill>
+          </a:ln>
+        </p:spPr>
+        <p:style>
+          <a:lnRef idx="1">
+            <a:schemeClr val="accent1"/>
+          </a:lnRef>
+          <a:fillRef idx="3">
+            <a:schemeClr val="accent1"/>
+          </a:fillRef>
+          <a:effectRef idx="2">
+            <a:schemeClr val="accent1"/>
+          </a:effectRef>
+          <a:fontRef idx="minor">
+            <a:schemeClr val="lt1"/>
+          </a:fontRef>
+        </p:style>
+        <p:txBody>
+          <a:bodyPr rtlCol="0" anchor="ctr" wrap="square"/>
+          <a:lstStyle/>
+          <a:p>
+            <a:pPr algn="ctr">
+              <a:defRPr sz="1400" b="1">
+                <a:solidFill>
+                  <a:srgbClr val="1B4D89"/>
+                </a:solidFill>
+              </a:defRPr>
+            </a:pPr>
+            <a:r>
+              <a:t>Privacy</a:t>
+            </a:r>
+          </a:p>
+        </p:txBody>
+      </p:sp>
+      <p:sp>
+        <p:nvSpPr>
+          <p:cNvPr id="12" name="Rounded Rectangle 11"/>
+          <p:cNvSpPr/>
+          <p:nvPr/>
+        </p:nvSpPr>
+        <p:spPr>
+          <a:xfrm>
+            <a:off x="8869680" y="4389120"/>
+            <a:ext cx="2286000" cy="777240"/>
+          </a:xfrm>
+          <a:prstGeom prst="roundRect">
+            <a:avLst/>
+          </a:prstGeom>
+          <a:solidFill>
+            <a:srgbClr val="FFFFFF"/>
+          </a:solidFill>
+          <a:ln w="19050">
+            <a:solidFill>
+              <a:srgbClr val="0EA5A4"/>
+            </a:solidFill>
+          </a:ln>
+        </p:spPr>
+        <p:style>
+          <a:lnRef idx="1">
+            <a:schemeClr val="accent1"/>
+          </a:lnRef>
+          <a:fillRef idx="3">
+            <a:schemeClr val="accent1"/>
+          </a:fillRef>
+          <a:effectRef idx="2">
+            <a:schemeClr val="accent1"/>
+          </a:effectRef>
+          <a:fontRef idx="minor">
+            <a:schemeClr val="lt1"/>
+          </a:fontRef>
+        </p:style>
+        <p:txBody>
+          <a:bodyPr rtlCol="0" anchor="ctr" wrap="square"/>
+          <a:lstStyle/>
+          <a:p>
+            <a:pPr algn="ctr">
+              <a:defRPr sz="1400" b="1">
+                <a:solidFill>
+                  <a:srgbClr val="1B4D89"/>
+                </a:solidFill>
+              </a:defRPr>
+            </a:pPr>
+            <a:r>
+              <a:t>Uploads</a:t>
+            </a:r>
+          </a:p>
+        </p:txBody>
+      </p:sp>
+      <p:sp>
+        <p:nvSpPr>
+          <p:cNvPr id="13" name="Oval 12"/>
+          <p:cNvSpPr/>
+          <p:nvPr/>
+        </p:nvSpPr>
+        <p:spPr>
+          <a:xfrm>
+            <a:off x="1188720" y="5486400"/>
+            <a:ext cx="685800" cy="685800"/>
+          </a:xfrm>
+          <a:prstGeom prst="ellipse">
+            <a:avLst/>
+          </a:prstGeom>
+          <a:solidFill>
+            <a:srgbClr val="0EA5A4"/>
+          </a:solidFill>
+          <a:ln>
+            <a:noFill/>
+          </a:ln>
+        </p:spPr>
+        <p:style>
+          <a:lnRef idx="1">
+            <a:schemeClr val="accent1"/>
+          </a:lnRef>
+          <a:fillRef idx="3">
+            <a:schemeClr val="accent1"/>
+          </a:fillRef>
+          <a:effectRef idx="2">
+            <a:schemeClr val="accent1"/>
+          </a:effectRef>
+          <a:fontRef idx="minor">
+            <a:schemeClr val="lt1"/>
+          </a:fontRef>
+        </p:style>
+        <p:txBody>
+          <a:bodyPr rtlCol="0" anchor="ctr" wrap="square"/>
+          <a:lstStyle/>
+          <a:p>
+            <a:pPr algn="ctr">
+              <a:defRPr sz="1600" b="1">
+                <a:solidFill>
+                  <a:srgbClr val="FFFFFF"/>
+                </a:solidFill>
+              </a:defRPr>
+            </a:pPr>
+            <a:r>
+              <a:t>1</a:t>
+            </a:r>
+          </a:p>
+        </p:txBody>
+      </p:sp>
+      <p:sp>
+        <p:nvSpPr>
+          <p:cNvPr id="14" name="TextBox 13"/>
+          <p:cNvSpPr txBox="1"/>
+          <p:nvPr/>
+        </p:nvSpPr>
+        <p:spPr>
+          <a:xfrm>
+            <a:off x="868680" y="6263640"/>
+            <a:ext cx="1325880" cy="320040"/>
+          </a:xfrm>
+          <a:prstGeom prst="rect">
+            <a:avLst/>
+          </a:prstGeom>
+          <a:noFill/>
+        </p:spPr>
+        <p:txBody>
+          <a:bodyPr wrap="none">
+            <a:spAutoFit/>
+          </a:bodyPr>
+          <a:lstStyle/>
+          <a:p>
+            <a:pPr algn="ctr">
+              <a:defRPr sz="1200">
+                <a:solidFill>
+                  <a:srgbClr val="102A43"/>
+                </a:solidFill>
+              </a:defRPr>
+            </a:pPr>
+            <a:r>
+              <a:t>Report</a:t>
+            </a:r>
+          </a:p>
+        </p:txBody>
+      </p:sp>
+      <p:sp>
+        <p:nvSpPr>
+          <p:cNvPr id="15" name="Right Arrow 14"/>
+          <p:cNvSpPr/>
+          <p:nvPr/>
+        </p:nvSpPr>
+        <p:spPr>
+          <a:xfrm>
+            <a:off x="1965960" y="5715000"/>
+            <a:ext cx="411480" cy="182880"/>
+          </a:xfrm>
+          <a:prstGeom prst="rightArrow">
+            <a:avLst/>
+          </a:prstGeom>
+          <a:solidFill>
+            <a:srgbClr val="0EA5A4"/>
+          </a:solidFill>
+          <a:ln>
+            <a:noFill/>
+          </a:ln>
+        </p:spPr>
+        <p:style>
+          <a:lnRef idx="1">
+            <a:schemeClr val="accent1"/>
+          </a:lnRef>
+          <a:fillRef idx="3">
+            <a:schemeClr val="accent1"/>
+          </a:fillRef>
+          <a:effectRef idx="2">
+            <a:schemeClr val="accent1"/>
+          </a:effectRef>
+          <a:fontRef idx="minor">
+            <a:schemeClr val="lt1"/>
+          </a:fontRef>
+        </p:style>
+        <p:txBody>
+          <a:bodyPr rtlCol="0" anchor="ctr"/>
+          <a:lstStyle/>
+          <a:p>
+            <a:pPr algn="ctr"/>
+          </a:p>
+        </p:txBody>
+      </p:sp>
+      <p:sp>
+        <p:nvSpPr>
+          <p:cNvPr id="16" name="Oval 15"/>
+          <p:cNvSpPr/>
+          <p:nvPr/>
+        </p:nvSpPr>
+        <p:spPr>
+          <a:xfrm>
+            <a:off x="3794760" y="5486400"/>
+            <a:ext cx="685800" cy="685800"/>
+          </a:xfrm>
+          <a:prstGeom prst="ellipse">
+            <a:avLst/>
+          </a:prstGeom>
+          <a:solidFill>
+            <a:srgbClr val="0EA5A4"/>
+          </a:solidFill>
+          <a:ln>
+            <a:noFill/>
+          </a:ln>
+        </p:spPr>
+        <p:style>
+          <a:lnRef idx="1">
+            <a:schemeClr val="accent1"/>
+          </a:lnRef>
+          <a:fillRef idx="3">
+            <a:schemeClr val="accent1"/>
+          </a:fillRef>
+          <a:effectRef idx="2">
+            <a:schemeClr val="accent1"/>
+          </a:effectRef>
+          <a:fontRef idx="minor">
+            <a:schemeClr val="lt1"/>
+          </a:fontRef>
+        </p:style>
+        <p:txBody>
+          <a:bodyPr rtlCol="0" anchor="ctr" wrap="square"/>
+          <a:lstStyle/>
+          <a:p>
+            <a:pPr algn="ctr">
+              <a:defRPr sz="1600" b="1">
+                <a:solidFill>
+                  <a:srgbClr val="FFFFFF"/>
+                </a:solidFill>
+              </a:defRPr>
+            </a:pPr>
+            <a:r>
+              <a:t>2</a:t>
+            </a:r>
+          </a:p>
+        </p:txBody>
+      </p:sp>
+      <p:sp>
+        <p:nvSpPr>
+          <p:cNvPr id="17" name="TextBox 16"/>
+          <p:cNvSpPr txBox="1"/>
+          <p:nvPr/>
+        </p:nvSpPr>
+        <p:spPr>
+          <a:xfrm>
+            <a:off x="3474720" y="6263640"/>
+            <a:ext cx="1325880" cy="320040"/>
+          </a:xfrm>
+          <a:prstGeom prst="rect">
+            <a:avLst/>
+          </a:prstGeom>
+          <a:noFill/>
+        </p:spPr>
+        <p:txBody>
+          <a:bodyPr wrap="none">
+            <a:spAutoFit/>
+          </a:bodyPr>
+          <a:lstStyle/>
+          <a:p>
+            <a:pPr algn="ctr">
+              <a:defRPr sz="1200">
+                <a:solidFill>
+                  <a:srgbClr val="102A43"/>
+                </a:solidFill>
+              </a:defRPr>
+            </a:pPr>
+            <a:r>
+              <a:t>Match</a:t>
+            </a:r>
+          </a:p>
+        </p:txBody>
+      </p:sp>
+      <p:sp>
+        <p:nvSpPr>
+          <p:cNvPr id="18" name="Right Arrow 17"/>
+          <p:cNvSpPr/>
+          <p:nvPr/>
+        </p:nvSpPr>
+        <p:spPr>
+          <a:xfrm>
+            <a:off x="4572000" y="5715000"/>
+            <a:ext cx="411480" cy="182880"/>
+          </a:xfrm>
+          <a:prstGeom prst="rightArrow">
+            <a:avLst/>
+          </a:prstGeom>
+          <a:solidFill>
+            <a:srgbClr val="0EA5A4"/>
+          </a:solidFill>
+          <a:ln>
+            <a:noFill/>
+          </a:ln>
+        </p:spPr>
+        <p:style>
+          <a:lnRef idx="1">
+            <a:schemeClr val="accent1"/>
+          </a:lnRef>
+          <a:fillRef idx="3">
+            <a:schemeClr val="accent1"/>
+          </a:fillRef>
+          <a:effectRef idx="2">
+            <a:schemeClr val="accent1"/>
+          </a:effectRef>
+          <a:fontRef idx="minor">
+            <a:schemeClr val="lt1"/>
+          </a:fontRef>
+        </p:style>
+        <p:txBody>
+          <a:bodyPr rtlCol="0" anchor="ctr"/>
+          <a:lstStyle/>
+          <a:p>
+            <a:pPr algn="ctr"/>
+          </a:p>
+        </p:txBody>
+      </p:sp>
+      <p:sp>
+        <p:nvSpPr>
+          <p:cNvPr id="19" name="Oval 18"/>
+          <p:cNvSpPr/>
+          <p:nvPr/>
+        </p:nvSpPr>
+        <p:spPr>
+          <a:xfrm>
+            <a:off x="6400800" y="5486400"/>
+            <a:ext cx="685800" cy="685800"/>
+          </a:xfrm>
+          <a:prstGeom prst="ellipse">
+            <a:avLst/>
+          </a:prstGeom>
+          <a:solidFill>
+            <a:srgbClr val="0EA5A4"/>
+          </a:solidFill>
+          <a:ln>
+            <a:noFill/>
+          </a:ln>
+        </p:spPr>
+        <p:style>
+          <a:lnRef idx="1">
+            <a:schemeClr val="accent1"/>
+          </a:lnRef>
+          <a:fillRef idx="3">
+            <a:schemeClr val="accent1"/>
+          </a:fillRef>
+          <a:effectRef idx="2">
+            <a:schemeClr val="accent1"/>
+          </a:effectRef>
+          <a:fontRef idx="minor">
+            <a:schemeClr val="lt1"/>
+          </a:fontRef>
+        </p:style>
+        <p:txBody>
+          <a:bodyPr rtlCol="0" anchor="ctr" wrap="square"/>
+          <a:lstStyle/>
+          <a:p>
+            <a:pPr algn="ctr">
+              <a:defRPr sz="1600" b="1">
+                <a:solidFill>
+                  <a:srgbClr val="FFFFFF"/>
+                </a:solidFill>
+              </a:defRPr>
+            </a:pPr>
+            <a:r>
+              <a:t>3</a:t>
+            </a:r>
+          </a:p>
+        </p:txBody>
+      </p:sp>
+      <p:sp>
+        <p:nvSpPr>
+          <p:cNvPr id="20" name="TextBox 19"/>
+          <p:cNvSpPr txBox="1"/>
+          <p:nvPr/>
+        </p:nvSpPr>
+        <p:spPr>
+          <a:xfrm>
+            <a:off x="6080760" y="6263640"/>
+            <a:ext cx="1325880" cy="320040"/>
+          </a:xfrm>
+          <a:prstGeom prst="rect">
+            <a:avLst/>
+          </a:prstGeom>
+          <a:noFill/>
+        </p:spPr>
+        <p:txBody>
+          <a:bodyPr wrap="none">
+            <a:spAutoFit/>
+          </a:bodyPr>
+          <a:lstStyle/>
+          <a:p>
+            <a:pPr algn="ctr">
+              <a:defRPr sz="1200">
+                <a:solidFill>
+                  <a:srgbClr val="102A43"/>
+                </a:solidFill>
+              </a:defRPr>
+            </a:pPr>
+            <a:r>
+              <a:t>Claim</a:t>
+            </a:r>
+          </a:p>
+        </p:txBody>
+      </p:sp>
+      <p:sp>
+        <p:nvSpPr>
+          <p:cNvPr id="21" name="Right Arrow 20"/>
+          <p:cNvSpPr/>
+          <p:nvPr/>
+        </p:nvSpPr>
+        <p:spPr>
+          <a:xfrm>
+            <a:off x="7178040" y="5715000"/>
+            <a:ext cx="411480" cy="182880"/>
+          </a:xfrm>
+          <a:prstGeom prst="rightArrow">
+            <a:avLst/>
+          </a:prstGeom>
+          <a:solidFill>
+            <a:srgbClr val="0EA5A4"/>
+          </a:solidFill>
+          <a:ln>
+            <a:noFill/>
+          </a:ln>
+        </p:spPr>
+        <p:style>
+          <a:lnRef idx="1">
+            <a:schemeClr val="accent1"/>
+          </a:lnRef>
+          <a:fillRef idx="3">
+            <a:schemeClr val="accent1"/>
+          </a:fillRef>
+          <a:effectRef idx="2">
+            <a:schemeClr val="accent1"/>
+          </a:effectRef>
+          <a:fontRef idx="minor">
+            <a:schemeClr val="lt1"/>
+          </a:fontRef>
+        </p:style>
+        <p:txBody>
+          <a:bodyPr rtlCol="0" anchor="ctr"/>
+          <a:lstStyle/>
+          <a:p>
+            <a:pPr algn="ctr"/>
+          </a:p>
+        </p:txBody>
+      </p:sp>
+      <p:sp>
+        <p:nvSpPr>
+          <p:cNvPr id="22" name="Oval 21"/>
+          <p:cNvSpPr/>
+          <p:nvPr/>
+        </p:nvSpPr>
+        <p:spPr>
+          <a:xfrm>
+            <a:off x="9006840" y="5486400"/>
+            <a:ext cx="685800" cy="685800"/>
+          </a:xfrm>
+          <a:prstGeom prst="ellipse">
+            <a:avLst/>
+          </a:prstGeom>
+          <a:solidFill>
+            <a:srgbClr val="1B4D89"/>
+          </a:solidFill>
+          <a:ln>
+            <a:noFill/>
+          </a:ln>
+        </p:spPr>
+        <p:style>
+          <a:lnRef idx="1">
+            <a:schemeClr val="accent1"/>
+          </a:lnRef>
+          <a:fillRef idx="3">
+            <a:schemeClr val="accent1"/>
+          </a:fillRef>
+          <a:effectRef idx="2">
+            <a:schemeClr val="accent1"/>
+          </a:effectRef>
+          <a:fontRef idx="minor">
+            <a:schemeClr val="lt1"/>
+          </a:fontRef>
+        </p:style>
+        <p:txBody>
+          <a:bodyPr rtlCol="0" anchor="ctr" wrap="square"/>
+          <a:lstStyle/>
+          <a:p>
+            <a:pPr algn="ctr">
+              <a:defRPr sz="1600" b="1">
+                <a:solidFill>
+                  <a:srgbClr val="FFFFFF"/>
+                </a:solidFill>
+              </a:defRPr>
+            </a:pPr>
+            <a:r>
+              <a:t>4</a:t>
+            </a:r>
+          </a:p>
+        </p:txBody>
+      </p:sp>
+      <p:sp>
+        <p:nvSpPr>
+          <p:cNvPr id="23" name="TextBox 22"/>
+          <p:cNvSpPr txBox="1"/>
+          <p:nvPr/>
+        </p:nvSpPr>
+        <p:spPr>
+          <a:xfrm>
+            <a:off x="8686800" y="6263640"/>
+            <a:ext cx="1325880" cy="320040"/>
+          </a:xfrm>
+          <a:prstGeom prst="rect">
+            <a:avLst/>
+          </a:prstGeom>
+          <a:noFill/>
+        </p:spPr>
+        <p:txBody>
+          <a:bodyPr wrap="none">
+            <a:spAutoFit/>
+          </a:bodyPr>
+          <a:lstStyle/>
+          <a:p>
+            <a:pPr algn="ctr">
+              <a:defRPr sz="1200">
+                <a:solidFill>
+                  <a:srgbClr val="102A43"/>
+                </a:solidFill>
+              </a:defRPr>
+            </a:pPr>
+            <a:r>
+              <a:t>Connect</a:t>
             </a:r>
           </a:p>
         </p:txBody>
@@ -4252,6 +6336,292 @@
   <p:clrMapOvr>
     <a:masterClrMapping/>
   </p:clrMapOvr>
+  <p:transition spd="med">
+    <p:wipe/>
+  </p:transition>
+  <p:timing>
+    <p:tnLst>
+      <p:par>
+        <p:cTn id="0" dur="indefinite" restart="never" nodeType="tmRoot">
+          <p:childTnLst>
+            <p:seq concurrent="1" nextAc="seek">
+              <p:cTn id="1" dur="indefinite" nodeType="mainSeq">
+                <p:childTnLst>
+                  <p:par>
+                    <p:cTn id="104" dur="indefinite" nodeType="clickEffect">
+                      <p:stCondLst>
+                        <p:cond delay="0"/>
+                      </p:stCondLst>
+                      <p:childTnLst>
+                        <p:animEffect transition="in" filter="fade">
+                          <p:cBhvr>
+                            <p:cTn dur="600" fill="hold"/>
+                            <p:tgtEl>
+                              <p:spTgt spid="4"/>
+                            </p:tgtEl>
+                          </p:cBhvr>
+                        </p:animEffect>
+                      </p:childTnLst>
+                    </p:cTn>
+                  </p:par>
+                  <p:par>
+                    <p:cTn id="105" dur="indefinite" nodeType="withEffect">
+                      <p:stCondLst>
+                        <p:cond delay="200"/>
+                      </p:stCondLst>
+                      <p:childTnLst>
+                        <p:animEffect transition="in" filter="fade">
+                          <p:cBhvr>
+                            <p:cTn dur="600" fill="hold"/>
+                            <p:tgtEl>
+                              <p:spTgt spid="5"/>
+                            </p:tgtEl>
+                          </p:cBhvr>
+                        </p:animEffect>
+                      </p:childTnLst>
+                    </p:cTn>
+                  </p:par>
+                  <p:par>
+                    <p:cTn id="106" dur="indefinite" nodeType="withEffect">
+                      <p:stCondLst>
+                        <p:cond delay="200"/>
+                      </p:stCondLst>
+                      <p:childTnLst>
+                        <p:animEffect transition="in" filter="fade">
+                          <p:cBhvr>
+                            <p:cTn dur="600" fill="hold"/>
+                            <p:tgtEl>
+                              <p:spTgt spid="6"/>
+                            </p:tgtEl>
+                          </p:cBhvr>
+                        </p:animEffect>
+                      </p:childTnLst>
+                    </p:cTn>
+                  </p:par>
+                </p:childTnLst>
+              </p:cTn>
+            </p:seq>
+            <p:seq concurrent="1" nextAc="seek">
+              <p:cTn id="1" dur="indefinite" nodeType="mainSeq">
+                <p:childTnLst>
+                  <p:par>
+                    <p:cTn id="109" dur="indefinite" nodeType="clickEffect">
+                      <p:stCondLst>
+                        <p:cond delay="0"/>
+                      </p:stCondLst>
+                      <p:childTnLst>
+                        <p:animEffect transition="in" filter="fade">
+                          <p:cBhvr>
+                            <p:cTn dur="600" fill="hold"/>
+                            <p:tgtEl>
+                              <p:spTgt spid="9"/>
+                            </p:tgtEl>
+                          </p:cBhvr>
+                        </p:animEffect>
+                      </p:childTnLst>
+                    </p:cTn>
+                  </p:par>
+                  <p:par>
+                    <p:cTn id="110" dur="indefinite" nodeType="withEffect">
+                      <p:stCondLst>
+                        <p:cond delay="200"/>
+                      </p:stCondLst>
+                      <p:childTnLst>
+                        <p:animEffect transition="in" filter="fade">
+                          <p:cBhvr>
+                            <p:cTn dur="600" fill="hold"/>
+                            <p:tgtEl>
+                              <p:spTgt spid="10"/>
+                            </p:tgtEl>
+                          </p:cBhvr>
+                        </p:animEffect>
+                      </p:childTnLst>
+                    </p:cTn>
+                  </p:par>
+                  <p:par>
+                    <p:cTn id="111" dur="indefinite" nodeType="withEffect">
+                      <p:stCondLst>
+                        <p:cond delay="200"/>
+                      </p:stCondLst>
+                      <p:childTnLst>
+                        <p:animEffect transition="in" filter="fade">
+                          <p:cBhvr>
+                            <p:cTn dur="600" fill="hold"/>
+                            <p:tgtEl>
+                              <p:spTgt spid="11"/>
+                            </p:tgtEl>
+                          </p:cBhvr>
+                        </p:animEffect>
+                      </p:childTnLst>
+                    </p:cTn>
+                  </p:par>
+                  <p:par>
+                    <p:cTn id="112" dur="indefinite" nodeType="withEffect">
+                      <p:stCondLst>
+                        <p:cond delay="200"/>
+                      </p:stCondLst>
+                      <p:childTnLst>
+                        <p:animEffect transition="in" filter="fade">
+                          <p:cBhvr>
+                            <p:cTn dur="600" fill="hold"/>
+                            <p:tgtEl>
+                              <p:spTgt spid="12"/>
+                            </p:tgtEl>
+                          </p:cBhvr>
+                        </p:animEffect>
+                      </p:childTnLst>
+                    </p:cTn>
+                  </p:par>
+                </p:childTnLst>
+              </p:cTn>
+            </p:seq>
+            <p:seq concurrent="1" nextAc="seek">
+              <p:cTn id="1" dur="indefinite" nodeType="mainSeq">
+                <p:childTnLst>
+                  <p:par>
+                    <p:cTn id="113" dur="indefinite" nodeType="clickEffect">
+                      <p:stCondLst>
+                        <p:cond delay="0"/>
+                      </p:stCondLst>
+                      <p:childTnLst>
+                        <p:animEffect transition="in" filter="fade">
+                          <p:cBhvr>
+                            <p:cTn dur="600" fill="hold"/>
+                            <p:tgtEl>
+                              <p:spTgt spid="13"/>
+                            </p:tgtEl>
+                          </p:cBhvr>
+                        </p:animEffect>
+                      </p:childTnLst>
+                    </p:cTn>
+                  </p:par>
+                  <p:par>
+                    <p:cTn id="114" dur="indefinite" nodeType="withEffect">
+                      <p:stCondLst>
+                        <p:cond delay="200"/>
+                      </p:stCondLst>
+                      <p:childTnLst>
+                        <p:animEffect transition="in" filter="fade">
+                          <p:cBhvr>
+                            <p:cTn dur="600" fill="hold"/>
+                            <p:tgtEl>
+                              <p:spTgt spid="14"/>
+                            </p:tgtEl>
+                          </p:cBhvr>
+                        </p:animEffect>
+                      </p:childTnLst>
+                    </p:cTn>
+                  </p:par>
+                  <p:par>
+                    <p:cTn id="116" dur="indefinite" nodeType="withEffect">
+                      <p:stCondLst>
+                        <p:cond delay="200"/>
+                      </p:stCondLst>
+                      <p:childTnLst>
+                        <p:animEffect transition="in" filter="fade">
+                          <p:cBhvr>
+                            <p:cTn dur="600" fill="hold"/>
+                            <p:tgtEl>
+                              <p:spTgt spid="16"/>
+                            </p:tgtEl>
+                          </p:cBhvr>
+                        </p:animEffect>
+                      </p:childTnLst>
+                    </p:cTn>
+                  </p:par>
+                  <p:par>
+                    <p:cTn id="117" dur="indefinite" nodeType="withEffect">
+                      <p:stCondLst>
+                        <p:cond delay="200"/>
+                      </p:stCondLst>
+                      <p:childTnLst>
+                        <p:animEffect transition="in" filter="fade">
+                          <p:cBhvr>
+                            <p:cTn dur="600" fill="hold"/>
+                            <p:tgtEl>
+                              <p:spTgt spid="17"/>
+                            </p:tgtEl>
+                          </p:cBhvr>
+                        </p:animEffect>
+                      </p:childTnLst>
+                    </p:cTn>
+                  </p:par>
+                  <p:par>
+                    <p:cTn id="119" dur="indefinite" nodeType="withEffect">
+                      <p:stCondLst>
+                        <p:cond delay="200"/>
+                      </p:stCondLst>
+                      <p:childTnLst>
+                        <p:animEffect transition="in" filter="fade">
+                          <p:cBhvr>
+                            <p:cTn dur="600" fill="hold"/>
+                            <p:tgtEl>
+                              <p:spTgt spid="19"/>
+                            </p:tgtEl>
+                          </p:cBhvr>
+                        </p:animEffect>
+                      </p:childTnLst>
+                    </p:cTn>
+                  </p:par>
+                  <p:par>
+                    <p:cTn id="120" dur="indefinite" nodeType="withEffect">
+                      <p:stCondLst>
+                        <p:cond delay="200"/>
+                      </p:stCondLst>
+                      <p:childTnLst>
+                        <p:animEffect transition="in" filter="fade">
+                          <p:cBhvr>
+                            <p:cTn dur="600" fill="hold"/>
+                            <p:tgtEl>
+                              <p:spTgt spid="20"/>
+                            </p:tgtEl>
+                          </p:cBhvr>
+                        </p:animEffect>
+                      </p:childTnLst>
+                    </p:cTn>
+                  </p:par>
+                  <p:par>
+                    <p:cTn id="122" dur="indefinite" nodeType="withEffect">
+                      <p:stCondLst>
+                        <p:cond delay="200"/>
+                      </p:stCondLst>
+                      <p:childTnLst>
+                        <p:animEffect transition="in" filter="fade">
+                          <p:cBhvr>
+                            <p:cTn dur="600" fill="hold"/>
+                            <p:tgtEl>
+                              <p:spTgt spid="22"/>
+                            </p:tgtEl>
+                          </p:cBhvr>
+                        </p:animEffect>
+                      </p:childTnLst>
+                    </p:cTn>
+                  </p:par>
+                  <p:par>
+                    <p:cTn id="123" dur="indefinite" nodeType="withEffect">
+                      <p:stCondLst>
+                        <p:cond delay="200"/>
+                      </p:stCondLst>
+                      <p:childTnLst>
+                        <p:animEffect transition="in" filter="fade">
+                          <p:cBhvr>
+                            <p:cTn dur="600" fill="hold"/>
+                            <p:tgtEl>
+                              <p:spTgt spid="23"/>
+                            </p:tgtEl>
+                          </p:cBhvr>
+                        </p:animEffect>
+                      </p:childTnLst>
+                    </p:cTn>
+                  </p:par>
+                </p:childTnLst>
+              </p:cTn>
+            </p:seq>
+          </p:childTnLst>
+        </p:cTn>
+      </p:par>
+    </p:tnLst>
+  </p:timing>
 </p:sld>
 </file>
 
@@ -4275,51 +6645,44 @@
       <p:grpSpPr/>
       <p:sp>
         <p:nvSpPr>
-          <p:cNvPr id="2" name="TextBox 1"/>
-          <p:cNvSpPr txBox="1"/>
-          <p:nvPr/>
-        </p:nvSpPr>
-        <p:spPr>
-          <a:xfrm>
-            <a:off x="548640" y="320040"/>
-            <a:ext cx="11064240" cy="1097280"/>
+          <p:cNvPr id="2" name="Rectangle 1"/>
+          <p:cNvSpPr/>
+          <p:nvPr/>
+        </p:nvSpPr>
+        <p:spPr>
+          <a:xfrm>
+            <a:off x="0" y="0"/>
+            <a:ext cx="12191695" cy="109728"/>
           </a:xfrm>
           <a:prstGeom prst="rect">
             <a:avLst/>
           </a:prstGeom>
-          <a:noFill/>
-        </p:spPr>
-        <p:txBody>
-          <a:bodyPr wrap="square">
-            <a:spAutoFit/>
-          </a:bodyPr>
-          <a:lstStyle/>
-          <a:p>
-            <a:pPr>
-              <a:defRPr sz="3200" b="1">
-                <a:solidFill>
-                  <a:srgbClr val="1B4D89"/>
-                </a:solidFill>
-              </a:defRPr>
-            </a:pPr>
-            <a:r>
-              <a:t>Slide 5: Expected Impact</a:t>
-            </a:r>
-          </a:p>
-          <a:p>
-            <a:pPr>
-              <a:spcBef>
-                <a:spcPts val="600"/>
-              </a:spcBef>
-              <a:defRPr sz="1600">
-                <a:solidFill>
-                  <a:srgbClr val="627D98"/>
-                </a:solidFill>
-              </a:defRPr>
-            </a:pPr>
-            <a:r>
-              <a:t>Benefits for students and institution</a:t>
-            </a:r>
+          <a:solidFill>
+            <a:srgbClr val="0EA5A4"/>
+          </a:solidFill>
+          <a:ln>
+            <a:noFill/>
+          </a:ln>
+        </p:spPr>
+        <p:style>
+          <a:lnRef idx="1">
+            <a:schemeClr val="accent1"/>
+          </a:lnRef>
+          <a:fillRef idx="3">
+            <a:schemeClr val="accent1"/>
+          </a:fillRef>
+          <a:effectRef idx="2">
+            <a:schemeClr val="accent1"/>
+          </a:effectRef>
+          <a:fontRef idx="minor">
+            <a:schemeClr val="lt1"/>
+          </a:fontRef>
+        </p:style>
+        <p:txBody>
+          <a:bodyPr rtlCol="0" anchor="ctr"/>
+          <a:lstStyle/>
+          <a:p>
+            <a:pPr algn="ctr"/>
           </a:p>
         </p:txBody>
       </p:sp>
@@ -4331,121 +6694,8 @@
         </p:nvSpPr>
         <p:spPr>
           <a:xfrm>
-            <a:off x="685800" y="1417320"/>
-            <a:ext cx="10789920" cy="5029200"/>
-          </a:xfrm>
-          <a:prstGeom prst="rect">
-            <a:avLst/>
-          </a:prstGeom>
-          <a:noFill/>
-        </p:spPr>
-        <p:txBody>
-          <a:bodyPr wrap="square">
-            <a:spAutoFit/>
-          </a:bodyPr>
-          <a:lstStyle/>
-          <a:p>
-            <a:pPr>
-              <a:spcAft>
-                <a:spcPts val="1000"/>
-              </a:spcAft>
-              <a:defRPr sz="2000">
-                <a:solidFill>
-                  <a:srgbClr val="102A43"/>
-                </a:solidFill>
-              </a:defRPr>
-            </a:pPr>
-            <a:r>
-              <a:t>Faster recovery of valuable belongings through intelligent matching.</a:t>
-            </a:r>
-          </a:p>
-          <a:p>
-            <a:pPr>
-              <a:spcAft>
-                <a:spcPts val="1000"/>
-              </a:spcAft>
-              <a:defRPr sz="2000">
-                <a:solidFill>
-                  <a:srgbClr val="102A43"/>
-                </a:solidFill>
-              </a:defRPr>
-            </a:pPr>
-            <a:r>
-              <a:t>Safer campus community with consent-based contact sharing.</a:t>
-            </a:r>
-          </a:p>
-          <a:p>
-            <a:pPr>
-              <a:spcAft>
-                <a:spcPts val="1000"/>
-              </a:spcAft>
-              <a:defRPr sz="2000">
-                <a:solidFill>
-                  <a:srgbClr val="102A43"/>
-                </a:solidFill>
-              </a:defRPr>
-            </a:pPr>
-            <a:r>
-              <a:t>Reduced replacement cost and waste (supports SDG 12 indirectly).</a:t>
-            </a:r>
-          </a:p>
-          <a:p>
-            <a:pPr>
-              <a:spcAft>
-                <a:spcPts val="1000"/>
-              </a:spcAft>
-              <a:defRPr sz="2000">
-                <a:solidFill>
-                  <a:srgbClr val="102A43"/>
-                </a:solidFill>
-              </a:defRPr>
-            </a:pPr>
-            <a:r>
-              <a:t>Organized digital lost &amp; found instead of scattered social media posts.</a:t>
-            </a:r>
-          </a:p>
-          <a:p>
-            <a:pPr>
-              <a:spcAft>
-                <a:spcPts val="1000"/>
-              </a:spcAft>
-              <a:defRPr sz="2000">
-                <a:solidFill>
-                  <a:srgbClr val="102A43"/>
-                </a:solidFill>
-              </a:defRPr>
-            </a:pPr>
-            <a:r>
-              <a:t>Supports SDG 11: Sustainable Cities and Communities — safer, inclusive campus life.</a:t>
-            </a:r>
-          </a:p>
-          <a:p>
-            <a:pPr>
-              <a:spcAft>
-                <a:spcPts val="1000"/>
-              </a:spcAft>
-              <a:defRPr sz="2000">
-                <a:solidFill>
-                  <a:srgbClr val="102A43"/>
-                </a:solidFill>
-              </a:defRPr>
-            </a:pPr>
-            <a:r>
-              <a:t>Scalable model for college-wide adoption with VTU ID verification in future.</a:t>
-            </a:r>
-          </a:p>
-        </p:txBody>
-      </p:sp>
-      <p:sp>
-        <p:nvSpPr>
-          <p:cNvPr id="4" name="TextBox 3"/>
-          <p:cNvSpPr txBox="1"/>
-          <p:nvPr/>
-        </p:nvSpPr>
-        <p:spPr>
-          <a:xfrm>
-            <a:off x="548640" y="6263640"/>
-            <a:ext cx="10972800" cy="365760"/>
+            <a:off x="594360" y="320040"/>
+            <a:ext cx="10972800" cy="1005840"/>
           </a:xfrm>
           <a:prstGeom prst="rect">
             <a:avLst/>
@@ -4459,14 +6709,394 @@
           <a:lstStyle/>
           <a:p>
             <a:pPr>
-              <a:defRPr sz="1100">
+              <a:defRPr sz="3000" b="1">
+                <a:solidFill>
+                  <a:srgbClr val="1B4D89"/>
+                </a:solidFill>
+              </a:defRPr>
+            </a:pPr>
+            <a:r>
+              <a:t>Expected Impact</a:t>
+            </a:r>
+          </a:p>
+          <a:p>
+            <a:pPr>
+              <a:defRPr sz="1400">
                 <a:solidFill>
                   <a:srgbClr val="627D98"/>
                 </a:solidFill>
               </a:defRPr>
             </a:pPr>
             <a:r>
-              <a:t>FoundYourThing  |  github.com/sainihalmeda-ai/FoundYourThing</a:t>
+              <a:t>Why this matters on campus</a:t>
+            </a:r>
+          </a:p>
+        </p:txBody>
+      </p:sp>
+      <p:sp>
+        <p:nvSpPr>
+          <p:cNvPr id="4" name="Rounded Rectangle 3"/>
+          <p:cNvSpPr/>
+          <p:nvPr/>
+        </p:nvSpPr>
+        <p:spPr>
+          <a:xfrm>
+            <a:off x="777240" y="1828800"/>
+            <a:ext cx="2514600" cy="2926080"/>
+          </a:xfrm>
+          <a:prstGeom prst="roundRect">
+            <a:avLst/>
+          </a:prstGeom>
+          <a:solidFill>
+            <a:srgbClr val="E6F0FF"/>
+          </a:solidFill>
+          <a:ln>
+            <a:noFill/>
+          </a:ln>
+        </p:spPr>
+        <p:style>
+          <a:lnRef idx="1">
+            <a:schemeClr val="accent1"/>
+          </a:lnRef>
+          <a:fillRef idx="3">
+            <a:schemeClr val="accent1"/>
+          </a:fillRef>
+          <a:effectRef idx="2">
+            <a:schemeClr val="accent1"/>
+          </a:effectRef>
+          <a:fontRef idx="minor">
+            <a:schemeClr val="lt1"/>
+          </a:fontRef>
+        </p:style>
+        <p:txBody>
+          <a:bodyPr rtlCol="0" anchor="ctr" wrap="square"/>
+          <a:lstStyle/>
+          <a:p>
+            <a:pPr algn="ctr">
+              <a:defRPr sz="1600" b="1">
+                <a:solidFill>
+                  <a:srgbClr val="1B4D89"/>
+                </a:solidFill>
+              </a:defRPr>
+            </a:pPr>
+            <a:r>
+              <a:t>Faster Recovery</a:t>
+            </a:r>
+            <a:br/>
+            <a:br/>
+            <a:r>
+              <a:t>AI match</a:t>
+            </a:r>
+            <a:br/>
+            <a:r>
+              <a:t>in seconds</a:t>
+            </a:r>
+          </a:p>
+        </p:txBody>
+      </p:sp>
+      <p:sp>
+        <p:nvSpPr>
+          <p:cNvPr id="5" name="TextBox 4"/>
+          <p:cNvSpPr txBox="1"/>
+          <p:nvPr/>
+        </p:nvSpPr>
+        <p:spPr>
+          <a:xfrm>
+            <a:off x="777240" y="1965960"/>
+            <a:ext cx="2514600" cy="548640"/>
+          </a:xfrm>
+          <a:prstGeom prst="rect">
+            <a:avLst/>
+          </a:prstGeom>
+          <a:noFill/>
+        </p:spPr>
+        <p:txBody>
+          <a:bodyPr wrap="none">
+            <a:spAutoFit/>
+          </a:bodyPr>
+          <a:lstStyle/>
+          <a:p>
+            <a:pPr algn="ctr">
+              <a:defRPr sz="3400"/>
+            </a:pPr>
+            <a:r>
+              <a:t>⚡</a:t>
+            </a:r>
+          </a:p>
+        </p:txBody>
+      </p:sp>
+      <p:sp>
+        <p:nvSpPr>
+          <p:cNvPr id="6" name="Rounded Rectangle 5"/>
+          <p:cNvSpPr/>
+          <p:nvPr/>
+        </p:nvSpPr>
+        <p:spPr>
+          <a:xfrm>
+            <a:off x="3566160" y="1828800"/>
+            <a:ext cx="2514600" cy="2926080"/>
+          </a:xfrm>
+          <a:prstGeom prst="roundRect">
+            <a:avLst/>
+          </a:prstGeom>
+          <a:solidFill>
+            <a:srgbClr val="D6F6F5"/>
+          </a:solidFill>
+          <a:ln>
+            <a:noFill/>
+          </a:ln>
+        </p:spPr>
+        <p:style>
+          <a:lnRef idx="1">
+            <a:schemeClr val="accent1"/>
+          </a:lnRef>
+          <a:fillRef idx="3">
+            <a:schemeClr val="accent1"/>
+          </a:fillRef>
+          <a:effectRef idx="2">
+            <a:schemeClr val="accent1"/>
+          </a:effectRef>
+          <a:fontRef idx="minor">
+            <a:schemeClr val="lt1"/>
+          </a:fontRef>
+        </p:style>
+        <p:txBody>
+          <a:bodyPr rtlCol="0" anchor="ctr" wrap="square"/>
+          <a:lstStyle/>
+          <a:p>
+            <a:pPr algn="ctr">
+              <a:defRPr sz="1600" b="1">
+                <a:solidFill>
+                  <a:srgbClr val="102A43"/>
+                </a:solidFill>
+              </a:defRPr>
+            </a:pPr>
+            <a:r>
+              <a:t>Safe Contact</a:t>
+            </a:r>
+            <a:br/>
+            <a:br/>
+            <a:r>
+              <a:t>Phone after</a:t>
+            </a:r>
+            <a:br/>
+            <a:r>
+              <a:t>consent</a:t>
+            </a:r>
+          </a:p>
+        </p:txBody>
+      </p:sp>
+      <p:sp>
+        <p:nvSpPr>
+          <p:cNvPr id="7" name="TextBox 6"/>
+          <p:cNvSpPr txBox="1"/>
+          <p:nvPr/>
+        </p:nvSpPr>
+        <p:spPr>
+          <a:xfrm>
+            <a:off x="3566160" y="1965960"/>
+            <a:ext cx="2514600" cy="548640"/>
+          </a:xfrm>
+          <a:prstGeom prst="rect">
+            <a:avLst/>
+          </a:prstGeom>
+          <a:noFill/>
+        </p:spPr>
+        <p:txBody>
+          <a:bodyPr wrap="none">
+            <a:spAutoFit/>
+          </a:bodyPr>
+          <a:lstStyle/>
+          <a:p>
+            <a:pPr algn="ctr">
+              <a:defRPr sz="3400"/>
+            </a:pPr>
+            <a:r>
+              <a:t>🔐</a:t>
+            </a:r>
+          </a:p>
+        </p:txBody>
+      </p:sp>
+      <p:sp>
+        <p:nvSpPr>
+          <p:cNvPr id="8" name="Rounded Rectangle 7"/>
+          <p:cNvSpPr/>
+          <p:nvPr/>
+        </p:nvSpPr>
+        <p:spPr>
+          <a:xfrm>
+            <a:off x="6355079" y="1828800"/>
+            <a:ext cx="2514600" cy="2926080"/>
+          </a:xfrm>
+          <a:prstGeom prst="roundRect">
+            <a:avLst/>
+          </a:prstGeom>
+          <a:solidFill>
+            <a:srgbClr val="E6F0FF"/>
+          </a:solidFill>
+          <a:ln>
+            <a:noFill/>
+          </a:ln>
+        </p:spPr>
+        <p:style>
+          <a:lnRef idx="1">
+            <a:schemeClr val="accent1"/>
+          </a:lnRef>
+          <a:fillRef idx="3">
+            <a:schemeClr val="accent1"/>
+          </a:fillRef>
+          <a:effectRef idx="2">
+            <a:schemeClr val="accent1"/>
+          </a:effectRef>
+          <a:fontRef idx="minor">
+            <a:schemeClr val="lt1"/>
+          </a:fontRef>
+        </p:style>
+        <p:txBody>
+          <a:bodyPr rtlCol="0" anchor="ctr" wrap="square"/>
+          <a:lstStyle/>
+          <a:p>
+            <a:pPr algn="ctr">
+              <a:defRPr sz="1600" b="1">
+                <a:solidFill>
+                  <a:srgbClr val="1B4D89"/>
+                </a:solidFill>
+              </a:defRPr>
+            </a:pPr>
+            <a:r>
+              <a:t>SDG 11</a:t>
+            </a:r>
+            <a:br/>
+            <a:br/>
+            <a:r>
+              <a:t>Better campus</a:t>
+            </a:r>
+            <a:br/>
+            <a:r>
+              <a:t>community</a:t>
+            </a:r>
+          </a:p>
+        </p:txBody>
+      </p:sp>
+      <p:sp>
+        <p:nvSpPr>
+          <p:cNvPr id="9" name="TextBox 8"/>
+          <p:cNvSpPr txBox="1"/>
+          <p:nvPr/>
+        </p:nvSpPr>
+        <p:spPr>
+          <a:xfrm>
+            <a:off x="6355079" y="1965960"/>
+            <a:ext cx="2514600" cy="548640"/>
+          </a:xfrm>
+          <a:prstGeom prst="rect">
+            <a:avLst/>
+          </a:prstGeom>
+          <a:noFill/>
+        </p:spPr>
+        <p:txBody>
+          <a:bodyPr wrap="none">
+            <a:spAutoFit/>
+          </a:bodyPr>
+          <a:lstStyle/>
+          <a:p>
+            <a:pPr algn="ctr">
+              <a:defRPr sz="3400"/>
+            </a:pPr>
+            <a:r>
+              <a:t>🏫</a:t>
+            </a:r>
+          </a:p>
+        </p:txBody>
+      </p:sp>
+      <p:sp>
+        <p:nvSpPr>
+          <p:cNvPr id="10" name="Rounded Rectangle 9"/>
+          <p:cNvSpPr/>
+          <p:nvPr/>
+        </p:nvSpPr>
+        <p:spPr>
+          <a:xfrm>
+            <a:off x="9143999" y="1828800"/>
+            <a:ext cx="2514600" cy="2926080"/>
+          </a:xfrm>
+          <a:prstGeom prst="roundRect">
+            <a:avLst/>
+          </a:prstGeom>
+          <a:solidFill>
+            <a:srgbClr val="D6F6F5"/>
+          </a:solidFill>
+          <a:ln>
+            <a:noFill/>
+          </a:ln>
+        </p:spPr>
+        <p:style>
+          <a:lnRef idx="1">
+            <a:schemeClr val="accent1"/>
+          </a:lnRef>
+          <a:fillRef idx="3">
+            <a:schemeClr val="accent1"/>
+          </a:fillRef>
+          <a:effectRef idx="2">
+            <a:schemeClr val="accent1"/>
+          </a:effectRef>
+          <a:fontRef idx="minor">
+            <a:schemeClr val="lt1"/>
+          </a:fontRef>
+        </p:style>
+        <p:txBody>
+          <a:bodyPr rtlCol="0" anchor="ctr" wrap="square"/>
+          <a:lstStyle/>
+          <a:p>
+            <a:pPr algn="ctr">
+              <a:defRPr sz="1600" b="1">
+                <a:solidFill>
+                  <a:srgbClr val="102A43"/>
+                </a:solidFill>
+              </a:defRPr>
+            </a:pPr>
+            <a:r>
+              <a:t>Less Waste</a:t>
+            </a:r>
+            <a:br/>
+            <a:br/>
+            <a:r>
+              <a:t>Fewer replaced</a:t>
+            </a:r>
+            <a:br/>
+            <a:r>
+              <a:t>valuables</a:t>
+            </a:r>
+          </a:p>
+        </p:txBody>
+      </p:sp>
+      <p:sp>
+        <p:nvSpPr>
+          <p:cNvPr id="11" name="TextBox 10"/>
+          <p:cNvSpPr txBox="1"/>
+          <p:nvPr/>
+        </p:nvSpPr>
+        <p:spPr>
+          <a:xfrm>
+            <a:off x="9143999" y="1965960"/>
+            <a:ext cx="2514600" cy="548640"/>
+          </a:xfrm>
+          <a:prstGeom prst="rect">
+            <a:avLst/>
+          </a:prstGeom>
+          <a:noFill/>
+        </p:spPr>
+        <p:txBody>
+          <a:bodyPr wrap="none">
+            <a:spAutoFit/>
+          </a:bodyPr>
+          <a:lstStyle/>
+          <a:p>
+            <a:pPr algn="ctr">
+              <a:defRPr sz="3400"/>
+            </a:pPr>
+            <a:r>
+              <a:t>♻️</a:t>
             </a:r>
           </a:p>
         </p:txBody>
@@ -4476,6 +7106,93 @@
   <p:clrMapOvr>
     <a:masterClrMapping/>
   </p:clrMapOvr>
+  <p:transition spd="med">
+    <p:fade/>
+  </p:transition>
+  <p:timing>
+    <p:tnLst>
+      <p:par>
+        <p:cTn id="0" dur="indefinite" restart="never" nodeType="tmRoot">
+          <p:childTnLst>
+            <p:seq concurrent="1" nextAc="seek">
+              <p:cTn id="1" dur="indefinite" nodeType="mainSeq">
+                <p:childTnLst>
+                  <p:par>
+                    <p:cTn id="104" dur="indefinite" nodeType="clickEffect">
+                      <p:stCondLst>
+                        <p:cond delay="0"/>
+                      </p:stCondLst>
+                      <p:childTnLst>
+                        <p:animEffect transition="in" filter="fly">
+                          <p:cBhvr>
+                            <p:cTn dur="600" fill="hold"/>
+                            <p:tgtEl>
+                              <p:spTgt spid="4"/>
+                            </p:tgtEl>
+                          </p:cBhvr>
+                        </p:animEffect>
+                      </p:childTnLst>
+                    </p:cTn>
+                  </p:par>
+                  <p:par>
+                    <p:cTn id="106" dur="indefinite" nodeType="withEffect">
+                      <p:stCondLst>
+                        <p:cond delay="200"/>
+                      </p:stCondLst>
+                      <p:childTnLst>
+                        <p:animEffect transition="in" filter="fly">
+                          <p:cBhvr>
+                            <p:cTn dur="600" fill="hold"/>
+                            <p:tgtEl>
+                              <p:spTgt spid="6"/>
+                            </p:tgtEl>
+                          </p:cBhvr>
+                        </p:animEffect>
+                      </p:childTnLst>
+                    </p:cTn>
+                  </p:par>
+                  <p:par>
+                    <p:cTn id="108" dur="indefinite" nodeType="withEffect">
+                      <p:stCondLst>
+                        <p:cond delay="200"/>
+                      </p:stCondLst>
+                      <p:childTnLst>
+                        <p:animEffect transition="in" filter="fly">
+                          <p:cBhvr>
+                            <p:cTn dur="600" fill="hold"/>
+                            <p:tgtEl>
+                              <p:spTgt spid="8"/>
+                            </p:tgtEl>
+                          </p:cBhvr>
+                        </p:animEffect>
+                      </p:childTnLst>
+                    </p:cTn>
+                  </p:par>
+                  <p:par>
+                    <p:cTn id="110" dur="indefinite" nodeType="withEffect">
+                      <p:stCondLst>
+                        <p:cond delay="200"/>
+                      </p:stCondLst>
+                      <p:childTnLst>
+                        <p:animEffect transition="in" filter="fly">
+                          <p:cBhvr>
+                            <p:cTn dur="600" fill="hold"/>
+                            <p:tgtEl>
+                              <p:spTgt spid="10"/>
+                            </p:tgtEl>
+                          </p:cBhvr>
+                        </p:animEffect>
+                      </p:childTnLst>
+                    </p:cTn>
+                  </p:par>
+                </p:childTnLst>
+              </p:cTn>
+            </p:seq>
+          </p:childTnLst>
+        </p:cTn>
+      </p:par>
+    </p:tnLst>
+  </p:timing>
 </p:sld>
 </file>
 
@@ -4485,7 +7202,7 @@
     <p:bg>
       <p:bgPr>
         <a:solidFill>
-          <a:srgbClr val="FFFFFF"/>
+          <a:srgbClr val="F4F7FB"/>
         </a:solidFill>
         <a:effectLst/>
       </p:bgPr>
@@ -4499,51 +7216,44 @@
       <p:grpSpPr/>
       <p:sp>
         <p:nvSpPr>
-          <p:cNvPr id="2" name="TextBox 1"/>
-          <p:cNvSpPr txBox="1"/>
-          <p:nvPr/>
-        </p:nvSpPr>
-        <p:spPr>
-          <a:xfrm>
-            <a:off x="548640" y="320040"/>
-            <a:ext cx="11064240" cy="1097280"/>
+          <p:cNvPr id="2" name="Rectangle 1"/>
+          <p:cNvSpPr/>
+          <p:nvPr/>
+        </p:nvSpPr>
+        <p:spPr>
+          <a:xfrm>
+            <a:off x="0" y="0"/>
+            <a:ext cx="12191695" cy="109728"/>
           </a:xfrm>
           <a:prstGeom prst="rect">
             <a:avLst/>
           </a:prstGeom>
-          <a:noFill/>
-        </p:spPr>
-        <p:txBody>
-          <a:bodyPr wrap="square">
-            <a:spAutoFit/>
-          </a:bodyPr>
-          <a:lstStyle/>
-          <a:p>
-            <a:pPr>
-              <a:defRPr sz="3200" b="1">
-                <a:solidFill>
-                  <a:srgbClr val="1B4D89"/>
-                </a:solidFill>
-              </a:defRPr>
-            </a:pPr>
-            <a:r>
-              <a:t>Slide 6: Feasibility &amp; Implementation Plan</a:t>
-            </a:r>
-          </a:p>
-          <a:p>
-            <a:pPr>
-              <a:spcBef>
-                <a:spcPts val="600"/>
-              </a:spcBef>
-              <a:defRPr sz="1600">
-                <a:solidFill>
-                  <a:srgbClr val="627D98"/>
-                </a:solidFill>
-              </a:defRPr>
-            </a:pPr>
-            <a:r>
-              <a:t>Realistic plan for a solo student project</a:t>
-            </a:r>
+          <a:solidFill>
+            <a:srgbClr val="0EA5A4"/>
+          </a:solidFill>
+          <a:ln>
+            <a:noFill/>
+          </a:ln>
+        </p:spPr>
+        <p:style>
+          <a:lnRef idx="1">
+            <a:schemeClr val="accent1"/>
+          </a:lnRef>
+          <a:fillRef idx="3">
+            <a:schemeClr val="accent1"/>
+          </a:fillRef>
+          <a:effectRef idx="2">
+            <a:schemeClr val="accent1"/>
+          </a:effectRef>
+          <a:fontRef idx="minor">
+            <a:schemeClr val="lt1"/>
+          </a:fontRef>
+        </p:style>
+        <p:txBody>
+          <a:bodyPr rtlCol="0" anchor="ctr"/>
+          <a:lstStyle/>
+          <a:p>
+            <a:pPr algn="ctr"/>
           </a:p>
         </p:txBody>
       </p:sp>
@@ -4555,121 +7265,8 @@
         </p:nvSpPr>
         <p:spPr>
           <a:xfrm>
-            <a:off x="685800" y="1417320"/>
-            <a:ext cx="10789920" cy="5029200"/>
-          </a:xfrm>
-          <a:prstGeom prst="rect">
-            <a:avLst/>
-          </a:prstGeom>
-          <a:noFill/>
-        </p:spPr>
-        <p:txBody>
-          <a:bodyPr wrap="square">
-            <a:spAutoFit/>
-          </a:bodyPr>
-          <a:lstStyle/>
-          <a:p>
-            <a:pPr>
-              <a:spcAft>
-                <a:spcPts val="1000"/>
-              </a:spcAft>
-              <a:defRPr sz="2000">
-                <a:solidFill>
-                  <a:srgbClr val="102A43"/>
-                </a:solidFill>
-              </a:defRPr>
-            </a:pPr>
-            <a:r>
-              <a:t>Phase 1 (Done): Backend API, auth, item reports, AI matching MVP, mobile UI</a:t>
-            </a:r>
-          </a:p>
-          <a:p>
-            <a:pPr>
-              <a:spcAft>
-                <a:spcPts val="1000"/>
-              </a:spcAft>
-              <a:defRPr sz="2000">
-                <a:solidFill>
-                  <a:srgbClr val="102A43"/>
-                </a:solidFill>
-              </a:defRPr>
-            </a:pPr>
-            <a:r>
-              <a:t>Phase 2: Improve AI with CLIP + sentence-transformers for better accuracy</a:t>
-            </a:r>
-          </a:p>
-          <a:p>
-            <a:pPr>
-              <a:spcAft>
-                <a:spcPts val="1000"/>
-              </a:spcAft>
-              <a:defRPr sz="2000">
-                <a:solidFill>
-                  <a:srgbClr val="102A43"/>
-                </a:solidFill>
-              </a:defRPr>
-            </a:pPr>
-            <a:r>
-              <a:t>Phase 3: Push notifications for urgent lost valuables (not pens/pencils)</a:t>
-            </a:r>
-          </a:p>
-          <a:p>
-            <a:pPr>
-              <a:spcAft>
-                <a:spcPts val="1000"/>
-              </a:spcAft>
-              <a:defRPr sz="2000">
-                <a:solidFill>
-                  <a:srgbClr val="102A43"/>
-                </a:solidFill>
-              </a:defRPr>
-            </a:pPr>
-            <a:r>
-              <a:t>Phase 4: College integration — verified student/faculty database (VTU ID API)</a:t>
-            </a:r>
-          </a:p>
-          <a:p>
-            <a:pPr>
-              <a:spcAft>
-                <a:spcPts val="1000"/>
-              </a:spcAft>
-              <a:defRPr sz="2000">
-                <a:solidFill>
-                  <a:srgbClr val="102A43"/>
-                </a:solidFill>
-              </a:defRPr>
-            </a:pPr>
-            <a:r>
-              <a:t>Phase 5: Admin moderation panel + cloud deployment (Render + PostgreSQL)</a:t>
-            </a:r>
-          </a:p>
-          <a:p>
-            <a:pPr>
-              <a:spcAft>
-                <a:spcPts val="1000"/>
-              </a:spcAft>
-              <a:defRPr sz="2000">
-                <a:solidFill>
-                  <a:srgbClr val="102A43"/>
-                </a:solidFill>
-              </a:defRPr>
-            </a:pPr>
-            <a:r>
-              <a:t>Tech feasibility: Python (AI/DS), Expo (Android/iOS/Web), proven open-source stack.</a:t>
-            </a:r>
-          </a:p>
-        </p:txBody>
-      </p:sp>
-      <p:sp>
-        <p:nvSpPr>
-          <p:cNvPr id="4" name="TextBox 3"/>
-          <p:cNvSpPr txBox="1"/>
-          <p:nvPr/>
-        </p:nvSpPr>
-        <p:spPr>
-          <a:xfrm>
-            <a:off x="548640" y="6263640"/>
-            <a:ext cx="10972800" cy="365760"/>
+            <a:off x="594360" y="320040"/>
+            <a:ext cx="10972800" cy="1005840"/>
           </a:xfrm>
           <a:prstGeom prst="rect">
             <a:avLst/>
@@ -4683,14 +7280,783 @@
           <a:lstStyle/>
           <a:p>
             <a:pPr>
-              <a:defRPr sz="1100">
+              <a:defRPr sz="3000" b="1">
+                <a:solidFill>
+                  <a:srgbClr val="1B4D89"/>
+                </a:solidFill>
+              </a:defRPr>
+            </a:pPr>
+            <a:r>
+              <a:t>Feasibility &amp; Plan</a:t>
+            </a:r>
+          </a:p>
+          <a:p>
+            <a:pPr>
+              <a:defRPr sz="1400">
                 <a:solidFill>
                   <a:srgbClr val="627D98"/>
                 </a:solidFill>
               </a:defRPr>
             </a:pPr>
             <a:r>
-              <a:t>FoundYourThing  |  github.com/sainihalmeda-ai/FoundYourThing</a:t>
+              <a:t>Phased rollout</a:t>
+            </a:r>
+          </a:p>
+        </p:txBody>
+      </p:sp>
+      <p:sp>
+        <p:nvSpPr>
+          <p:cNvPr id="4" name="Rounded Rectangle 3"/>
+          <p:cNvSpPr/>
+          <p:nvPr/>
+        </p:nvSpPr>
+        <p:spPr>
+          <a:xfrm>
+            <a:off x="685800" y="1828800"/>
+            <a:ext cx="2514600" cy="3200400"/>
+          </a:xfrm>
+          <a:prstGeom prst="roundRect">
+            <a:avLst/>
+          </a:prstGeom>
+          <a:solidFill>
+            <a:srgbClr val="FFFFFF"/>
+          </a:solidFill>
+          <a:ln w="19050">
+            <a:solidFill>
+              <a:srgbClr val="E6F0FF"/>
+            </a:solidFill>
+          </a:ln>
+        </p:spPr>
+        <p:style>
+          <a:lnRef idx="1">
+            <a:schemeClr val="accent1"/>
+          </a:lnRef>
+          <a:fillRef idx="3">
+            <a:schemeClr val="accent1"/>
+          </a:fillRef>
+          <a:effectRef idx="2">
+            <a:schemeClr val="accent1"/>
+          </a:effectRef>
+          <a:fontRef idx="minor">
+            <a:schemeClr val="lt1"/>
+          </a:fontRef>
+        </p:style>
+        <p:txBody>
+          <a:bodyPr rtlCol="0" anchor="ctr"/>
+          <a:lstStyle/>
+          <a:p>
+            <a:pPr algn="ctr"/>
+          </a:p>
+        </p:txBody>
+      </p:sp>
+      <p:sp>
+        <p:nvSpPr>
+          <p:cNvPr id="5" name="Oval 4"/>
+          <p:cNvSpPr/>
+          <p:nvPr/>
+        </p:nvSpPr>
+        <p:spPr>
+          <a:xfrm>
+            <a:off x="1554480" y="1965960"/>
+            <a:ext cx="777240" cy="777240"/>
+          </a:xfrm>
+          <a:prstGeom prst="ellipse">
+            <a:avLst/>
+          </a:prstGeom>
+          <a:solidFill>
+            <a:srgbClr val="0EA5A4"/>
+          </a:solidFill>
+          <a:ln>
+            <a:noFill/>
+          </a:ln>
+        </p:spPr>
+        <p:style>
+          <a:lnRef idx="1">
+            <a:schemeClr val="accent1"/>
+          </a:lnRef>
+          <a:fillRef idx="3">
+            <a:schemeClr val="accent1"/>
+          </a:fillRef>
+          <a:effectRef idx="2">
+            <a:schemeClr val="accent1"/>
+          </a:effectRef>
+          <a:fontRef idx="minor">
+            <a:schemeClr val="lt1"/>
+          </a:fontRef>
+        </p:style>
+        <p:txBody>
+          <a:bodyPr rtlCol="0" anchor="ctr" wrap="square"/>
+          <a:lstStyle/>
+          <a:p>
+            <a:pPr algn="ctr">
+              <a:defRPr sz="1800" b="1">
+                <a:solidFill>
+                  <a:srgbClr val="FFFFFF"/>
+                </a:solidFill>
+              </a:defRPr>
+            </a:pPr>
+            <a:r>
+              <a:t>✅</a:t>
+            </a:r>
+          </a:p>
+        </p:txBody>
+      </p:sp>
+      <p:sp>
+        <p:nvSpPr>
+          <p:cNvPr id="6" name="TextBox 5"/>
+          <p:cNvSpPr txBox="1"/>
+          <p:nvPr/>
+        </p:nvSpPr>
+        <p:spPr>
+          <a:xfrm>
+            <a:off x="685800" y="2834640"/>
+            <a:ext cx="2514600" cy="1828800"/>
+          </a:xfrm>
+          <a:prstGeom prst="rect">
+            <a:avLst/>
+          </a:prstGeom>
+          <a:noFill/>
+        </p:spPr>
+        <p:txBody>
+          <a:bodyPr wrap="none">
+            <a:spAutoFit/>
+          </a:bodyPr>
+          <a:lstStyle/>
+          <a:p>
+            <a:pPr algn="ctr">
+              <a:defRPr sz="1500" b="1">
+                <a:solidFill>
+                  <a:srgbClr val="627D98"/>
+                </a:solidFill>
+              </a:defRPr>
+            </a:pPr>
+            <a:r>
+              <a:t>Phase 1</a:t>
+            </a:r>
+          </a:p>
+          <a:p>
+            <a:pPr algn="ctr">
+              <a:defRPr sz="1500" b="1">
+                <a:solidFill>
+                  <a:srgbClr val="1B4D89"/>
+                </a:solidFill>
+              </a:defRPr>
+            </a:pPr>
+            <a:r>
+              <a:t>Core App</a:t>
+            </a:r>
+          </a:p>
+          <a:p>
+            <a:pPr algn="ctr">
+              <a:defRPr sz="1300" b="0">
+                <a:solidFill>
+                  <a:srgbClr val="102A43"/>
+                </a:solidFill>
+              </a:defRPr>
+            </a:pPr>
+            <a:r>
+              <a:t>Auth · Reports</a:t>
+            </a:r>
+            <a:br/>
+            <a:r>
+              <a:t>AI MVP</a:t>
+            </a:r>
+          </a:p>
+        </p:txBody>
+      </p:sp>
+      <p:sp>
+        <p:nvSpPr>
+          <p:cNvPr id="7" name="Right Arrow 6"/>
+          <p:cNvSpPr/>
+          <p:nvPr/>
+        </p:nvSpPr>
+        <p:spPr>
+          <a:xfrm>
+            <a:off x="3291840" y="3246120"/>
+            <a:ext cx="320040" cy="201168"/>
+          </a:xfrm>
+          <a:prstGeom prst="rightArrow">
+            <a:avLst/>
+          </a:prstGeom>
+          <a:solidFill>
+            <a:srgbClr val="0EA5A4"/>
+          </a:solidFill>
+          <a:ln>
+            <a:noFill/>
+          </a:ln>
+        </p:spPr>
+        <p:style>
+          <a:lnRef idx="1">
+            <a:schemeClr val="accent1"/>
+          </a:lnRef>
+          <a:fillRef idx="3">
+            <a:schemeClr val="accent1"/>
+          </a:fillRef>
+          <a:effectRef idx="2">
+            <a:schemeClr val="accent1"/>
+          </a:effectRef>
+          <a:fontRef idx="minor">
+            <a:schemeClr val="lt1"/>
+          </a:fontRef>
+        </p:style>
+        <p:txBody>
+          <a:bodyPr rtlCol="0" anchor="ctr"/>
+          <a:lstStyle/>
+          <a:p>
+            <a:pPr algn="ctr"/>
+          </a:p>
+        </p:txBody>
+      </p:sp>
+      <p:sp>
+        <p:nvSpPr>
+          <p:cNvPr id="8" name="Rounded Rectangle 7"/>
+          <p:cNvSpPr/>
+          <p:nvPr/>
+        </p:nvSpPr>
+        <p:spPr>
+          <a:xfrm>
+            <a:off x="3474720" y="1828800"/>
+            <a:ext cx="2514600" cy="3200400"/>
+          </a:xfrm>
+          <a:prstGeom prst="roundRect">
+            <a:avLst/>
+          </a:prstGeom>
+          <a:solidFill>
+            <a:srgbClr val="FFFFFF"/>
+          </a:solidFill>
+          <a:ln w="19050">
+            <a:solidFill>
+              <a:srgbClr val="E6F0FF"/>
+            </a:solidFill>
+          </a:ln>
+        </p:spPr>
+        <p:style>
+          <a:lnRef idx="1">
+            <a:schemeClr val="accent1"/>
+          </a:lnRef>
+          <a:fillRef idx="3">
+            <a:schemeClr val="accent1"/>
+          </a:fillRef>
+          <a:effectRef idx="2">
+            <a:schemeClr val="accent1"/>
+          </a:effectRef>
+          <a:fontRef idx="minor">
+            <a:schemeClr val="lt1"/>
+          </a:fontRef>
+        </p:style>
+        <p:txBody>
+          <a:bodyPr rtlCol="0" anchor="ctr"/>
+          <a:lstStyle/>
+          <a:p>
+            <a:pPr algn="ctr"/>
+          </a:p>
+        </p:txBody>
+      </p:sp>
+      <p:sp>
+        <p:nvSpPr>
+          <p:cNvPr id="9" name="Oval 8"/>
+          <p:cNvSpPr/>
+          <p:nvPr/>
+        </p:nvSpPr>
+        <p:spPr>
+          <a:xfrm>
+            <a:off x="4343400" y="1965960"/>
+            <a:ext cx="777240" cy="777240"/>
+          </a:xfrm>
+          <a:prstGeom prst="ellipse">
+            <a:avLst/>
+          </a:prstGeom>
+          <a:solidFill>
+            <a:srgbClr val="627D98"/>
+          </a:solidFill>
+          <a:ln>
+            <a:noFill/>
+          </a:ln>
+        </p:spPr>
+        <p:style>
+          <a:lnRef idx="1">
+            <a:schemeClr val="accent1"/>
+          </a:lnRef>
+          <a:fillRef idx="3">
+            <a:schemeClr val="accent1"/>
+          </a:fillRef>
+          <a:effectRef idx="2">
+            <a:schemeClr val="accent1"/>
+          </a:effectRef>
+          <a:fontRef idx="minor">
+            <a:schemeClr val="lt1"/>
+          </a:fontRef>
+        </p:style>
+        <p:txBody>
+          <a:bodyPr rtlCol="0" anchor="ctr" wrap="square"/>
+          <a:lstStyle/>
+          <a:p>
+            <a:pPr algn="ctr">
+              <a:defRPr sz="1800" b="1">
+                <a:solidFill>
+                  <a:srgbClr val="FFFFFF"/>
+                </a:solidFill>
+              </a:defRPr>
+            </a:pPr>
+            <a:r>
+              <a:t>⏳</a:t>
+            </a:r>
+          </a:p>
+        </p:txBody>
+      </p:sp>
+      <p:sp>
+        <p:nvSpPr>
+          <p:cNvPr id="10" name="TextBox 9"/>
+          <p:cNvSpPr txBox="1"/>
+          <p:nvPr/>
+        </p:nvSpPr>
+        <p:spPr>
+          <a:xfrm>
+            <a:off x="3474720" y="2834640"/>
+            <a:ext cx="2514600" cy="1828800"/>
+          </a:xfrm>
+          <a:prstGeom prst="rect">
+            <a:avLst/>
+          </a:prstGeom>
+          <a:noFill/>
+        </p:spPr>
+        <p:txBody>
+          <a:bodyPr wrap="none">
+            <a:spAutoFit/>
+          </a:bodyPr>
+          <a:lstStyle/>
+          <a:p>
+            <a:pPr algn="ctr">
+              <a:defRPr sz="1500" b="1">
+                <a:solidFill>
+                  <a:srgbClr val="627D98"/>
+                </a:solidFill>
+              </a:defRPr>
+            </a:pPr>
+            <a:r>
+              <a:t>Phase 2</a:t>
+            </a:r>
+          </a:p>
+          <a:p>
+            <a:pPr algn="ctr">
+              <a:defRPr sz="1500" b="1">
+                <a:solidFill>
+                  <a:srgbClr val="1B4D89"/>
+                </a:solidFill>
+              </a:defRPr>
+            </a:pPr>
+            <a:r>
+              <a:t>Better AI</a:t>
+            </a:r>
+          </a:p>
+          <a:p>
+            <a:pPr algn="ctr">
+              <a:defRPr sz="1300" b="0">
+                <a:solidFill>
+                  <a:srgbClr val="102A43"/>
+                </a:solidFill>
+              </a:defRPr>
+            </a:pPr>
+            <a:r>
+              <a:t>CLIP · Accuracy</a:t>
+            </a:r>
+          </a:p>
+        </p:txBody>
+      </p:sp>
+      <p:sp>
+        <p:nvSpPr>
+          <p:cNvPr id="11" name="Right Arrow 10"/>
+          <p:cNvSpPr/>
+          <p:nvPr/>
+        </p:nvSpPr>
+        <p:spPr>
+          <a:xfrm>
+            <a:off x="6080760" y="3246120"/>
+            <a:ext cx="320040" cy="201168"/>
+          </a:xfrm>
+          <a:prstGeom prst="rightArrow">
+            <a:avLst/>
+          </a:prstGeom>
+          <a:solidFill>
+            <a:srgbClr val="0EA5A4"/>
+          </a:solidFill>
+          <a:ln>
+            <a:noFill/>
+          </a:ln>
+        </p:spPr>
+        <p:style>
+          <a:lnRef idx="1">
+            <a:schemeClr val="accent1"/>
+          </a:lnRef>
+          <a:fillRef idx="3">
+            <a:schemeClr val="accent1"/>
+          </a:fillRef>
+          <a:effectRef idx="2">
+            <a:schemeClr val="accent1"/>
+          </a:effectRef>
+          <a:fontRef idx="minor">
+            <a:schemeClr val="lt1"/>
+          </a:fontRef>
+        </p:style>
+        <p:txBody>
+          <a:bodyPr rtlCol="0" anchor="ctr"/>
+          <a:lstStyle/>
+          <a:p>
+            <a:pPr algn="ctr"/>
+          </a:p>
+        </p:txBody>
+      </p:sp>
+      <p:sp>
+        <p:nvSpPr>
+          <p:cNvPr id="12" name="Rounded Rectangle 11"/>
+          <p:cNvSpPr/>
+          <p:nvPr/>
+        </p:nvSpPr>
+        <p:spPr>
+          <a:xfrm>
+            <a:off x="6263640" y="1828800"/>
+            <a:ext cx="2514600" cy="3200400"/>
+          </a:xfrm>
+          <a:prstGeom prst="roundRect">
+            <a:avLst/>
+          </a:prstGeom>
+          <a:solidFill>
+            <a:srgbClr val="FFFFFF"/>
+          </a:solidFill>
+          <a:ln w="19050">
+            <a:solidFill>
+              <a:srgbClr val="E6F0FF"/>
+            </a:solidFill>
+          </a:ln>
+        </p:spPr>
+        <p:style>
+          <a:lnRef idx="1">
+            <a:schemeClr val="accent1"/>
+          </a:lnRef>
+          <a:fillRef idx="3">
+            <a:schemeClr val="accent1"/>
+          </a:fillRef>
+          <a:effectRef idx="2">
+            <a:schemeClr val="accent1"/>
+          </a:effectRef>
+          <a:fontRef idx="minor">
+            <a:schemeClr val="lt1"/>
+          </a:fontRef>
+        </p:style>
+        <p:txBody>
+          <a:bodyPr rtlCol="0" anchor="ctr"/>
+          <a:lstStyle/>
+          <a:p>
+            <a:pPr algn="ctr"/>
+          </a:p>
+        </p:txBody>
+      </p:sp>
+      <p:sp>
+        <p:nvSpPr>
+          <p:cNvPr id="13" name="Oval 12"/>
+          <p:cNvSpPr/>
+          <p:nvPr/>
+        </p:nvSpPr>
+        <p:spPr>
+          <a:xfrm>
+            <a:off x="7132320" y="1965960"/>
+            <a:ext cx="777240" cy="777240"/>
+          </a:xfrm>
+          <a:prstGeom prst="ellipse">
+            <a:avLst/>
+          </a:prstGeom>
+          <a:solidFill>
+            <a:srgbClr val="627D98"/>
+          </a:solidFill>
+          <a:ln>
+            <a:noFill/>
+          </a:ln>
+        </p:spPr>
+        <p:style>
+          <a:lnRef idx="1">
+            <a:schemeClr val="accent1"/>
+          </a:lnRef>
+          <a:fillRef idx="3">
+            <a:schemeClr val="accent1"/>
+          </a:fillRef>
+          <a:effectRef idx="2">
+            <a:schemeClr val="accent1"/>
+          </a:effectRef>
+          <a:fontRef idx="minor">
+            <a:schemeClr val="lt1"/>
+          </a:fontRef>
+        </p:style>
+        <p:txBody>
+          <a:bodyPr rtlCol="0" anchor="ctr" wrap="square"/>
+          <a:lstStyle/>
+          <a:p>
+            <a:pPr algn="ctr">
+              <a:defRPr sz="1800" b="1">
+                <a:solidFill>
+                  <a:srgbClr val="FFFFFF"/>
+                </a:solidFill>
+              </a:defRPr>
+            </a:pPr>
+            <a:r>
+              <a:t>⏳</a:t>
+            </a:r>
+          </a:p>
+        </p:txBody>
+      </p:sp>
+      <p:sp>
+        <p:nvSpPr>
+          <p:cNvPr id="14" name="TextBox 13"/>
+          <p:cNvSpPr txBox="1"/>
+          <p:nvPr/>
+        </p:nvSpPr>
+        <p:spPr>
+          <a:xfrm>
+            <a:off x="6263640" y="2834640"/>
+            <a:ext cx="2514600" cy="1828800"/>
+          </a:xfrm>
+          <a:prstGeom prst="rect">
+            <a:avLst/>
+          </a:prstGeom>
+          <a:noFill/>
+        </p:spPr>
+        <p:txBody>
+          <a:bodyPr wrap="none">
+            <a:spAutoFit/>
+          </a:bodyPr>
+          <a:lstStyle/>
+          <a:p>
+            <a:pPr algn="ctr">
+              <a:defRPr sz="1500" b="1">
+                <a:solidFill>
+                  <a:srgbClr val="627D98"/>
+                </a:solidFill>
+              </a:defRPr>
+            </a:pPr>
+            <a:r>
+              <a:t>Phase 3</a:t>
+            </a:r>
+          </a:p>
+          <a:p>
+            <a:pPr algn="ctr">
+              <a:defRPr sz="1500" b="1">
+                <a:solidFill>
+                  <a:srgbClr val="1B4D89"/>
+                </a:solidFill>
+              </a:defRPr>
+            </a:pPr>
+            <a:r>
+              <a:t>Campus</a:t>
+            </a:r>
+          </a:p>
+          <a:p>
+            <a:pPr algn="ctr">
+              <a:defRPr sz="1300" b="0">
+                <a:solidFill>
+                  <a:srgbClr val="102A43"/>
+                </a:solidFill>
+              </a:defRPr>
+            </a:pPr>
+            <a:r>
+              <a:t>Alerts · VTU API</a:t>
+            </a:r>
+          </a:p>
+        </p:txBody>
+      </p:sp>
+      <p:sp>
+        <p:nvSpPr>
+          <p:cNvPr id="15" name="Right Arrow 14"/>
+          <p:cNvSpPr/>
+          <p:nvPr/>
+        </p:nvSpPr>
+        <p:spPr>
+          <a:xfrm>
+            <a:off x="8869680" y="3246120"/>
+            <a:ext cx="320040" cy="201168"/>
+          </a:xfrm>
+          <a:prstGeom prst="rightArrow">
+            <a:avLst/>
+          </a:prstGeom>
+          <a:solidFill>
+            <a:srgbClr val="0EA5A4"/>
+          </a:solidFill>
+          <a:ln>
+            <a:noFill/>
+          </a:ln>
+        </p:spPr>
+        <p:style>
+          <a:lnRef idx="1">
+            <a:schemeClr val="accent1"/>
+          </a:lnRef>
+          <a:fillRef idx="3">
+            <a:schemeClr val="accent1"/>
+          </a:fillRef>
+          <a:effectRef idx="2">
+            <a:schemeClr val="accent1"/>
+          </a:effectRef>
+          <a:fontRef idx="minor">
+            <a:schemeClr val="lt1"/>
+          </a:fontRef>
+        </p:style>
+        <p:txBody>
+          <a:bodyPr rtlCol="0" anchor="ctr"/>
+          <a:lstStyle/>
+          <a:p>
+            <a:pPr algn="ctr"/>
+          </a:p>
+        </p:txBody>
+      </p:sp>
+      <p:sp>
+        <p:nvSpPr>
+          <p:cNvPr id="16" name="Rounded Rectangle 15"/>
+          <p:cNvSpPr/>
+          <p:nvPr/>
+        </p:nvSpPr>
+        <p:spPr>
+          <a:xfrm>
+            <a:off x="9052559" y="1828800"/>
+            <a:ext cx="2514600" cy="3200400"/>
+          </a:xfrm>
+          <a:prstGeom prst="roundRect">
+            <a:avLst/>
+          </a:prstGeom>
+          <a:solidFill>
+            <a:srgbClr val="FFFFFF"/>
+          </a:solidFill>
+          <a:ln w="19050">
+            <a:solidFill>
+              <a:srgbClr val="E6F0FF"/>
+            </a:solidFill>
+          </a:ln>
+        </p:spPr>
+        <p:style>
+          <a:lnRef idx="1">
+            <a:schemeClr val="accent1"/>
+          </a:lnRef>
+          <a:fillRef idx="3">
+            <a:schemeClr val="accent1"/>
+          </a:fillRef>
+          <a:effectRef idx="2">
+            <a:schemeClr val="accent1"/>
+          </a:effectRef>
+          <a:fontRef idx="minor">
+            <a:schemeClr val="lt1"/>
+          </a:fontRef>
+        </p:style>
+        <p:txBody>
+          <a:bodyPr rtlCol="0" anchor="ctr"/>
+          <a:lstStyle/>
+          <a:p>
+            <a:pPr algn="ctr"/>
+          </a:p>
+        </p:txBody>
+      </p:sp>
+      <p:sp>
+        <p:nvSpPr>
+          <p:cNvPr id="17" name="Oval 16"/>
+          <p:cNvSpPr/>
+          <p:nvPr/>
+        </p:nvSpPr>
+        <p:spPr>
+          <a:xfrm>
+            <a:off x="9921239" y="1965960"/>
+            <a:ext cx="777240" cy="777240"/>
+          </a:xfrm>
+          <a:prstGeom prst="ellipse">
+            <a:avLst/>
+          </a:prstGeom>
+          <a:solidFill>
+            <a:srgbClr val="627D98"/>
+          </a:solidFill>
+          <a:ln>
+            <a:noFill/>
+          </a:ln>
+        </p:spPr>
+        <p:style>
+          <a:lnRef idx="1">
+            <a:schemeClr val="accent1"/>
+          </a:lnRef>
+          <a:fillRef idx="3">
+            <a:schemeClr val="accent1"/>
+          </a:fillRef>
+          <a:effectRef idx="2">
+            <a:schemeClr val="accent1"/>
+          </a:effectRef>
+          <a:fontRef idx="minor">
+            <a:schemeClr val="lt1"/>
+          </a:fontRef>
+        </p:style>
+        <p:txBody>
+          <a:bodyPr rtlCol="0" anchor="ctr" wrap="square"/>
+          <a:lstStyle/>
+          <a:p>
+            <a:pPr algn="ctr">
+              <a:defRPr sz="1800" b="1">
+                <a:solidFill>
+                  <a:srgbClr val="FFFFFF"/>
+                </a:solidFill>
+              </a:defRPr>
+            </a:pPr>
+            <a:r>
+              <a:t>⏳</a:t>
+            </a:r>
+          </a:p>
+        </p:txBody>
+      </p:sp>
+      <p:sp>
+        <p:nvSpPr>
+          <p:cNvPr id="18" name="TextBox 17"/>
+          <p:cNvSpPr txBox="1"/>
+          <p:nvPr/>
+        </p:nvSpPr>
+        <p:spPr>
+          <a:xfrm>
+            <a:off x="9052559" y="2834640"/>
+            <a:ext cx="2514600" cy="1828800"/>
+          </a:xfrm>
+          <a:prstGeom prst="rect">
+            <a:avLst/>
+          </a:prstGeom>
+          <a:noFill/>
+        </p:spPr>
+        <p:txBody>
+          <a:bodyPr wrap="none">
+            <a:spAutoFit/>
+          </a:bodyPr>
+          <a:lstStyle/>
+          <a:p>
+            <a:pPr algn="ctr">
+              <a:defRPr sz="1500" b="1">
+                <a:solidFill>
+                  <a:srgbClr val="627D98"/>
+                </a:solidFill>
+              </a:defRPr>
+            </a:pPr>
+            <a:r>
+              <a:t>Phase 4</a:t>
+            </a:r>
+          </a:p>
+          <a:p>
+            <a:pPr algn="ctr">
+              <a:defRPr sz="1500" b="1">
+                <a:solidFill>
+                  <a:srgbClr val="1B4D89"/>
+                </a:solidFill>
+              </a:defRPr>
+            </a:pPr>
+            <a:r>
+              <a:t>Scale</a:t>
+            </a:r>
+          </a:p>
+          <a:p>
+            <a:pPr algn="ctr">
+              <a:defRPr sz="1300" b="0">
+                <a:solidFill>
+                  <a:srgbClr val="102A43"/>
+                </a:solidFill>
+              </a:defRPr>
+            </a:pPr>
+            <a:r>
+              <a:t>Admin · Cloud</a:t>
             </a:r>
           </a:p>
         </p:txBody>
@@ -4700,6 +8066,93 @@
   <p:clrMapOvr>
     <a:masterClrMapping/>
   </p:clrMapOvr>
+  <p:transition spd="med">
+    <p:push/>
+  </p:transition>
+  <p:timing>
+    <p:tnLst>
+      <p:par>
+        <p:cTn id="0" dur="indefinite" restart="never" nodeType="tmRoot">
+          <p:childTnLst>
+            <p:seq concurrent="1" nextAc="seek">
+              <p:cTn id="1" dur="indefinite" nodeType="mainSeq">
+                <p:childTnLst>
+                  <p:par>
+                    <p:cTn id="104" dur="indefinite" nodeType="clickEffect">
+                      <p:stCondLst>
+                        <p:cond delay="0"/>
+                      </p:stCondLst>
+                      <p:childTnLst>
+                        <p:animEffect transition="in" filter="fade">
+                          <p:cBhvr>
+                            <p:cTn dur="600" fill="hold"/>
+                            <p:tgtEl>
+                              <p:spTgt spid="4"/>
+                            </p:tgtEl>
+                          </p:cBhvr>
+                        </p:animEffect>
+                      </p:childTnLst>
+                    </p:cTn>
+                  </p:par>
+                  <p:par>
+                    <p:cTn id="108" dur="indefinite" nodeType="withEffect">
+                      <p:stCondLst>
+                        <p:cond delay="200"/>
+                      </p:stCondLst>
+                      <p:childTnLst>
+                        <p:animEffect transition="in" filter="fade">
+                          <p:cBhvr>
+                            <p:cTn dur="600" fill="hold"/>
+                            <p:tgtEl>
+                              <p:spTgt spid="8"/>
+                            </p:tgtEl>
+                          </p:cBhvr>
+                        </p:animEffect>
+                      </p:childTnLst>
+                    </p:cTn>
+                  </p:par>
+                  <p:par>
+                    <p:cTn id="112" dur="indefinite" nodeType="withEffect">
+                      <p:stCondLst>
+                        <p:cond delay="200"/>
+                      </p:stCondLst>
+                      <p:childTnLst>
+                        <p:animEffect transition="in" filter="fade">
+                          <p:cBhvr>
+                            <p:cTn dur="600" fill="hold"/>
+                            <p:tgtEl>
+                              <p:spTgt spid="12"/>
+                            </p:tgtEl>
+                          </p:cBhvr>
+                        </p:animEffect>
+                      </p:childTnLst>
+                    </p:cTn>
+                  </p:par>
+                  <p:par>
+                    <p:cTn id="116" dur="indefinite" nodeType="withEffect">
+                      <p:stCondLst>
+                        <p:cond delay="200"/>
+                      </p:stCondLst>
+                      <p:childTnLst>
+                        <p:animEffect transition="in" filter="fade">
+                          <p:cBhvr>
+                            <p:cTn dur="600" fill="hold"/>
+                            <p:tgtEl>
+                              <p:spTgt spid="16"/>
+                            </p:tgtEl>
+                          </p:cBhvr>
+                        </p:animEffect>
+                      </p:childTnLst>
+                    </p:cTn>
+                  </p:par>
+                </p:childTnLst>
+              </p:cTn>
+            </p:seq>
+          </p:childTnLst>
+        </p:cTn>
+      </p:par>
+    </p:tnLst>
+  </p:timing>
 </p:sld>
 </file>
 
@@ -4723,51 +8176,44 @@
       <p:grpSpPr/>
       <p:sp>
         <p:nvSpPr>
-          <p:cNvPr id="2" name="TextBox 1"/>
-          <p:cNvSpPr txBox="1"/>
-          <p:nvPr/>
-        </p:nvSpPr>
-        <p:spPr>
-          <a:xfrm>
-            <a:off x="548640" y="320040"/>
-            <a:ext cx="11064240" cy="1097280"/>
+          <p:cNvPr id="2" name="Rectangle 1"/>
+          <p:cNvSpPr/>
+          <p:nvPr/>
+        </p:nvSpPr>
+        <p:spPr>
+          <a:xfrm>
+            <a:off x="0" y="0"/>
+            <a:ext cx="12191695" cy="109728"/>
           </a:xfrm>
           <a:prstGeom prst="rect">
             <a:avLst/>
           </a:prstGeom>
-          <a:noFill/>
-        </p:spPr>
-        <p:txBody>
-          <a:bodyPr wrap="square">
-            <a:spAutoFit/>
-          </a:bodyPr>
-          <a:lstStyle/>
-          <a:p>
-            <a:pPr>
-              <a:defRPr sz="3200" b="1">
-                <a:solidFill>
-                  <a:srgbClr val="1B4D89"/>
-                </a:solidFill>
-              </a:defRPr>
-            </a:pPr>
-            <a:r>
-              <a:t>Slide 7: Scalability &amp; Future Scope</a:t>
-            </a:r>
-          </a:p>
-          <a:p>
-            <a:pPr>
-              <a:spcBef>
-                <a:spcPts val="600"/>
-              </a:spcBef>
-              <a:defRPr sz="1600">
-                <a:solidFill>
-                  <a:srgbClr val="627D98"/>
-                </a:solidFill>
-              </a:defRPr>
-            </a:pPr>
-            <a:r>
-              <a:t>Growth beyond Minor Project 1</a:t>
-            </a:r>
+          <a:solidFill>
+            <a:srgbClr val="0EA5A4"/>
+          </a:solidFill>
+          <a:ln>
+            <a:noFill/>
+          </a:ln>
+        </p:spPr>
+        <p:style>
+          <a:lnRef idx="1">
+            <a:schemeClr val="accent1"/>
+          </a:lnRef>
+          <a:fillRef idx="3">
+            <a:schemeClr val="accent1"/>
+          </a:fillRef>
+          <a:effectRef idx="2">
+            <a:schemeClr val="accent1"/>
+          </a:effectRef>
+          <a:fontRef idx="minor">
+            <a:schemeClr val="lt1"/>
+          </a:fontRef>
+        </p:style>
+        <p:txBody>
+          <a:bodyPr rtlCol="0" anchor="ctr"/>
+          <a:lstStyle/>
+          <a:p>
+            <a:pPr algn="ctr"/>
           </a:p>
         </p:txBody>
       </p:sp>
@@ -4779,121 +8225,8 @@
         </p:nvSpPr>
         <p:spPr>
           <a:xfrm>
-            <a:off x="685800" y="1417320"/>
-            <a:ext cx="10789920" cy="5029200"/>
-          </a:xfrm>
-          <a:prstGeom prst="rect">
-            <a:avLst/>
-          </a:prstGeom>
-          <a:noFill/>
-        </p:spPr>
-        <p:txBody>
-          <a:bodyPr wrap="square">
-            <a:spAutoFit/>
-          </a:bodyPr>
-          <a:lstStyle/>
-          <a:p>
-            <a:pPr>
-              <a:spcAft>
-                <a:spcPts val="1000"/>
-              </a:spcAft>
-              <a:defRPr sz="2000">
-                <a:solidFill>
-                  <a:srgbClr val="102A43"/>
-                </a:solidFill>
-              </a:defRPr>
-            </a:pPr>
-            <a:r>
-              <a:t>Multi-campus support with separate feeds per institution.</a:t>
-            </a:r>
-          </a:p>
-          <a:p>
-            <a:pPr>
-              <a:spcAft>
-                <a:spcPts val="1000"/>
-              </a:spcAft>
-              <a:defRPr sz="2000">
-                <a:solidFill>
-                  <a:srgbClr val="102A43"/>
-                </a:solidFill>
-              </a:defRPr>
-            </a:pPr>
-            <a:r>
-              <a:t>Official college onboarding with SSO and role badges (Student / Faculty).</a:t>
-            </a:r>
-          </a:p>
-          <a:p>
-            <a:pPr>
-              <a:spcAft>
-                <a:spcPts val="1000"/>
-              </a:spcAft>
-              <a:defRPr sz="2000">
-                <a:solidFill>
-                  <a:srgbClr val="102A43"/>
-                </a:solidFill>
-              </a:defRPr>
-            </a:pPr>
-            <a:r>
-              <a:t>Smart alerts: urgent broadcasts only for high-value items.</a:t>
-            </a:r>
-          </a:p>
-          <a:p>
-            <a:pPr>
-              <a:spcAft>
-                <a:spcPts val="1000"/>
-              </a:spcAft>
-              <a:defRPr sz="2000">
-                <a:solidFill>
-                  <a:srgbClr val="102A43"/>
-                </a:solidFill>
-              </a:defRPr>
-            </a:pPr>
-            <a:r>
-              <a:t>Auto-blur for ID card photos and abuse reporting system.</a:t>
-            </a:r>
-          </a:p>
-          <a:p>
-            <a:pPr>
-              <a:spcAft>
-                <a:spcPts val="1000"/>
-              </a:spcAft>
-              <a:defRPr sz="2000">
-                <a:solidFill>
-                  <a:srgbClr val="102A43"/>
-                </a:solidFill>
-              </a:defRPr>
-            </a:pPr>
-            <a:r>
-              <a:t>Analytics dashboard for admin — recovery rate, popular loss locations.</a:t>
-            </a:r>
-          </a:p>
-          <a:p>
-            <a:pPr>
-              <a:spcAft>
-                <a:spcPts val="1000"/>
-              </a:spcAft>
-              <a:defRPr sz="2000">
-                <a:solidFill>
-                  <a:srgbClr val="102A43"/>
-                </a:solidFill>
-              </a:defRPr>
-            </a:pPr>
-            <a:r>
-              <a:t>Optional: chatbot assistant, QR tags on valuables, integration with security office.</a:t>
-            </a:r>
-          </a:p>
-        </p:txBody>
-      </p:sp>
-      <p:sp>
-        <p:nvSpPr>
-          <p:cNvPr id="4" name="TextBox 3"/>
-          <p:cNvSpPr txBox="1"/>
-          <p:nvPr/>
-        </p:nvSpPr>
-        <p:spPr>
-          <a:xfrm>
-            <a:off x="548640" y="6263640"/>
-            <a:ext cx="10972800" cy="365760"/>
+            <a:off x="594360" y="320040"/>
+            <a:ext cx="10972800" cy="1005840"/>
           </a:xfrm>
           <a:prstGeom prst="rect">
             <a:avLst/>
@@ -4907,14 +8240,350 @@
           <a:lstStyle/>
           <a:p>
             <a:pPr>
-              <a:defRPr sz="1100">
+              <a:defRPr sz="3000" b="1">
+                <a:solidFill>
+                  <a:srgbClr val="1B4D89"/>
+                </a:solidFill>
+              </a:defRPr>
+            </a:pPr>
+            <a:r>
+              <a:t>Future Scope</a:t>
+            </a:r>
+          </a:p>
+          <a:p>
+            <a:pPr>
+              <a:defRPr sz="1400">
                 <a:solidFill>
                   <a:srgbClr val="627D98"/>
                 </a:solidFill>
               </a:defRPr>
             </a:pPr>
             <a:r>
-              <a:t>FoundYourThing  |  github.com/sainihalmeda-ai/FoundYourThing</a:t>
+              <a:t>Where FoundYourThing can grow</a:t>
+            </a:r>
+          </a:p>
+        </p:txBody>
+      </p:sp>
+      <p:sp>
+        <p:nvSpPr>
+          <p:cNvPr id="4" name="Rounded Rectangle 3"/>
+          <p:cNvSpPr/>
+          <p:nvPr/>
+        </p:nvSpPr>
+        <p:spPr>
+          <a:xfrm>
+            <a:off x="914400" y="1600200"/>
+            <a:ext cx="5029200" cy="868680"/>
+          </a:xfrm>
+          <a:prstGeom prst="roundRect">
+            <a:avLst/>
+          </a:prstGeom>
+          <a:solidFill>
+            <a:srgbClr val="E6F0FF"/>
+          </a:solidFill>
+          <a:ln w="19050">
+            <a:solidFill>
+              <a:srgbClr val="0EA5A4"/>
+            </a:solidFill>
+          </a:ln>
+        </p:spPr>
+        <p:style>
+          <a:lnRef idx="1">
+            <a:schemeClr val="accent1"/>
+          </a:lnRef>
+          <a:fillRef idx="3">
+            <a:schemeClr val="accent1"/>
+          </a:fillRef>
+          <a:effectRef idx="2">
+            <a:schemeClr val="accent1"/>
+          </a:effectRef>
+          <a:fontRef idx="minor">
+            <a:schemeClr val="lt1"/>
+          </a:fontRef>
+        </p:style>
+        <p:txBody>
+          <a:bodyPr rtlCol="0" anchor="ctr" wrap="square"/>
+          <a:lstStyle/>
+          <a:p>
+            <a:pPr algn="l">
+              <a:defRPr sz="1600" b="1">
+                <a:solidFill>
+                  <a:srgbClr val="102A43"/>
+                </a:solidFill>
+              </a:defRPr>
+            </a:pPr>
+            <a:r>
+              <a:t>🔔 Push alerts (valuables only)</a:t>
+            </a:r>
+          </a:p>
+        </p:txBody>
+      </p:sp>
+      <p:sp>
+        <p:nvSpPr>
+          <p:cNvPr id="5" name="Rounded Rectangle 4"/>
+          <p:cNvSpPr/>
+          <p:nvPr/>
+        </p:nvSpPr>
+        <p:spPr>
+          <a:xfrm>
+            <a:off x="6400800" y="1600200"/>
+            <a:ext cx="5029200" cy="868680"/>
+          </a:xfrm>
+          <a:prstGeom prst="roundRect">
+            <a:avLst/>
+          </a:prstGeom>
+          <a:solidFill>
+            <a:srgbClr val="D6F6F5"/>
+          </a:solidFill>
+          <a:ln w="19050">
+            <a:solidFill>
+              <a:srgbClr val="0EA5A4"/>
+            </a:solidFill>
+          </a:ln>
+        </p:spPr>
+        <p:style>
+          <a:lnRef idx="1">
+            <a:schemeClr val="accent1"/>
+          </a:lnRef>
+          <a:fillRef idx="3">
+            <a:schemeClr val="accent1"/>
+          </a:fillRef>
+          <a:effectRef idx="2">
+            <a:schemeClr val="accent1"/>
+          </a:effectRef>
+          <a:fontRef idx="minor">
+            <a:schemeClr val="lt1"/>
+          </a:fontRef>
+        </p:style>
+        <p:txBody>
+          <a:bodyPr rtlCol="0" anchor="ctr" wrap="square"/>
+          <a:lstStyle/>
+          <a:p>
+            <a:pPr algn="l">
+              <a:defRPr sz="1600" b="1">
+                <a:solidFill>
+                  <a:srgbClr val="102A43"/>
+                </a:solidFill>
+              </a:defRPr>
+            </a:pPr>
+            <a:r>
+              <a:t>🏛️ College SSO integration</a:t>
+            </a:r>
+          </a:p>
+        </p:txBody>
+      </p:sp>
+      <p:sp>
+        <p:nvSpPr>
+          <p:cNvPr id="6" name="Rounded Rectangle 5"/>
+          <p:cNvSpPr/>
+          <p:nvPr/>
+        </p:nvSpPr>
+        <p:spPr>
+          <a:xfrm>
+            <a:off x="914400" y="2926080"/>
+            <a:ext cx="5029200" cy="868680"/>
+          </a:xfrm>
+          <a:prstGeom prst="roundRect">
+            <a:avLst/>
+          </a:prstGeom>
+          <a:solidFill>
+            <a:srgbClr val="E6F0FF"/>
+          </a:solidFill>
+          <a:ln w="19050">
+            <a:solidFill>
+              <a:srgbClr val="0EA5A4"/>
+            </a:solidFill>
+          </a:ln>
+        </p:spPr>
+        <p:style>
+          <a:lnRef idx="1">
+            <a:schemeClr val="accent1"/>
+          </a:lnRef>
+          <a:fillRef idx="3">
+            <a:schemeClr val="accent1"/>
+          </a:fillRef>
+          <a:effectRef idx="2">
+            <a:schemeClr val="accent1"/>
+          </a:effectRef>
+          <a:fontRef idx="minor">
+            <a:schemeClr val="lt1"/>
+          </a:fontRef>
+        </p:style>
+        <p:txBody>
+          <a:bodyPr rtlCol="0" anchor="ctr" wrap="square"/>
+          <a:lstStyle/>
+          <a:p>
+            <a:pPr algn="l">
+              <a:defRPr sz="1600" b="1">
+                <a:solidFill>
+                  <a:srgbClr val="102A43"/>
+                </a:solidFill>
+              </a:defRPr>
+            </a:pPr>
+            <a:r>
+              <a:t>📊 Admin analytics dashboard</a:t>
+            </a:r>
+          </a:p>
+        </p:txBody>
+      </p:sp>
+      <p:sp>
+        <p:nvSpPr>
+          <p:cNvPr id="7" name="Rounded Rectangle 6"/>
+          <p:cNvSpPr/>
+          <p:nvPr/>
+        </p:nvSpPr>
+        <p:spPr>
+          <a:xfrm>
+            <a:off x="6400800" y="2926080"/>
+            <a:ext cx="5029200" cy="868680"/>
+          </a:xfrm>
+          <a:prstGeom prst="roundRect">
+            <a:avLst/>
+          </a:prstGeom>
+          <a:solidFill>
+            <a:srgbClr val="D6F6F5"/>
+          </a:solidFill>
+          <a:ln w="19050">
+            <a:solidFill>
+              <a:srgbClr val="0EA5A4"/>
+            </a:solidFill>
+          </a:ln>
+        </p:spPr>
+        <p:style>
+          <a:lnRef idx="1">
+            <a:schemeClr val="accent1"/>
+          </a:lnRef>
+          <a:fillRef idx="3">
+            <a:schemeClr val="accent1"/>
+          </a:fillRef>
+          <a:effectRef idx="2">
+            <a:schemeClr val="accent1"/>
+          </a:effectRef>
+          <a:fontRef idx="minor">
+            <a:schemeClr val="lt1"/>
+          </a:fontRef>
+        </p:style>
+        <p:txBody>
+          <a:bodyPr rtlCol="0" anchor="ctr" wrap="square"/>
+          <a:lstStyle/>
+          <a:p>
+            <a:pPr algn="l">
+              <a:defRPr sz="1600" b="1">
+                <a:solidFill>
+                  <a:srgbClr val="102A43"/>
+                </a:solidFill>
+              </a:defRPr>
+            </a:pPr>
+            <a:r>
+              <a:t>🌐 Multi-campus support</a:t>
+            </a:r>
+          </a:p>
+        </p:txBody>
+      </p:sp>
+      <p:sp>
+        <p:nvSpPr>
+          <p:cNvPr id="8" name="Rounded Rectangle 7"/>
+          <p:cNvSpPr/>
+          <p:nvPr/>
+        </p:nvSpPr>
+        <p:spPr>
+          <a:xfrm>
+            <a:off x="914400" y="4251960"/>
+            <a:ext cx="5029200" cy="868680"/>
+          </a:xfrm>
+          <a:prstGeom prst="roundRect">
+            <a:avLst/>
+          </a:prstGeom>
+          <a:solidFill>
+            <a:srgbClr val="E6F0FF"/>
+          </a:solidFill>
+          <a:ln w="19050">
+            <a:solidFill>
+              <a:srgbClr val="0EA5A4"/>
+            </a:solidFill>
+          </a:ln>
+        </p:spPr>
+        <p:style>
+          <a:lnRef idx="1">
+            <a:schemeClr val="accent1"/>
+          </a:lnRef>
+          <a:fillRef idx="3">
+            <a:schemeClr val="accent1"/>
+          </a:fillRef>
+          <a:effectRef idx="2">
+            <a:schemeClr val="accent1"/>
+          </a:effectRef>
+          <a:fontRef idx="minor">
+            <a:schemeClr val="lt1"/>
+          </a:fontRef>
+        </p:style>
+        <p:txBody>
+          <a:bodyPr rtlCol="0" anchor="ctr" wrap="square"/>
+          <a:lstStyle/>
+          <a:p>
+            <a:pPr algn="l">
+              <a:defRPr sz="1600" b="1">
+                <a:solidFill>
+                  <a:srgbClr val="102A43"/>
+                </a:solidFill>
+              </a:defRPr>
+            </a:pPr>
+            <a:r>
+              <a:t>🏷️ QR tags on items</a:t>
+            </a:r>
+          </a:p>
+        </p:txBody>
+      </p:sp>
+      <p:sp>
+        <p:nvSpPr>
+          <p:cNvPr id="9" name="Rounded Rectangle 8"/>
+          <p:cNvSpPr/>
+          <p:nvPr/>
+        </p:nvSpPr>
+        <p:spPr>
+          <a:xfrm>
+            <a:off x="6400800" y="4251960"/>
+            <a:ext cx="5029200" cy="868680"/>
+          </a:xfrm>
+          <a:prstGeom prst="roundRect">
+            <a:avLst/>
+          </a:prstGeom>
+          <a:solidFill>
+            <a:srgbClr val="D6F6F5"/>
+          </a:solidFill>
+          <a:ln w="19050">
+            <a:solidFill>
+              <a:srgbClr val="0EA5A4"/>
+            </a:solidFill>
+          </a:ln>
+        </p:spPr>
+        <p:style>
+          <a:lnRef idx="1">
+            <a:schemeClr val="accent1"/>
+          </a:lnRef>
+          <a:fillRef idx="3">
+            <a:schemeClr val="accent1"/>
+          </a:fillRef>
+          <a:effectRef idx="2">
+            <a:schemeClr val="accent1"/>
+          </a:effectRef>
+          <a:fontRef idx="minor">
+            <a:schemeClr val="lt1"/>
+          </a:fontRef>
+        </p:style>
+        <p:txBody>
+          <a:bodyPr rtlCol="0" anchor="ctr" wrap="square"/>
+          <a:lstStyle/>
+          <a:p>
+            <a:pPr algn="l">
+              <a:defRPr sz="1600" b="1">
+                <a:solidFill>
+                  <a:srgbClr val="102A43"/>
+                </a:solidFill>
+              </a:defRPr>
+            </a:pPr>
+            <a:r>
+              <a:t>🛡️ Auto-blur ID card photos</a:t>
             </a:r>
           </a:p>
         </p:txBody>
@@ -4924,6 +8593,127 @@
   <p:clrMapOvr>
     <a:masterClrMapping/>
   </p:clrMapOvr>
+  <p:transition spd="med">
+    <p:fade/>
+  </p:transition>
+  <p:timing>
+    <p:tnLst>
+      <p:par>
+        <p:cTn id="0" dur="indefinite" restart="never" nodeType="tmRoot">
+          <p:childTnLst>
+            <p:seq concurrent="1" nextAc="seek">
+              <p:cTn id="1" dur="indefinite" nodeType="mainSeq">
+                <p:childTnLst>
+                  <p:par>
+                    <p:cTn id="104" dur="indefinite" nodeType="clickEffect">
+                      <p:stCondLst>
+                        <p:cond delay="0"/>
+                      </p:stCondLst>
+                      <p:childTnLst>
+                        <p:animEffect transition="in" filter="fade">
+                          <p:cBhvr>
+                            <p:cTn dur="600" fill="hold"/>
+                            <p:tgtEl>
+                              <p:spTgt spid="4"/>
+                            </p:tgtEl>
+                          </p:cBhvr>
+                        </p:animEffect>
+                      </p:childTnLst>
+                    </p:cTn>
+                  </p:par>
+                  <p:par>
+                    <p:cTn id="105" dur="indefinite" nodeType="withEffect">
+                      <p:stCondLst>
+                        <p:cond delay="200"/>
+                      </p:stCondLst>
+                      <p:childTnLst>
+                        <p:animEffect transition="in" filter="fade">
+                          <p:cBhvr>
+                            <p:cTn dur="600" fill="hold"/>
+                            <p:tgtEl>
+                              <p:spTgt spid="5"/>
+                            </p:tgtEl>
+                          </p:cBhvr>
+                        </p:animEffect>
+                      </p:childTnLst>
+                    </p:cTn>
+                  </p:par>
+                  <p:par>
+                    <p:cTn id="106" dur="indefinite" nodeType="withEffect">
+                      <p:stCondLst>
+                        <p:cond delay="200"/>
+                      </p:stCondLst>
+                      <p:childTnLst>
+                        <p:animEffect transition="in" filter="fade">
+                          <p:cBhvr>
+                            <p:cTn dur="600" fill="hold"/>
+                            <p:tgtEl>
+                              <p:spTgt spid="6"/>
+                            </p:tgtEl>
+                          </p:cBhvr>
+                        </p:animEffect>
+                      </p:childTnLst>
+                    </p:cTn>
+                  </p:par>
+                  <p:par>
+                    <p:cTn id="107" dur="indefinite" nodeType="withEffect">
+                      <p:stCondLst>
+                        <p:cond delay="200"/>
+                      </p:stCondLst>
+                      <p:childTnLst>
+                        <p:animEffect transition="in" filter="fade">
+                          <p:cBhvr>
+                            <p:cTn dur="600" fill="hold"/>
+                            <p:tgtEl>
+                              <p:spTgt spid="7"/>
+                            </p:tgtEl>
+                          </p:cBhvr>
+                        </p:animEffect>
+                      </p:childTnLst>
+                    </p:cTn>
+                  </p:par>
+                  <p:par>
+                    <p:cTn id="108" dur="indefinite" nodeType="withEffect">
+                      <p:stCondLst>
+                        <p:cond delay="200"/>
+                      </p:stCondLst>
+                      <p:childTnLst>
+                        <p:animEffect transition="in" filter="fade">
+                          <p:cBhvr>
+                            <p:cTn dur="600" fill="hold"/>
+                            <p:tgtEl>
+                              <p:spTgt spid="8"/>
+                            </p:tgtEl>
+                          </p:cBhvr>
+                        </p:animEffect>
+                      </p:childTnLst>
+                    </p:cTn>
+                  </p:par>
+                  <p:par>
+                    <p:cTn id="109" dur="indefinite" nodeType="withEffect">
+                      <p:stCondLst>
+                        <p:cond delay="200"/>
+                      </p:stCondLst>
+                      <p:childTnLst>
+                        <p:animEffect transition="in" filter="fade">
+                          <p:cBhvr>
+                            <p:cTn dur="600" fill="hold"/>
+                            <p:tgtEl>
+                              <p:spTgt spid="9"/>
+                            </p:tgtEl>
+                          </p:cBhvr>
+                        </p:animEffect>
+                      </p:childTnLst>
+                    </p:cTn>
+                  </p:par>
+                </p:childTnLst>
+              </p:cTn>
+            </p:seq>
+          </p:childTnLst>
+        </p:cTn>
+      </p:par>
+    </p:tnLst>
+  </p:timing>
 </p:sld>
 </file>
 
@@ -4933,7 +8723,7 @@
     <p:bg>
       <p:bgPr>
         <a:solidFill>
-          <a:srgbClr val="FFFFFF"/>
+          <a:srgbClr val="1B4D89"/>
         </a:solidFill>
         <a:effectLst/>
       </p:bgPr>
@@ -4947,51 +8737,44 @@
       <p:grpSpPr/>
       <p:sp>
         <p:nvSpPr>
-          <p:cNvPr id="2" name="TextBox 1"/>
-          <p:cNvSpPr txBox="1"/>
-          <p:nvPr/>
-        </p:nvSpPr>
-        <p:spPr>
-          <a:xfrm>
-            <a:off x="548640" y="320040"/>
-            <a:ext cx="11064240" cy="1097280"/>
+          <p:cNvPr id="2" name="Rectangle 1"/>
+          <p:cNvSpPr/>
+          <p:nvPr/>
+        </p:nvSpPr>
+        <p:spPr>
+          <a:xfrm>
+            <a:off x="0" y="0"/>
+            <a:ext cx="12191695" cy="109728"/>
           </a:xfrm>
           <a:prstGeom prst="rect">
             <a:avLst/>
           </a:prstGeom>
-          <a:noFill/>
-        </p:spPr>
-        <p:txBody>
-          <a:bodyPr wrap="square">
-            <a:spAutoFit/>
-          </a:bodyPr>
-          <a:lstStyle/>
-          <a:p>
-            <a:pPr>
-              <a:defRPr sz="3200" b="1">
-                <a:solidFill>
-                  <a:srgbClr val="1B4D89"/>
-                </a:solidFill>
-              </a:defRPr>
-            </a:pPr>
-            <a:r>
-              <a:t>Slide 8: Demo / Prototype</a:t>
-            </a:r>
-          </a:p>
-          <a:p>
-            <a:pPr>
-              <a:spcBef>
-                <a:spcPts val="600"/>
-              </a:spcBef>
-              <a:defRPr sz="1600">
-                <a:solidFill>
-                  <a:srgbClr val="627D98"/>
-                </a:solidFill>
-              </a:defRPr>
-            </a:pPr>
-            <a:r>
-              <a:t>Live application — FoundYourThing</a:t>
-            </a:r>
+          <a:solidFill>
+            <a:srgbClr val="0EA5A4"/>
+          </a:solidFill>
+          <a:ln>
+            <a:noFill/>
+          </a:ln>
+        </p:spPr>
+        <p:style>
+          <a:lnRef idx="1">
+            <a:schemeClr val="accent1"/>
+          </a:lnRef>
+          <a:fillRef idx="3">
+            <a:schemeClr val="accent1"/>
+          </a:fillRef>
+          <a:effectRef idx="2">
+            <a:schemeClr val="accent1"/>
+          </a:effectRef>
+          <a:fontRef idx="minor">
+            <a:schemeClr val="lt1"/>
+          </a:fontRef>
+        </p:style>
+        <p:txBody>
+          <a:bodyPr rtlCol="0" anchor="ctr"/>
+          <a:lstStyle/>
+          <a:p>
+            <a:pPr algn="ctr"/>
           </a:p>
         </p:txBody>
       </p:sp>
@@ -5003,151 +8786,8 @@
         </p:nvSpPr>
         <p:spPr>
           <a:xfrm>
-            <a:off x="685800" y="1417320"/>
-            <a:ext cx="10789920" cy="5029200"/>
-          </a:xfrm>
-          <a:prstGeom prst="rect">
-            <a:avLst/>
-          </a:prstGeom>
-          <a:noFill/>
-        </p:spPr>
-        <p:txBody>
-          <a:bodyPr wrap="square">
-            <a:spAutoFit/>
-          </a:bodyPr>
-          <a:lstStyle/>
-          <a:p>
-            <a:pPr>
-              <a:spcAft>
-                <a:spcPts val="1000"/>
-              </a:spcAft>
-              <a:defRPr sz="1900">
-                <a:solidFill>
-                  <a:srgbClr val="102A43"/>
-                </a:solidFill>
-              </a:defRPr>
-            </a:pPr>
-            <a:r>
-              <a:t>Working prototype with:</a:t>
-            </a:r>
-          </a:p>
-          <a:p>
-            <a:pPr>
-              <a:spcAft>
-                <a:spcPts val="1000"/>
-              </a:spcAft>
-              <a:defRPr sz="1900">
-                <a:solidFill>
-                  <a:srgbClr val="102A43"/>
-                </a:solidFill>
-              </a:defRPr>
-            </a:pPr>
-            <a:r>
-              <a:t>  • User registration &amp; login (VTU ID)</a:t>
-            </a:r>
-          </a:p>
-          <a:p>
-            <a:pPr>
-              <a:spcAft>
-                <a:spcPts val="1000"/>
-              </a:spcAft>
-              <a:defRPr sz="1900">
-                <a:solidFill>
-                  <a:srgbClr val="102A43"/>
-                </a:solidFill>
-              </a:defRPr>
-            </a:pPr>
-            <a:r>
-              <a:t>  • Report lost / found valuable items with photo</a:t>
-            </a:r>
-          </a:p>
-          <a:p>
-            <a:pPr>
-              <a:spcAft>
-                <a:spcPts val="1000"/>
-              </a:spcAft>
-              <a:defRPr sz="1900">
-                <a:solidFill>
-                  <a:srgbClr val="102A43"/>
-                </a:solidFill>
-              </a:defRPr>
-            </a:pPr>
-            <a:r>
-              <a:t>  • Campus feed &amp; item details</a:t>
-            </a:r>
-          </a:p>
-          <a:p>
-            <a:pPr>
-              <a:spcAft>
-                <a:spcPts val="1000"/>
-              </a:spcAft>
-              <a:defRPr sz="1900">
-                <a:solidFill>
-                  <a:srgbClr val="102A43"/>
-                </a:solidFill>
-              </a:defRPr>
-            </a:pPr>
-            <a:r>
-              <a:t>  • AI match suggestions with confidence score</a:t>
-            </a:r>
-          </a:p>
-          <a:p>
-            <a:pPr>
-              <a:spcAft>
-                <a:spcPts val="1000"/>
-              </a:spcAft>
-              <a:defRPr sz="1900">
-                <a:solidFill>
-                  <a:srgbClr val="102A43"/>
-                </a:solidFill>
-              </a:defRPr>
-            </a:pPr>
-            <a:r>
-              <a:t>  • Privacy-gated contact request flow</a:t>
-            </a:r>
-          </a:p>
-          <a:p>
-            <a:pPr>
-              <a:spcAft>
-                <a:spcPts val="1000"/>
-              </a:spcAft>
-              <a:defRPr sz="1900">
-                <a:solidFill>
-                  <a:srgbClr val="102A43"/>
-                </a:solidFill>
-              </a:defRPr>
-            </a:pPr>
-            <a:r>
-              <a:t>Platform: Expo mobile app + web browser + FastAPI backend</a:t>
-            </a:r>
-          </a:p>
-          <a:p>
-            <a:pPr>
-              <a:spcAft>
-                <a:spcPts val="1000"/>
-              </a:spcAft>
-              <a:defRPr sz="1900">
-                <a:solidFill>
-                  <a:srgbClr val="102A43"/>
-                </a:solidFill>
-              </a:defRPr>
-            </a:pPr>
-            <a:r>
-              <a:t>Next slides: Application screenshots (add your prototype photos below)</a:t>
-            </a:r>
-          </a:p>
-        </p:txBody>
-      </p:sp>
-      <p:sp>
-        <p:nvSpPr>
-          <p:cNvPr id="4" name="TextBox 3"/>
-          <p:cNvSpPr txBox="1"/>
-          <p:nvPr/>
-        </p:nvSpPr>
-        <p:spPr>
-          <a:xfrm>
-            <a:off x="548640" y="6263640"/>
-            <a:ext cx="10972800" cy="365760"/>
+            <a:off x="594360" y="320040"/>
+            <a:ext cx="10972800" cy="1005840"/>
           </a:xfrm>
           <a:prstGeom prst="rect">
             <a:avLst/>
@@ -5161,14 +8801,545 @@
           <a:lstStyle/>
           <a:p>
             <a:pPr>
-              <a:defRPr sz="1100">
-                <a:solidFill>
-                  <a:srgbClr val="627D98"/>
+              <a:defRPr sz="3000" b="1">
+                <a:solidFill>
+                  <a:srgbClr val="FFFFFF"/>
                 </a:solidFill>
               </a:defRPr>
             </a:pPr>
             <a:r>
-              <a:t>FoundYourThing  |  Demo available on request</a:t>
+              <a:t>Demo / Prototype</a:t>
+            </a:r>
+          </a:p>
+          <a:p>
+            <a:pPr>
+              <a:defRPr sz="1400">
+                <a:solidFill>
+                  <a:srgbClr val="D6F6F5"/>
+                </a:solidFill>
+              </a:defRPr>
+            </a:pPr>
+            <a:r>
+              <a:t>Working application today</a:t>
+            </a:r>
+          </a:p>
+        </p:txBody>
+      </p:sp>
+      <p:sp>
+        <p:nvSpPr>
+          <p:cNvPr id="4" name="Rounded Rectangle 3"/>
+          <p:cNvSpPr/>
+          <p:nvPr/>
+        </p:nvSpPr>
+        <p:spPr>
+          <a:xfrm>
+            <a:off x="822960" y="2103120"/>
+            <a:ext cx="1965960" cy="1097280"/>
+          </a:xfrm>
+          <a:prstGeom prst="roundRect">
+            <a:avLst/>
+          </a:prstGeom>
+          <a:solidFill>
+            <a:srgbClr val="FFFFFF"/>
+          </a:solidFill>
+          <a:ln>
+            <a:noFill/>
+          </a:ln>
+        </p:spPr>
+        <p:style>
+          <a:lnRef idx="1">
+            <a:schemeClr val="accent1"/>
+          </a:lnRef>
+          <a:fillRef idx="3">
+            <a:schemeClr val="accent1"/>
+          </a:fillRef>
+          <a:effectRef idx="2">
+            <a:schemeClr val="accent1"/>
+          </a:effectRef>
+          <a:fontRef idx="minor">
+            <a:schemeClr val="lt1"/>
+          </a:fontRef>
+        </p:style>
+        <p:txBody>
+          <a:bodyPr rtlCol="0" anchor="ctr" wrap="square"/>
+          <a:lstStyle/>
+          <a:p>
+            <a:pPr algn="ctr">
+              <a:defRPr sz="1500" b="1">
+                <a:solidFill>
+                  <a:srgbClr val="1B4D89"/>
+                </a:solidFill>
+              </a:defRPr>
+            </a:pPr>
+            <a:r>
+              <a:t>Login</a:t>
+            </a:r>
+          </a:p>
+        </p:txBody>
+      </p:sp>
+      <p:sp>
+        <p:nvSpPr>
+          <p:cNvPr id="5" name="Right Arrow 4"/>
+          <p:cNvSpPr/>
+          <p:nvPr/>
+        </p:nvSpPr>
+        <p:spPr>
+          <a:xfrm>
+            <a:off x="2834640" y="2514600"/>
+            <a:ext cx="320040" cy="201168"/>
+          </a:xfrm>
+          <a:prstGeom prst="rightArrow">
+            <a:avLst/>
+          </a:prstGeom>
+          <a:solidFill>
+            <a:srgbClr val="0EA5A4"/>
+          </a:solidFill>
+          <a:ln>
+            <a:noFill/>
+          </a:ln>
+        </p:spPr>
+        <p:style>
+          <a:lnRef idx="1">
+            <a:schemeClr val="accent1"/>
+          </a:lnRef>
+          <a:fillRef idx="3">
+            <a:schemeClr val="accent1"/>
+          </a:fillRef>
+          <a:effectRef idx="2">
+            <a:schemeClr val="accent1"/>
+          </a:effectRef>
+          <a:fontRef idx="minor">
+            <a:schemeClr val="lt1"/>
+          </a:fontRef>
+        </p:style>
+        <p:txBody>
+          <a:bodyPr rtlCol="0" anchor="ctr"/>
+          <a:lstStyle/>
+          <a:p>
+            <a:pPr algn="ctr"/>
+          </a:p>
+        </p:txBody>
+      </p:sp>
+      <p:sp>
+        <p:nvSpPr>
+          <p:cNvPr id="6" name="Rounded Rectangle 5"/>
+          <p:cNvSpPr/>
+          <p:nvPr/>
+        </p:nvSpPr>
+        <p:spPr>
+          <a:xfrm>
+            <a:off x="3063240" y="2103120"/>
+            <a:ext cx="1965960" cy="1097280"/>
+          </a:xfrm>
+          <a:prstGeom prst="roundRect">
+            <a:avLst/>
+          </a:prstGeom>
+          <a:solidFill>
+            <a:srgbClr val="FFFFFF"/>
+          </a:solidFill>
+          <a:ln>
+            <a:noFill/>
+          </a:ln>
+        </p:spPr>
+        <p:style>
+          <a:lnRef idx="1">
+            <a:schemeClr val="accent1"/>
+          </a:lnRef>
+          <a:fillRef idx="3">
+            <a:schemeClr val="accent1"/>
+          </a:fillRef>
+          <a:effectRef idx="2">
+            <a:schemeClr val="accent1"/>
+          </a:effectRef>
+          <a:fontRef idx="minor">
+            <a:schemeClr val="lt1"/>
+          </a:fontRef>
+        </p:style>
+        <p:txBody>
+          <a:bodyPr rtlCol="0" anchor="ctr" wrap="square"/>
+          <a:lstStyle/>
+          <a:p>
+            <a:pPr algn="ctr">
+              <a:defRPr sz="1500" b="1">
+                <a:solidFill>
+                  <a:srgbClr val="1B4D89"/>
+                </a:solidFill>
+              </a:defRPr>
+            </a:pPr>
+            <a:r>
+              <a:t>Report</a:t>
+            </a:r>
+          </a:p>
+        </p:txBody>
+      </p:sp>
+      <p:sp>
+        <p:nvSpPr>
+          <p:cNvPr id="7" name="Right Arrow 6"/>
+          <p:cNvSpPr/>
+          <p:nvPr/>
+        </p:nvSpPr>
+        <p:spPr>
+          <a:xfrm>
+            <a:off x="5074920" y="2514600"/>
+            <a:ext cx="320040" cy="201168"/>
+          </a:xfrm>
+          <a:prstGeom prst="rightArrow">
+            <a:avLst/>
+          </a:prstGeom>
+          <a:solidFill>
+            <a:srgbClr val="0EA5A4"/>
+          </a:solidFill>
+          <a:ln>
+            <a:noFill/>
+          </a:ln>
+        </p:spPr>
+        <p:style>
+          <a:lnRef idx="1">
+            <a:schemeClr val="accent1"/>
+          </a:lnRef>
+          <a:fillRef idx="3">
+            <a:schemeClr val="accent1"/>
+          </a:fillRef>
+          <a:effectRef idx="2">
+            <a:schemeClr val="accent1"/>
+          </a:effectRef>
+          <a:fontRef idx="minor">
+            <a:schemeClr val="lt1"/>
+          </a:fontRef>
+        </p:style>
+        <p:txBody>
+          <a:bodyPr rtlCol="0" anchor="ctr"/>
+          <a:lstStyle/>
+          <a:p>
+            <a:pPr algn="ctr"/>
+          </a:p>
+        </p:txBody>
+      </p:sp>
+      <p:sp>
+        <p:nvSpPr>
+          <p:cNvPr id="8" name="Rounded Rectangle 7"/>
+          <p:cNvSpPr/>
+          <p:nvPr/>
+        </p:nvSpPr>
+        <p:spPr>
+          <a:xfrm>
+            <a:off x="5303520" y="2103120"/>
+            <a:ext cx="1965960" cy="1097280"/>
+          </a:xfrm>
+          <a:prstGeom prst="roundRect">
+            <a:avLst/>
+          </a:prstGeom>
+          <a:solidFill>
+            <a:srgbClr val="FFFFFF"/>
+          </a:solidFill>
+          <a:ln>
+            <a:noFill/>
+          </a:ln>
+        </p:spPr>
+        <p:style>
+          <a:lnRef idx="1">
+            <a:schemeClr val="accent1"/>
+          </a:lnRef>
+          <a:fillRef idx="3">
+            <a:schemeClr val="accent1"/>
+          </a:fillRef>
+          <a:effectRef idx="2">
+            <a:schemeClr val="accent1"/>
+          </a:effectRef>
+          <a:fontRef idx="minor">
+            <a:schemeClr val="lt1"/>
+          </a:fontRef>
+        </p:style>
+        <p:txBody>
+          <a:bodyPr rtlCol="0" anchor="ctr" wrap="square"/>
+          <a:lstStyle/>
+          <a:p>
+            <a:pPr algn="ctr">
+              <a:defRPr sz="1500" b="1">
+                <a:solidFill>
+                  <a:srgbClr val="1B4D89"/>
+                </a:solidFill>
+              </a:defRPr>
+            </a:pPr>
+            <a:r>
+              <a:t>Feed</a:t>
+            </a:r>
+          </a:p>
+        </p:txBody>
+      </p:sp>
+      <p:sp>
+        <p:nvSpPr>
+          <p:cNvPr id="9" name="Right Arrow 8"/>
+          <p:cNvSpPr/>
+          <p:nvPr/>
+        </p:nvSpPr>
+        <p:spPr>
+          <a:xfrm>
+            <a:off x="7315200" y="2514600"/>
+            <a:ext cx="320040" cy="201168"/>
+          </a:xfrm>
+          <a:prstGeom prst="rightArrow">
+            <a:avLst/>
+          </a:prstGeom>
+          <a:solidFill>
+            <a:srgbClr val="0EA5A4"/>
+          </a:solidFill>
+          <a:ln>
+            <a:noFill/>
+          </a:ln>
+        </p:spPr>
+        <p:style>
+          <a:lnRef idx="1">
+            <a:schemeClr val="accent1"/>
+          </a:lnRef>
+          <a:fillRef idx="3">
+            <a:schemeClr val="accent1"/>
+          </a:fillRef>
+          <a:effectRef idx="2">
+            <a:schemeClr val="accent1"/>
+          </a:effectRef>
+          <a:fontRef idx="minor">
+            <a:schemeClr val="lt1"/>
+          </a:fontRef>
+        </p:style>
+        <p:txBody>
+          <a:bodyPr rtlCol="0" anchor="ctr"/>
+          <a:lstStyle/>
+          <a:p>
+            <a:pPr algn="ctr"/>
+          </a:p>
+        </p:txBody>
+      </p:sp>
+      <p:sp>
+        <p:nvSpPr>
+          <p:cNvPr id="10" name="Rounded Rectangle 9"/>
+          <p:cNvSpPr/>
+          <p:nvPr/>
+        </p:nvSpPr>
+        <p:spPr>
+          <a:xfrm>
+            <a:off x="7543800" y="2103120"/>
+            <a:ext cx="1965960" cy="1097280"/>
+          </a:xfrm>
+          <a:prstGeom prst="roundRect">
+            <a:avLst/>
+          </a:prstGeom>
+          <a:solidFill>
+            <a:srgbClr val="FFFFFF"/>
+          </a:solidFill>
+          <a:ln>
+            <a:noFill/>
+          </a:ln>
+        </p:spPr>
+        <p:style>
+          <a:lnRef idx="1">
+            <a:schemeClr val="accent1"/>
+          </a:lnRef>
+          <a:fillRef idx="3">
+            <a:schemeClr val="accent1"/>
+          </a:fillRef>
+          <a:effectRef idx="2">
+            <a:schemeClr val="accent1"/>
+          </a:effectRef>
+          <a:fontRef idx="minor">
+            <a:schemeClr val="lt1"/>
+          </a:fontRef>
+        </p:style>
+        <p:txBody>
+          <a:bodyPr rtlCol="0" anchor="ctr" wrap="square"/>
+          <a:lstStyle/>
+          <a:p>
+            <a:pPr algn="ctr">
+              <a:defRPr sz="1500" b="1">
+                <a:solidFill>
+                  <a:srgbClr val="1B4D89"/>
+                </a:solidFill>
+              </a:defRPr>
+            </a:pPr>
+            <a:r>
+              <a:t>AI Match</a:t>
+            </a:r>
+          </a:p>
+        </p:txBody>
+      </p:sp>
+      <p:sp>
+        <p:nvSpPr>
+          <p:cNvPr id="11" name="Right Arrow 10"/>
+          <p:cNvSpPr/>
+          <p:nvPr/>
+        </p:nvSpPr>
+        <p:spPr>
+          <a:xfrm>
+            <a:off x="9555480" y="2514600"/>
+            <a:ext cx="320040" cy="201168"/>
+          </a:xfrm>
+          <a:prstGeom prst="rightArrow">
+            <a:avLst/>
+          </a:prstGeom>
+          <a:solidFill>
+            <a:srgbClr val="0EA5A4"/>
+          </a:solidFill>
+          <a:ln>
+            <a:noFill/>
+          </a:ln>
+        </p:spPr>
+        <p:style>
+          <a:lnRef idx="1">
+            <a:schemeClr val="accent1"/>
+          </a:lnRef>
+          <a:fillRef idx="3">
+            <a:schemeClr val="accent1"/>
+          </a:fillRef>
+          <a:effectRef idx="2">
+            <a:schemeClr val="accent1"/>
+          </a:effectRef>
+          <a:fontRef idx="minor">
+            <a:schemeClr val="lt1"/>
+          </a:fontRef>
+        </p:style>
+        <p:txBody>
+          <a:bodyPr rtlCol="0" anchor="ctr"/>
+          <a:lstStyle/>
+          <a:p>
+            <a:pPr algn="ctr"/>
+          </a:p>
+        </p:txBody>
+      </p:sp>
+      <p:sp>
+        <p:nvSpPr>
+          <p:cNvPr id="12" name="Rounded Rectangle 11"/>
+          <p:cNvSpPr/>
+          <p:nvPr/>
+        </p:nvSpPr>
+        <p:spPr>
+          <a:xfrm>
+            <a:off x="9784080" y="2103120"/>
+            <a:ext cx="1965960" cy="1097280"/>
+          </a:xfrm>
+          <a:prstGeom prst="roundRect">
+            <a:avLst/>
+          </a:prstGeom>
+          <a:solidFill>
+            <a:srgbClr val="FFFFFF"/>
+          </a:solidFill>
+          <a:ln>
+            <a:noFill/>
+          </a:ln>
+        </p:spPr>
+        <p:style>
+          <a:lnRef idx="1">
+            <a:schemeClr val="accent1"/>
+          </a:lnRef>
+          <a:fillRef idx="3">
+            <a:schemeClr val="accent1"/>
+          </a:fillRef>
+          <a:effectRef idx="2">
+            <a:schemeClr val="accent1"/>
+          </a:effectRef>
+          <a:fontRef idx="minor">
+            <a:schemeClr val="lt1"/>
+          </a:fontRef>
+        </p:style>
+        <p:txBody>
+          <a:bodyPr rtlCol="0" anchor="ctr" wrap="square"/>
+          <a:lstStyle/>
+          <a:p>
+            <a:pPr algn="ctr">
+              <a:defRPr sz="1500" b="1">
+                <a:solidFill>
+                  <a:srgbClr val="1B4D89"/>
+                </a:solidFill>
+              </a:defRPr>
+            </a:pPr>
+            <a:r>
+              <a:t>Claim</a:t>
+            </a:r>
+          </a:p>
+        </p:txBody>
+      </p:sp>
+      <p:sp>
+        <p:nvSpPr>
+          <p:cNvPr id="13" name="Rounded Rectangle 12"/>
+          <p:cNvSpPr/>
+          <p:nvPr/>
+        </p:nvSpPr>
+        <p:spPr>
+          <a:xfrm>
+            <a:off x="3474720" y="3657600"/>
+            <a:ext cx="5212080" cy="1371600"/>
+          </a:xfrm>
+          <a:prstGeom prst="roundRect">
+            <a:avLst/>
+          </a:prstGeom>
+          <a:solidFill>
+            <a:srgbClr val="0EA5A4"/>
+          </a:solidFill>
+          <a:ln>
+            <a:noFill/>
+          </a:ln>
+        </p:spPr>
+        <p:style>
+          <a:lnRef idx="1">
+            <a:schemeClr val="accent1"/>
+          </a:lnRef>
+          <a:fillRef idx="3">
+            <a:schemeClr val="accent1"/>
+          </a:fillRef>
+          <a:effectRef idx="2">
+            <a:schemeClr val="accent1"/>
+          </a:effectRef>
+          <a:fontRef idx="minor">
+            <a:schemeClr val="lt1"/>
+          </a:fontRef>
+        </p:style>
+        <p:txBody>
+          <a:bodyPr rtlCol="0" anchor="ctr" wrap="square"/>
+          <a:lstStyle/>
+          <a:p>
+            <a:pPr algn="ctr">
+              <a:defRPr sz="1800" b="1">
+                <a:solidFill>
+                  <a:srgbClr val="FFFFFF"/>
+                </a:solidFill>
+              </a:defRPr>
+            </a:pPr>
+            <a:r>
+              <a:t>Expo Mobile  +  Web  +  Python FastAPI</a:t>
+            </a:r>
+          </a:p>
+        </p:txBody>
+      </p:sp>
+      <p:sp>
+        <p:nvSpPr>
+          <p:cNvPr id="14" name="TextBox 13"/>
+          <p:cNvSpPr txBox="1"/>
+          <p:nvPr/>
+        </p:nvSpPr>
+        <p:spPr>
+          <a:xfrm>
+            <a:off x="2286000" y="5349240"/>
+            <a:ext cx="7589520" cy="548640"/>
+          </a:xfrm>
+          <a:prstGeom prst="rect">
+            <a:avLst/>
+          </a:prstGeom>
+          <a:noFill/>
+        </p:spPr>
+        <p:txBody>
+          <a:bodyPr wrap="none">
+            <a:spAutoFit/>
+          </a:bodyPr>
+          <a:lstStyle/>
+          <a:p>
+            <a:pPr algn="ctr">
+              <a:defRPr sz="1600">
+                <a:solidFill>
+                  <a:srgbClr val="FFFFFF"/>
+                </a:solidFill>
+              </a:defRPr>
+            </a:pPr>
+            <a:r>
+              <a:t>Next slides → Add your prototype screenshots</a:t>
             </a:r>
           </a:p>
         </p:txBody>
@@ -5178,6 +9349,133 @@
   <p:clrMapOvr>
     <a:masterClrMapping/>
   </p:clrMapOvr>
+  <p:transition spd="med">
+    <p:fade/>
+  </p:transition>
+  <p:timing>
+    <p:tnLst>
+      <p:par>
+        <p:cTn id="0" dur="indefinite" restart="never" nodeType="tmRoot">
+          <p:childTnLst>
+            <p:seq concurrent="1" nextAc="seek">
+              <p:cTn id="1" dur="indefinite" nodeType="mainSeq">
+                <p:childTnLst>
+                  <p:par>
+                    <p:cTn id="104" dur="indefinite" nodeType="clickEffect">
+                      <p:stCondLst>
+                        <p:cond delay="0"/>
+                      </p:stCondLst>
+                      <p:childTnLst>
+                        <p:animEffect transition="in" filter="fade">
+                          <p:cBhvr>
+                            <p:cTn dur="600" fill="hold"/>
+                            <p:tgtEl>
+                              <p:spTgt spid="4"/>
+                            </p:tgtEl>
+                          </p:cBhvr>
+                        </p:animEffect>
+                      </p:childTnLst>
+                    </p:cTn>
+                  </p:par>
+                  <p:par>
+                    <p:cTn id="106" dur="indefinite" nodeType="withEffect">
+                      <p:stCondLst>
+                        <p:cond delay="200"/>
+                      </p:stCondLst>
+                      <p:childTnLst>
+                        <p:animEffect transition="in" filter="fade">
+                          <p:cBhvr>
+                            <p:cTn dur="600" fill="hold"/>
+                            <p:tgtEl>
+                              <p:spTgt spid="6"/>
+                            </p:tgtEl>
+                          </p:cBhvr>
+                        </p:animEffect>
+                      </p:childTnLst>
+                    </p:cTn>
+                  </p:par>
+                  <p:par>
+                    <p:cTn id="108" dur="indefinite" nodeType="withEffect">
+                      <p:stCondLst>
+                        <p:cond delay="200"/>
+                      </p:stCondLst>
+                      <p:childTnLst>
+                        <p:animEffect transition="in" filter="fade">
+                          <p:cBhvr>
+                            <p:cTn dur="600" fill="hold"/>
+                            <p:tgtEl>
+                              <p:spTgt spid="8"/>
+                            </p:tgtEl>
+                          </p:cBhvr>
+                        </p:animEffect>
+                      </p:childTnLst>
+                    </p:cTn>
+                  </p:par>
+                  <p:par>
+                    <p:cTn id="110" dur="indefinite" nodeType="withEffect">
+                      <p:stCondLst>
+                        <p:cond delay="200"/>
+                      </p:stCondLst>
+                      <p:childTnLst>
+                        <p:animEffect transition="in" filter="fade">
+                          <p:cBhvr>
+                            <p:cTn dur="600" fill="hold"/>
+                            <p:tgtEl>
+                              <p:spTgt spid="10"/>
+                            </p:tgtEl>
+                          </p:cBhvr>
+                        </p:animEffect>
+                      </p:childTnLst>
+                    </p:cTn>
+                  </p:par>
+                  <p:par>
+                    <p:cTn id="112" dur="indefinite" nodeType="withEffect">
+                      <p:stCondLst>
+                        <p:cond delay="200"/>
+                      </p:stCondLst>
+                      <p:childTnLst>
+                        <p:animEffect transition="in" filter="fade">
+                          <p:cBhvr>
+                            <p:cTn dur="600" fill="hold"/>
+                            <p:tgtEl>
+                              <p:spTgt spid="12"/>
+                            </p:tgtEl>
+                          </p:cBhvr>
+                        </p:animEffect>
+                      </p:childTnLst>
+                    </p:cTn>
+                  </p:par>
+                </p:childTnLst>
+              </p:cTn>
+            </p:seq>
+            <p:seq concurrent="1" nextAc="seek">
+              <p:cTn id="1" dur="indefinite" nodeType="mainSeq">
+                <p:childTnLst>
+                  <p:par>
+                    <p:cTn id="113" dur="indefinite" nodeType="clickEffect">
+                      <p:stCondLst>
+                        <p:cond delay="0"/>
+                      </p:stCondLst>
+                      <p:childTnLst>
+                        <p:animEffect transition="in" filter="fade">
+                          <p:cBhvr>
+                            <p:cTn dur="600" fill="hold"/>
+                            <p:tgtEl>
+                              <p:spTgt spid="13"/>
+                            </p:tgtEl>
+                          </p:cBhvr>
+                        </p:animEffect>
+                      </p:childTnLst>
+                    </p:cTn>
+                  </p:par>
+                </p:childTnLst>
+              </p:cTn>
+            </p:seq>
+          </p:childTnLst>
+        </p:cTn>
+      </p:par>
+    </p:tnLst>
+  </p:timing>
 </p:sld>
 </file>
 
@@ -5201,14 +9499,57 @@
       <p:grpSpPr/>
       <p:sp>
         <p:nvSpPr>
-          <p:cNvPr id="2" name="TextBox 1"/>
+          <p:cNvPr id="2" name="Rectangle 1"/>
+          <p:cNvSpPr/>
+          <p:nvPr/>
+        </p:nvSpPr>
+        <p:spPr>
+          <a:xfrm>
+            <a:off x="0" y="0"/>
+            <a:ext cx="12191695" cy="109728"/>
+          </a:xfrm>
+          <a:prstGeom prst="rect">
+            <a:avLst/>
+          </a:prstGeom>
+          <a:solidFill>
+            <a:srgbClr val="0EA5A4"/>
+          </a:solidFill>
+          <a:ln>
+            <a:noFill/>
+          </a:ln>
+        </p:spPr>
+        <p:style>
+          <a:lnRef idx="1">
+            <a:schemeClr val="accent1"/>
+          </a:lnRef>
+          <a:fillRef idx="3">
+            <a:schemeClr val="accent1"/>
+          </a:fillRef>
+          <a:effectRef idx="2">
+            <a:schemeClr val="accent1"/>
+          </a:effectRef>
+          <a:fontRef idx="minor">
+            <a:schemeClr val="lt1"/>
+          </a:fontRef>
+        </p:style>
+        <p:txBody>
+          <a:bodyPr rtlCol="0" anchor="ctr"/>
+          <a:lstStyle/>
+          <a:p>
+            <a:pPr algn="ctr"/>
+          </a:p>
+        </p:txBody>
+      </p:sp>
+      <p:sp>
+        <p:nvSpPr>
+          <p:cNvPr id="3" name="TextBox 2"/>
           <p:cNvSpPr txBox="1"/>
           <p:nvPr/>
         </p:nvSpPr>
         <p:spPr>
           <a:xfrm>
-            <a:off x="548640" y="320040"/>
-            <a:ext cx="11064240" cy="1097280"/>
+            <a:off x="594360" y="320040"/>
+            <a:ext cx="10972800" cy="1005840"/>
           </a:xfrm>
           <a:prstGeom prst="rect">
             <a:avLst/>
@@ -5216,60 +9557,103 @@
           <a:noFill/>
         </p:spPr>
         <p:txBody>
-          <a:bodyPr wrap="square">
+          <a:bodyPr wrap="none">
             <a:spAutoFit/>
           </a:bodyPr>
           <a:lstStyle/>
           <a:p>
             <a:pPr>
-              <a:defRPr sz="3200" b="1">
+              <a:defRPr sz="3000" b="1">
                 <a:solidFill>
                   <a:srgbClr val="1B4D89"/>
                 </a:solidFill>
               </a:defRPr>
             </a:pPr>
             <a:r>
-              <a:t>Slide 9: Prototype Screenshots</a:t>
+              <a:t>Prototype Screenshot 1</a:t>
             </a:r>
           </a:p>
           <a:p>
             <a:pPr>
-              <a:spcBef>
-                <a:spcPts val="600"/>
-              </a:spcBef>
-              <a:defRPr sz="1600">
+              <a:defRPr sz="1400">
                 <a:solidFill>
                   <a:srgbClr val="627D98"/>
                 </a:solidFill>
               </a:defRPr>
             </a:pPr>
             <a:r>
-              <a:t>Insert your app photos here</a:t>
-            </a:r>
-          </a:p>
-        </p:txBody>
-      </p:sp>
-      <p:sp>
-        <p:nvSpPr>
-          <p:cNvPr id="3" name="Rectangle 2"/>
+              <a:t>Insert your app image here</a:t>
+            </a:r>
+          </a:p>
+        </p:txBody>
+      </p:sp>
+      <p:sp>
+        <p:nvSpPr>
+          <p:cNvPr id="4" name="Rounded Rectangle 3"/>
           <p:cNvSpPr/>
           <p:nvPr/>
         </p:nvSpPr>
         <p:spPr>
           <a:xfrm>
-            <a:off x="1097280" y="1645920"/>
-            <a:ext cx="9966960" cy="4389120"/>
-          </a:xfrm>
-          <a:prstGeom prst="rect">
+            <a:off x="1371600" y="1508760"/>
+            <a:ext cx="9418320" cy="4434840"/>
+          </a:xfrm>
+          <a:prstGeom prst="roundRect">
             <a:avLst/>
           </a:prstGeom>
           <a:solidFill>
             <a:srgbClr val="FFFFFF"/>
+          </a:solidFill>
+          <a:ln w="19050">
+            <a:solidFill>
+              <a:srgbClr val="0EA5A4"/>
+            </a:solidFill>
+          </a:ln>
+        </p:spPr>
+        <p:style>
+          <a:lnRef idx="1">
+            <a:schemeClr val="accent1"/>
+          </a:lnRef>
+          <a:fillRef idx="3">
+            <a:schemeClr val="accent1"/>
+          </a:fillRef>
+          <a:effectRef idx="2">
+            <a:schemeClr val="accent1"/>
+          </a:effectRef>
+          <a:fontRef idx="minor">
+            <a:schemeClr val="lt1"/>
+          </a:fontRef>
+        </p:style>
+        <p:txBody>
+          <a:bodyPr rtlCol="0" anchor="ctr"/>
+          <a:lstStyle/>
+          <a:p>
+            <a:pPr algn="ctr"/>
+          </a:p>
+        </p:txBody>
+      </p:sp>
+      <p:sp>
+        <p:nvSpPr>
+          <p:cNvPr id="5" name="Rectangle 4"/>
+          <p:cNvSpPr/>
+          <p:nvPr/>
+        </p:nvSpPr>
+        <p:spPr>
+          <a:xfrm>
+            <a:off x="1691640" y="1828800"/>
+            <a:ext cx="8778240" cy="3794760"/>
+          </a:xfrm>
+          <a:prstGeom prst="rect">
+            <a:avLst/>
+          </a:prstGeom>
+          <a:solidFill>
+            <a:srgbClr val="E6F0FF"/>
           </a:solidFill>
           <a:ln w="25400">
             <a:solidFill>
               <a:srgbClr val="0EA5A4"/>
             </a:solidFill>
+            <a:prstDash val="sysDash"/>
           </a:ln>
         </p:spPr>
         <p:style>
@@ -5296,54 +9680,14 @@
       </p:sp>
       <p:sp>
         <p:nvSpPr>
-          <p:cNvPr id="4" name="TextBox 3"/>
+          <p:cNvPr id="6" name="TextBox 5"/>
           <p:cNvSpPr txBox="1"/>
           <p:nvPr/>
         </p:nvSpPr>
         <p:spPr>
           <a:xfrm>
-            <a:off x="1280160" y="3200400"/>
-            <a:ext cx="9601200" cy="1097280"/>
-          </a:xfrm>
-          <a:prstGeom prst="rect">
-            <a:avLst/>
-          </a:prstGeom>
-          <a:noFill/>
-        </p:spPr>
-        <p:txBody>
-          <a:bodyPr wrap="none" anchor="ctr">
-            <a:spAutoFit/>
-          </a:bodyPr>
-          <a:lstStyle/>
-          <a:p>
-            <a:pPr algn="ctr">
-              <a:defRPr sz="2200">
-                <a:solidFill>
-                  <a:srgbClr val="627D98"/>
-                </a:solidFill>
-              </a:defRPr>
-            </a:pPr>
-            <a:r>
-              <a:t>[ ADD SCREENSHOT HERE ]</a:t>
-            </a:r>
-            <a:br/>
-            <a:br/>
-            <a:r>
-              <a:t>Suggested: Login / Home / Report Lost / AI Match / Claim Flow</a:t>
-            </a:r>
-          </a:p>
-        </p:txBody>
-      </p:sp>
-      <p:sp>
-        <p:nvSpPr>
-          <p:cNvPr id="5" name="TextBox 4"/>
-          <p:cNvSpPr txBox="1"/>
-          <p:nvPr/>
-        </p:nvSpPr>
-        <p:spPr>
-          <a:xfrm>
-            <a:off x="548640" y="6263640"/>
-            <a:ext cx="10972800" cy="365760"/>
+            <a:off x="2286000" y="3291840"/>
+            <a:ext cx="7589520" cy="1097280"/>
           </a:xfrm>
           <a:prstGeom prst="rect">
             <a:avLst/>
@@ -5356,21 +9700,59 @@
           </a:bodyPr>
           <a:lstStyle/>
           <a:p>
-            <a:pPr>
-              <a:defRPr sz="1100">
+            <a:pPr algn="ctr">
+              <a:defRPr sz="2800" b="1">
                 <a:solidFill>
                   <a:srgbClr val="627D98"/>
                 </a:solidFill>
               </a:defRPr>
             </a:pPr>
             <a:r>
-              <a:t>FoundYourThing  |  Replace placeholder with your prototype image</a:t>
+              <a:t>[ ADD PHOTO HERE ]</a:t>
+            </a:r>
+          </a:p>
+        </p:txBody>
+      </p:sp>
+      <p:sp>
+        <p:nvSpPr>
+          <p:cNvPr id="7" name="TextBox 6"/>
+          <p:cNvSpPr txBox="1"/>
+          <p:nvPr/>
+        </p:nvSpPr>
+        <p:spPr>
+          <a:xfrm>
+            <a:off x="2286000" y="5989320"/>
+            <a:ext cx="7589520" cy="365760"/>
+          </a:xfrm>
+          <a:prstGeom prst="rect">
+            <a:avLst/>
+          </a:prstGeom>
+          <a:noFill/>
+        </p:spPr>
+        <p:txBody>
+          <a:bodyPr wrap="none">
+            <a:spAutoFit/>
+          </a:bodyPr>
+          <a:lstStyle/>
+          <a:p>
+            <a:pPr algn="ctr">
+              <a:defRPr sz="1300">
+                <a:solidFill>
+                  <a:srgbClr val="627D98"/>
+                </a:solidFill>
+              </a:defRPr>
+            </a:pPr>
+            <a:r>
+              <a:t>Home screen · Report Lost · Login</a:t>
             </a:r>
           </a:p>
         </p:txBody>
       </p:sp>
     </p:spTree>
   </p:cSld>
+  <p:transition spd="med">
+    <p:fade/>
+  </p:transition>
   <p:clrMapOvr>
     <a:masterClrMapping/>
   </p:clrMapOvr>
